--- a/demo_site/files/slides/lecture2_analysis1_inka.pptx
+++ b/demo_site/files/slides/lecture2_analysis1_inka.pptx
@@ -5,61 +5,63 @@
     <p:sldMasterId id="2147483648" r:id="rId1"/>
   </p:sldMasterIdLst>
   <p:notesMasterIdLst>
-    <p:notesMasterId r:id="rId33"/>
+    <p:notesMasterId r:id="rId35"/>
   </p:notesMasterIdLst>
   <p:sldIdLst>
     <p:sldId id="256" r:id="rId2"/>
     <p:sldId id="422" r:id="rId3"/>
-    <p:sldId id="270" r:id="rId4"/>
-    <p:sldId id="417" r:id="rId5"/>
-    <p:sldId id="418" r:id="rId6"/>
-    <p:sldId id="419" r:id="rId7"/>
-    <p:sldId id="420" r:id="rId8"/>
-    <p:sldId id="274" r:id="rId9"/>
-    <p:sldId id="273" r:id="rId10"/>
-    <p:sldId id="261" r:id="rId11"/>
-    <p:sldId id="314" r:id="rId12"/>
-    <p:sldId id="353" r:id="rId13"/>
-    <p:sldId id="389" r:id="rId14"/>
-    <p:sldId id="390" r:id="rId15"/>
-    <p:sldId id="319" r:id="rId16"/>
-    <p:sldId id="316" r:id="rId17"/>
-    <p:sldId id="391" r:id="rId18"/>
-    <p:sldId id="392" r:id="rId19"/>
-    <p:sldId id="423" r:id="rId20"/>
-    <p:sldId id="424" r:id="rId21"/>
-    <p:sldId id="411" r:id="rId22"/>
-    <p:sldId id="425" r:id="rId23"/>
-    <p:sldId id="426" r:id="rId24"/>
-    <p:sldId id="394" r:id="rId25"/>
-    <p:sldId id="398" r:id="rId26"/>
-    <p:sldId id="427" r:id="rId27"/>
-    <p:sldId id="397" r:id="rId28"/>
-    <p:sldId id="410" r:id="rId29"/>
-    <p:sldId id="416" r:id="rId30"/>
-    <p:sldId id="415" r:id="rId31"/>
-    <p:sldId id="421" r:id="rId32"/>
+    <p:sldId id="267" r:id="rId4"/>
+    <p:sldId id="268" r:id="rId5"/>
+    <p:sldId id="279" r:id="rId6"/>
+    <p:sldId id="428" r:id="rId7"/>
+    <p:sldId id="429" r:id="rId8"/>
+    <p:sldId id="430" r:id="rId9"/>
+    <p:sldId id="431" r:id="rId10"/>
+    <p:sldId id="274" r:id="rId11"/>
+    <p:sldId id="273" r:id="rId12"/>
+    <p:sldId id="261" r:id="rId13"/>
+    <p:sldId id="314" r:id="rId14"/>
+    <p:sldId id="353" r:id="rId15"/>
+    <p:sldId id="389" r:id="rId16"/>
+    <p:sldId id="390" r:id="rId17"/>
+    <p:sldId id="319" r:id="rId18"/>
+    <p:sldId id="316" r:id="rId19"/>
+    <p:sldId id="391" r:id="rId20"/>
+    <p:sldId id="392" r:id="rId21"/>
+    <p:sldId id="423" r:id="rId22"/>
+    <p:sldId id="424" r:id="rId23"/>
+    <p:sldId id="411" r:id="rId24"/>
+    <p:sldId id="425" r:id="rId25"/>
+    <p:sldId id="426" r:id="rId26"/>
+    <p:sldId id="394" r:id="rId27"/>
+    <p:sldId id="398" r:id="rId28"/>
+    <p:sldId id="427" r:id="rId29"/>
+    <p:sldId id="397" r:id="rId30"/>
+    <p:sldId id="410" r:id="rId31"/>
+    <p:sldId id="416" r:id="rId32"/>
+    <p:sldId id="415" r:id="rId33"/>
+    <p:sldId id="421" r:id="rId34"/>
   </p:sldIdLst>
   <p:sldSz cx="12192000" cy="6858000"/>
   <p:notesSz cx="6858000" cy="9144000"/>
   <p:embeddedFontLst>
     <p:embeddedFont>
       <p:font typeface="Cambria Math" panose="02040503050406030204" pitchFamily="18" charset="0"/>
-      <p:regular r:id="rId34"/>
+      <p:regular r:id="rId36"/>
     </p:embeddedFont>
     <p:embeddedFont>
       <p:font typeface="Cascadia Code" panose="020B0609020000020004" pitchFamily="49" charset="0"/>
-      <p:regular r:id="rId35"/>
-      <p:bold r:id="rId36"/>
-      <p:italic r:id="rId37"/>
-      <p:boldItalic r:id="rId38"/>
+      <p:regular r:id="rId37"/>
+      <p:bold r:id="rId38"/>
+      <p:italic r:id="rId39"/>
+      <p:boldItalic r:id="rId40"/>
     </p:embeddedFont>
     <p:embeddedFont>
       <p:font typeface="Consolas" panose="020B0609020204030204" pitchFamily="49" charset="0"/>
-      <p:regular r:id="rId39"/>
-      <p:bold r:id="rId40"/>
-      <p:italic r:id="rId41"/>
-      <p:boldItalic r:id="rId42"/>
+      <p:regular r:id="rId41"/>
+      <p:bold r:id="rId42"/>
+      <p:italic r:id="rId43"/>
+      <p:boldItalic r:id="rId44"/>
     </p:embeddedFont>
   </p:embeddedFontLst>
   <p:defaultTextStyle>
@@ -171,6 +173,332 @@
 </p188:authorLst>
 </file>
 
+<file path=ppt/ink/ink1.xml><?xml version="1.0" encoding="utf-8"?>
+<inkml:ink xmlns:inkml="http://www.w3.org/2003/InkML">
+  <inkml:definitions>
+    <inkml:context xml:id="ctx0">
+      <inkml:inkSource xml:id="inkSrc0">
+        <inkml:traceFormat>
+          <inkml:channel name="X" type="integer" max="3968" units="cm"/>
+          <inkml:channel name="Y" type="integer" max="2240" units="cm"/>
+          <inkml:channel name="T" type="integer" max="2.14748E9" units="dev"/>
+        </inkml:traceFormat>
+        <inkml:channelProperties>
+          <inkml:channelProperty channel="X" name="resolution" value="128.41425" units="1/cm"/>
+          <inkml:channelProperty channel="Y" name="resolution" value="128.73563" units="1/cm"/>
+          <inkml:channelProperty channel="T" name="resolution" value="1" units="1/dev"/>
+        </inkml:channelProperties>
+      </inkml:inkSource>
+      <inkml:timestamp xml:id="ts0" timeString="2026-04-01T19:40:14.142"/>
+    </inkml:context>
+    <inkml:brush xml:id="br0">
+      <inkml:brushProperty name="width" value="0.05292" units="cm"/>
+      <inkml:brushProperty name="height" value="0.05292" units="cm"/>
+      <inkml:brushProperty name="color" value="#FF0000"/>
+    </inkml:brush>
+  </inkml:definitions>
+  <inkml:trace contextRef="#ctx0" brushRef="#br0">7400 5485 0,'0'0'0,"0"0"0,0 0 0,0 0 0,-9 9 0,1 8 15,-9 8 1,-9 9 0,0 17-1,1 0-15,-1 9 16,1 8-16,-1 0 15,-8 0 1,17-8 0,0-18-16,8 1 15,9-1 1,0-8-16,9-8 0,8 8 16,8-9-1,27 1 1,24-1-1,18-25-15,26 0 16,-1-8 0,9-1-16,17-8 15,35-17-15,25-8 0,16-1 16,10-8 15,-1 0-31,1 17 16,-9 9-1,0 25-15,-18 8 16,-33 9 0,8 0-16,-8 0 15,-34 9 1,-35-9-16,-8 0 16,0-9-1,-26 1-15,-25-1 16,-18-8-1,-8 9-15,-8-9 16,-1 0 0,1-9-16,8-8 15,-8-25 1,-1-26-16,-8 34 16</inkml:trace>
+  <inkml:trace contextRef="#ctx0" brushRef="#br0" timeOffset="3622.27">9551 4371 0,'0'0'0,"0"0"0,0 0 16,0 0-16,0-8 16,0-1-1,17-16-15,8-18 16,26-8-1,9 0-15,-17 0 16,17 0 0,42-8-16,26 8 15,0 8-15,9-8 16,42-8 0,9-1-16,17 0 15,25 9 1,-51 17-1,-17 26-15,52 16 16,-44 18-16,-33 8 16,8 8-1,-8 9 1,-18-8 0,-25-17-16,0-1 15,-26 1-15,-17-9 16,-16-9-1,-10 1-15,-16-1 16,-1-8 0,1 9-16,-9-18 15,-9 1-15,1-1 16</inkml:trace>
+  <inkml:trace contextRef="#ctx0" brushRef="#br0" timeOffset="3887.22">12478 3555 0,'0'0'0,"0"0"0,0 0 15,17 8 1,26 9 0,17 17-16,16 0 15,18 9 1,9 16-16,-18 1 15,-17 0-15,-8-9 0,-17-9 32,-18-16-32,-25-9 15,-111 8 1,-204 18 0</inkml:trace>
+  <inkml:trace contextRef="#ctx0" brushRef="#br0" timeOffset="9007.51">2219 5298 0,'0'0'0,"0"0"0,0 0 16,0 0-16,-8 17 15,-1 0 1,-8 17-16,0 9 16,-26 25-1,1 25-15,7 9 16,1-8 0,9-9-1,-1-17-15,-8 0 16,17-17-16,17 0 15,0-8 1,17-18-16,17 1 16,34-18-1,26-16-15,34-1 16,9 1 0,-1-1-16,9 1 15,26 8-15,17 8 31,17 9-31,34 9 16,-9 8 0,1 0-16,8-9 15,-9 1-15,-17-18 16,-25 1-16,-26-1 31,-25-8-31,-35-8 16,-16-9-1,8-9-15,8 1 0,-34-9 16,-8-9 0,-17 1-1,-18-9-15,-16 0 16,-18-9 0,1 35-16</inkml:trace>
+  <inkml:trace contextRef="#ctx0" brushRef="#br0" timeOffset="13219.09">21252 8419 0,'0'0'0,"0"0"16,-9 26-16,-8 25 16,-8 17-1,8-8 1,-9-9-16,1 17 31,-18 17-31,0 0 16,9-9-16,8-16 0,9-9 31,17-9-31,9 1 16,17-18-1,33 9-15,35 9 16,34-18-16,26 1 15,42-1 1,26-16 0,17-1-16,17 1 15,34-1 1,-8 9-16,8 17 0,9-8 31,8 16-31,-8 1 16,-18-9-1,-25 9-15,-42-9 16,-43 0 0,-78-9-16,-33-16 15,-26-1 1,-8 1-16,-18-1 16,1-8-1,0-8-15,-1-1 16,1-25-1,-18-25 1,9-18-16,0-34 16,9 9-16,-1 68 15</inkml:trace>
+  <inkml:trace contextRef="#ctx0" brushRef="#br0" timeOffset="85360.73">22131 5434 0,'0'0'0,"0"0"0,-8 9 15,-9 25 1,-9 42 0,-8 18-16,0 0 15,8-18 1,0-16-16,9-9 16,9-17-16,16-9 15,9 1 1,26-1-1,25 1-15,1-1 16,42-8 0,51 0-16,-9 0 0,10 0 15,16-8 1,17-1 0,35 9-1,16 17 1,-59 0-16,-17 9 15,25 16-15,-43-8 0,-50-17 32,-18 9-17,-25-18-15,-17-8 16,-18-8 0,1-1-16,8-8 0,17-17 15,17-25-15,1-26 31,-18-17-31,0 0 16,9-17 0,-17 8-16,-1 1 15,-8 33 1</inkml:trace>
+  <inkml:trace contextRef="#ctx0" brushRef="#br0" timeOffset="185947.26">5181 4950 0,'0'0'0,"0"0"0,0 0 15,0 0 1,0 0-16,0 0 15,0 0 1,0 0 0,0 0-16,-9 8 15,-8 52 1,9 33-16,8 1 16,0-26-1,8-17-15,9-26 16,0-8-16,43-42 15,34-86 1,-17-8 0,-18 9-16,35-43 15,9 8 1,-35 60-16,-17 34 16,-8 25-1,-17 9-15,-1 17 16,-16 26-16,-18 67 15,-16 35 1,-18 8 0,0-17-16,18-51 15,25-34 1,0-17-16,34-25 16,34-35-1,9-16 1,-9-1-16,26-16 15,-17 16-15,-35 18 16,-16 25 0,-9 17-16,-8 25 15,-1 35 1,-8 76 0,-8 34-16,8-68 15,0-43-15,0-16 16,17-18-16,34 1 31,26-18-31,59-93 16,69-68-1,-43 34-15,-76 68 16,-35 17-16,-8 9 16,-9 33-1,-9 128-15,-8 68 16,0 26-1,26 119 1</inkml:trace>
+  <inkml:trace contextRef="#ctx0" brushRef="#br0" timeOffset="187139.85">3918 4422 0,'0'0'0,"0"0"16,0 0-1,0 0-15,0 0 16,0 0-16,0 0 16,0 0-1,0 0-15,0 0 16,25-17-1,43-25 1,69-69-16,-9-8 16,-9 17-16,44 0 15,16-17 1,9-17 0,42-9-16,-8 43 15,34 43 1,17-9-16,34-9 15,18-8-15,-52 17 16,102-8 0,-25 25-1,-25 25-15,16 26 16,-42 9 0,93 42-16,-33 8 15,-95 9-15,78 9 16,-43-1-1,-60-8 1,0 9-16,-26 8 16,-17 0-1,-17-9-15,-59-16 16,-35-9 0,-16-9-16,-18-16 15,-26 0 1,1-9-16,-17-9 15,-1 1-15,-8-9 16,0-9-16,-8-8 31,-18-34-31,0-34 0,9-34 16,9 59 0</inkml:trace>
+  <inkml:trace contextRef="#ctx0" brushRef="#br0" timeOffset="187335.64">11480 3257 0,'0'0'0,"0"0"0,0 0 16,0 26-16,0 25 16,17 0-1,17 8-15,17 1 32,17-9-17,18 0-15,-1-9 16,-34 1-16,-17-9 15,-8 8-15,-69 44 16,1-27 0</inkml:trace>
+</inkml:ink>
+</file>
+
+<file path=ppt/ink/ink2.xml><?xml version="1.0" encoding="utf-8"?>
+<inkml:ink xmlns:inkml="http://www.w3.org/2003/InkML">
+  <inkml:definitions>
+    <inkml:context xml:id="ctx0">
+      <inkml:inkSource xml:id="inkSrc0">
+        <inkml:traceFormat>
+          <inkml:channel name="X" type="integer" max="3968" units="cm"/>
+          <inkml:channel name="Y" type="integer" max="2240" units="cm"/>
+          <inkml:channel name="T" type="integer" max="2.14748E9" units="dev"/>
+        </inkml:traceFormat>
+        <inkml:channelProperties>
+          <inkml:channelProperty channel="X" name="resolution" value="128.41425" units="1/cm"/>
+          <inkml:channelProperty channel="Y" name="resolution" value="128.73563" units="1/cm"/>
+          <inkml:channelProperty channel="T" name="resolution" value="1" units="1/dev"/>
+        </inkml:channelProperties>
+      </inkml:inkSource>
+      <inkml:timestamp xml:id="ts0" timeString="2026-04-01T19:44:25.026"/>
+    </inkml:context>
+    <inkml:brush xml:id="br0">
+      <inkml:brushProperty name="width" value="0.05292" units="cm"/>
+      <inkml:brushProperty name="height" value="0.05292" units="cm"/>
+      <inkml:brushProperty name="color" value="#FF0000"/>
+    </inkml:brush>
+  </inkml:definitions>
+  <inkml:trace contextRef="#ctx0" brushRef="#br0">10686 11847 0,'0'0'0,"0"0"0,0 0 0,0 0 16,0 0 0,0 0-16,0 0 15,0 0 1,0 0-16,0 17 16,0 17-1,0 8-15,8 26 16,1 9-1,-9-1-15,0-16 16,0-9 0,8-9-16,9-16 15,0-1 1,26-8-16,17-8 16,25-9-1,1-9-15,-1 1 16,0-1-1,18-8-15,-9 0 16,0 0 0,8 0-16,9 0 15,8 17 1,-25 9-16,17-1 16,0 9-1,17 0 1,17-8-16,9-1 15,0-16-15,8-1 16,0-8 0,-17 0-16,0-8 15,-8 8 1,-9 8 0,-17 1-16,-18 8 15,1-9 1,-25 1-16,-10 8 15,-16-9 1,-17 9-16,-9-8 16,-9-1-16,1 1 15,-1-1 1,1-25-16,-1 9 16</inkml:trace>
+  <inkml:trace contextRef="#ctx0" brushRef="#br0" timeOffset="5910.83">11010 12782 0,'0'0'0,"0"0"0,0 0 15,-8 17 1,-1 9-16,-17 25 16,-8 17-1,9-9-15,8-16 16,8-1-1,9-16-15,26 8 16,16-9 0,35-16-16,34-26 15,43-17 1,16 0-16,-33-9 16,34-16-1,-1 8-15,-16 17 16,17-9-1,-9 9-15,0 9 16,0-1 0,17 18-16,9 8 15,-34 0 1,25 8-16,-17 18 16,-25-1-1,-18 9-15,9 17 16,0 0-1,-34-17-15,-17-8 16,-9-18 0,-8 1-16,-17-18 15,8-8 1,17-17-16,-8-17 16,-17-8-1,-1-9-15,-25-34 16,-17 42-1</inkml:trace>
+  <inkml:trace contextRef="#ctx0" brushRef="#br0" timeOffset="12652.49">15781 14049 0,'0'0'0,"0"0"0,0 0 15,0 0 1,0 0 0,0 0-16,-8 9 15,-1 16 1,-17 18-16,1 25 16,-1-9-1,9-16-15,0-17 16,9-9-1,8-9-15,0 1 16,0-1-16,0 1 16,0-9-1,0 0-15,0 0 16,0 8 0,0-8-16,8 9 15,9-1 1,-8 1-16,8-1 15,0 1 1,0-1 0,9 1-16,16 8 15,9-9-15,9 1 16,0-18 0,0 1-1,-1-1-15,1 1 16,-17-1-1,-1 1-15,1-1 16,17 1 0,8-1-16,0 1 15,1-1 1,16-8-16,-8 0 16,-17 0-1,-1 0-15,27-8 16,-1-1-1,0 9-15,9 0 16,0 0 0,0 0-16,17 0 15,-9 8 1,-8-8-16,-8 17 16,8-8-1,8 8-15,-8 0 16,8 0-1,1 0-15,-1 0 16,18 0 0,-9 0-16,0 0 15,-18 0 1,10 0-16,8 0 16,8 8-1,1-8-15,8 0 16,17-8-16,0-1 15,-17 1 1,17-1-16,-8 1 16,-26 8-1,-9 8-15,-8 1 32,-9 8-32,18-9 15,-1 9-15,1 0 16,-1-8-1,-8 8-15,8-9 16,-8 1 0,0-1-16,-17-8 15,0-8 1,-18-1-16,1 9 16,-9-8-16,1-1 15,-1 1 1,-9-1-1,-7 1-15,-10 8 16,1 0-16,-1 0 16,-8 0-1,-8 0-15,0 0 16,-1 0 0,1 0-1,-9 0-15,0 0 16,0 0-1,0 0-15,0 0 16,0 0 0,0 0-16,0 0 15,0 0 1,0 0-16,0 0 16,0-9-16,0 1 31,0-1-31</inkml:trace>
+  <inkml:trace contextRef="#ctx0" brushRef="#br0" timeOffset="16572.22">15593 14713 0,'0'0'0,"-8"-9"16,8 1-16,-9-1 16,1-8-1,-1 0-15,9 0 16,0 9 0,0 8-1,0 0-15,0 0 16,-8 0-16,-1 17 15,-8 0 1,0 8-16,8-8 16,1-8-1,-1-1 1,9 1-16,-8-1 16,8 1-1,0-9-15,0 0 16,0 0-16,0 0 15,0 0 1,0 0 0,0 8-16,0 1 15,8-1 1,1 1-16,8-1 16,0 1-1,9-1 1,8 1-16,0-1 0,9 1 31,8-1-31,9 1 16,-1-1-16,10-8 15,-1 0-15,9 0 16,17 0-16,8 0 31,9 9-15,-9-9-16,-8 8 0,26 1 15,8-1 1,0 1 0,-17 8-1,8 0-15,26 0 16,-8 8-16,-9-16 0,43-1 16,-1 1-1,-16-18 1,8-8-1,17 9 1,-16-1-16,-10 9 16,35 0-1,0 0-15,-26 0 16,9 0-16,8 9 16,-26-9-1,44 0 1,-1 0-16,-34-26 15,34 1 1,9-1-16,-51 1 16,34-1-1,-1 9-15,-33 0 16,25 17 0,1 0-16,-52 0 15,-26 9 1,9 8-16,-9 0 15,-16-9 1,-35 1-16,-17-1 16,-8-8-1,-9 0-15,-9 0 16,1 0 0,-1 0-16,-8 0 15,0-8 1,9-9-16,-9-17 15,8-34 1,-16 0-16,8 34 16</inkml:trace>
+</inkml:ink>
+</file>
+
+<file path=ppt/ink/ink3.xml><?xml version="1.0" encoding="utf-8"?>
+<inkml:ink xmlns:inkml="http://www.w3.org/2003/InkML">
+  <inkml:definitions>
+    <inkml:context xml:id="ctx0">
+      <inkml:inkSource xml:id="inkSrc0">
+        <inkml:traceFormat>
+          <inkml:channel name="X" type="integer" max="3968" units="cm"/>
+          <inkml:channel name="Y" type="integer" max="2240" units="cm"/>
+          <inkml:channel name="T" type="integer" max="2.14748E9" units="dev"/>
+        </inkml:traceFormat>
+        <inkml:channelProperties>
+          <inkml:channelProperty channel="X" name="resolution" value="128.41425" units="1/cm"/>
+          <inkml:channelProperty channel="Y" name="resolution" value="128.73563" units="1/cm"/>
+          <inkml:channelProperty channel="T" name="resolution" value="1" units="1/dev"/>
+        </inkml:channelProperties>
+      </inkml:inkSource>
+      <inkml:timestamp xml:id="ts0" timeString="2026-04-01T19:46:54.003"/>
+    </inkml:context>
+    <inkml:brush xml:id="br0">
+      <inkml:brushProperty name="width" value="0.05292" units="cm"/>
+      <inkml:brushProperty name="height" value="0.05292" units="cm"/>
+      <inkml:brushProperty name="color" value="#FF0000"/>
+    </inkml:brush>
+  </inkml:definitions>
+  <inkml:trace contextRef="#ctx0" brushRef="#br0">2569 2875 0,'0'0'0,"-9"25"0,1 26 16,-1 34-16,1 9 15,-1-1 1,1-8-1,-1 0 1,1 9-16,8 8 16,0 17-1,0-8-15,17-18 16,0 1-16,8-18 16,18-16-1,43-1-15,16-16 0,34-26 31,61-26-15,25-25-16,8-8 16,18-9-1,-9 8-15,34 1 16,17 8 0,17 8-16,18 9 15,-18 26 1,0 8-16,-17 0 15,-17 0 1,-8 8-16,-9-8 16,-17-8-1,-51-1-15,-18-16 16,-16-1-16,-34 1 16,-44-1-1,-24 1 1,-27-1-16,1 1 15,-9-1 1,0-33-16,17-60 16,26-60-1,34-76-15,34-94 16</inkml:trace>
+  <inkml:trace contextRef="#ctx0" brushRef="#br0" timeOffset="40225.35">22882 2568 0,'0'0'0,"0"0"0,0 0 16,0 0-16,0 0 15,0 0 1,0 17-16,-8 0 15,-9 26 1,-18 8-16,-33 0 16,-43 34-1,-8-8-15,59-9 16,0 8 0,0-16-16,1-9 15,25-17 1,-1-9-1,18-16-15,0-18 16,9 1-16,8-26 16,-9-9-1,9 9-15,0 0 16,-8 17 0,8 0-16,0 9 15,0 8 1,-9 0-16,1 0 15,-18 8 1,-8 18-16,-17 25 16,-26 34-1,26 0 1,17-26-16,16 1 16,1-18-16,26 1 15,25-1 1,34-16-16,43-9 15,-17-9 1,17-8-16,179-8 16</inkml:trace>
+  <inkml:trace contextRef="#ctx0" brushRef="#br0" timeOffset="46333.51">24504 5945 0,'0'0'0,"0"0"0,-9 8 16,-8 9 0,-17 17-16,-34 9 15,-60 8 1,17-9-16,-17-8 15,-111 9 1,60-18-16,33 18 16,-84-1-1,76-8-15,61 0 16,-18-8 0,25-9-16,18-17 15,25-9-15,18-16 16,16-26-1,18-9 1,16 9-16,1 9 16,-1 16-1,-16 9-15,0 9 16,-1 8 0,-8-9-16,-8 1 15,-1-1-15,-17 1 16,-8 8-1,-34 8 1,-9 18-16,26 8 16,17 0-1,0 8-15,0 1 16,16 8 0,10-9-16,16 1 15,69 8-15,77-9 16,153 1-1</inkml:trace>
+  <inkml:trace contextRef="#ctx0" brushRef="#br0" timeOffset="92732.52">11164 4890 0,'0'0'0,"0"0"0,0 0 16,8 0-16,43 9 15,18-9 1,-18-9-16,-17 1 15,43-1 1,25 9 0,1 0-16,-18 17 15,-34-8-15,-8-1 16,-17 9 0,-18 0-16,-8 26 15,-34 16 1,-26 18-16,-17-9 15,9-9 1,34-16-16,-9-1 16,1 1-1,-10-18-15,18 1 16,17-18 0,0 1-16,17-1 15,0-8 1,17 9-16,0-1 15,52 1 1,67-1 0,1-16-16,-69-1 15</inkml:trace>
+  <inkml:trace contextRef="#ctx0" brushRef="#br0" timeOffset="102734.49">20851 6565 0,'0'0'0,"0"0"16,0 0-16,0 0 15,0 0 1,0 0-16,0 0 15,0 0 1,17 0-16,9 0 16,25 17-1,26 0-15,-18 9 16,-16-1 0,-9 18-1,17 8-15,1 9 16,-1-1-16,-9-16 15,18-1 1,17-8-16,0-17 16,-26-8-1,-25-9-15</inkml:trace>
+  <inkml:trace contextRef="#ctx0" brushRef="#br0" timeOffset="102986.63">21517 6310 0,'0'0'0,"-9"0"0,-8 26 31,-34 33-31,-35 26 16,-33 26-16,-52 17 15,26-18 1,60-33-16,42-26 16,35-34-1</inkml:trace>
+  <inkml:trace contextRef="#ctx0" brushRef="#br0" timeOffset="104270.35">22711 6591 0,'0'0'0,"0"0"15,0 0-15,0 0 16,0 0 0,0 0-16,0 0 15,0 0 1,0 0-16,0 0 16,-8 0-1,-9 8-15,-34 9 16,-18 26-1,-7 17-15,16-9 16,-8 25 0,-1 9-16,10 0 15,7-17 1,10-8-16,8-1 16,-1-8-1,18-8-15,9-1 16,16-8-1,26 0-15,18-8 16,24-1 0,27 1-16,8-26 15,8-9 1,-25-16-16,-26-1 16,-25 1-1,-17-1-15,-1-8 16,-16 9-1,-9-1-15,-26-8 16,-76 0 0,-60 17-16,0 26 15,-1 8 1,27 0-16,76-9 16</inkml:trace>
+  <inkml:trace contextRef="#ctx0" brushRef="#br0" timeOffset="161393.82">1613 15682 0,'0'0'0,"-8"9"0,-1 25 0,-8 17 16,8-9 0,-8 9-1,9 0 1,-1 9 0,1-1-16,8-8 15,0-8-15,0-18 16,8 1-1,9-9-15,0 0 16,26-8 0,34-1-16,0 1 15,0-9 1,16-9-16,35 1 16,26-18-1,34-8-15,25-9 16,18-8-1,8 0-15,17 0 16,8 17 0,1 9-16,-18 25 15,-8 17 1,-34 0-16,-17 17 16,-34 0-1,-35-9-15,-25 1 16,-26-18-1,-25 1 1,-17-1-16,-1 1 16,-8-18-16,9-25 15,8-42-15,17-43 16,-25 59 0</inkml:trace>
+  <inkml:trace contextRef="#ctx0" brushRef="#br0" timeOffset="202384.71">20740 4363 0,'0'0'0,"0"0"0,0 0 16,8 0-16,10 17 16,16 17-16,17 8 15,26 9 1,25 9 0,-34-18-16,-8-8 15,25 9-15,1-9 16,-26-9-1,-1 10 1,1-1-16,-17-9 16,-1 1-1,-16-9-15,0-9 16,-9 1-16</inkml:trace>
+  <inkml:trace contextRef="#ctx0" brushRef="#br0" timeOffset="202625.17">21739 3972 0,'0'0'0,"-18"25"0,-24 43 15,-18 26 1,-17 33-16,-34 18 15,9 25 1,-9-9-16,-17-7 16,-9 7-1,-76 77-15</inkml:trace>
+  <inkml:trace contextRef="#ctx0" brushRef="#br0" timeOffset="202974.7">22874 4048 0,'0'0'0,"0"17"0,-9 43 16,1 67-1,-18 9-15,-17-8 16,-8 16-1,-43 146 1</inkml:trace>
+  <inkml:trace contextRef="#ctx0" brushRef="#br0" timeOffset="-185075.73">5027 5919 0,'0'0'0,"0"0"0,0 0 16,9 9 0,8 8-16,0 17 15,-9 0 1,1 17-1,-1 0-15,1-9 16,-9 1 0,0-1-16,8-8 15,-8 0 1,0 17 0,0 0-16,0-8 15,-8-1 1,-1-8-16,1-8 15,8-1-15,0-8 16,0 0 0,0 0-1,17 0-15,0 1 16,9-1 0,8 0-16,17 0 15,9 0 1,25 0-16,17-9 15,18 1 1,-1-1-16,27 9 16,7 9-1,-16-1-15,8 9 16,17 9 0,0-9-16,0 0 15,26 0 1,8-9-16,-25-16 15,25-1 1,18-8-16,-26 9 16,8 8-16,-8-9 0,33-8 31,36-17-15,-1-8-16,-9-9 15,-16 0 1,-1 0-16,-8 17 15,17 0 1,-17 8-16,-9 9 16,-8 0-1,-26 0-15,18 9 16,-1-1 0,-43-8-16,1 0 15,-9 17 1,-17-8-16,-34-1 15,-9 9 1,-8-8-16,0 8 16,0 0-1,-17-9-15,-18 1 16,-16-1 0,-18-8-1,1 0-15,0 0 16,-9 0-16,0 0 15,0-8 1,-9-9-16,0-17 16,-8-9-1,0-16-15,17-26 16,17-17 0,18-9-16,-18 0 15,-17 43 1</inkml:trace>
+  <inkml:trace contextRef="#ctx0" brushRef="#br0" timeOffset="-173182.21">12222 7101 0,'0'0'0,"0"0"15,0 0-15,0 0 16,0 0 0,0 0-16,0 0 0,0 0 15,0 0-15,0 0 31,9 0-15,8 0-16,0 9 16,8-1-16,35-8 15,17-8 1,34-18 0,34 1-16,9-18 0,25 9 15,9 9 1,-9 8-1,0 8 1,9 9-16,-18 0 16,-59 0-1,-34 0-15,-17 0 0,-17 0 32,-18 9-32,-16-9 15,-1 0 1,-8 0-16,0 0 15</inkml:trace>
+  <inkml:trace contextRef="#ctx0" brushRef="#br0" timeOffset="-172843.23">13920 6625 0,'0'0'0,"9"0"16,25 0-16,26 8 16,34 1-1,17-1-15,-17 1 16,-9 0 0,0 8-16,-25 0 15,-17-9 1,-18 1-16,-8-1 15,-8 18 1,-35 42-16,-85 68 16,-42 17-1,-18 0-15,9-43 16,-103 18 0</inkml:trace>
+  <inkml:trace contextRef="#ctx0" brushRef="#br0" timeOffset="-169309.24">6359 6591 0,'0'0'0,"-9"25"0,-8 78 0,-9 24 15,1-42 1,-18-8-16,0-1 15,18-25 1,8-25 0,17-18-1,17-16-15,25-18 0,27-42 32,25-85-32,-9 9 15,-25 33 1,-26-8-16,-9 17 15,-16 51 1,0 17-16,-9 25 16,-18 26-1,-16 60-15,-17 42 16,0 34 0,17-17-16,17-51 15,17-25 1,25-18-16,-8-25 15</inkml:trace>
+</inkml:ink>
+</file>
+
+<file path=ppt/ink/ink4.xml><?xml version="1.0" encoding="utf-8"?>
+<inkml:ink xmlns:inkml="http://www.w3.org/2003/InkML">
+  <inkml:definitions>
+    <inkml:context xml:id="ctx0">
+      <inkml:inkSource xml:id="inkSrc0">
+        <inkml:traceFormat>
+          <inkml:channel name="X" type="integer" max="3968" units="cm"/>
+          <inkml:channel name="Y" type="integer" max="2240" units="cm"/>
+          <inkml:channel name="T" type="integer" max="2.14748E9" units="dev"/>
+        </inkml:traceFormat>
+        <inkml:channelProperties>
+          <inkml:channelProperty channel="X" name="resolution" value="128.41425" units="1/cm"/>
+          <inkml:channelProperty channel="Y" name="resolution" value="128.73563" units="1/cm"/>
+          <inkml:channelProperty channel="T" name="resolution" value="1" units="1/dev"/>
+        </inkml:channelProperties>
+      </inkml:inkSource>
+      <inkml:timestamp xml:id="ts0" timeString="2026-04-01T19:51:45.027"/>
+    </inkml:context>
+    <inkml:brush xml:id="br0">
+      <inkml:brushProperty name="width" value="0.05292" units="cm"/>
+      <inkml:brushProperty name="height" value="0.05292" units="cm"/>
+      <inkml:brushProperty name="color" value="#FF0000"/>
+    </inkml:brush>
+  </inkml:definitions>
+  <inkml:trace contextRef="#ctx0" brushRef="#br0">9260 8521 0,'0'0'0,"0"0"0,-8 9 15,-26 51-15,-9 33 16,-17 43 15,18 17-31,33-17 0,9-68 16</inkml:trace>
+  <inkml:trace contextRef="#ctx0" brushRef="#br0" timeOffset="909.75">1750 8692 0,'0'0'0,"0"0"0,0 0 15,0 0 1,0 0-16</inkml:trace>
+  <inkml:trace contextRef="#ctx0" brushRef="#br0" timeOffset="1958.34">1741 8845 0,'0'0'0,"0"0"0,0 17 15,0 8 1,0 1-16,0-9 15,0-9 1,0 1-16,0-9 16,0-9-1,26-8-15,-1-17 16,9 0 0,-8 9-16,-17 8 15,-18 17 1,-8 0-16,-26 34 15,-42 34 1,-9 17-16,9 17 16,-9 0-1,26-9-15,33-42 16,1-17 0,26-25-16,8-1 15,8-25 1,35-17-16,51-42 15,17-43 1,-34 17-16,-35 42 16,-16 18-1,-18 16-15,1 18 16,-26 33 0,-26 52-16,-34 42 15,1 8 1,-1 1-16,34-52 0,35-42 31,8-17-31,25-42 16,43-35-1,18-16-15,-18-18 16,-17 9 0,-25 43-16,-9 25 15,-8 8 1,-9 18-16,8 25 0,-8 34 15,0 8 1,9 1-16,-1-35 16</inkml:trace>
+  <inkml:trace contextRef="#ctx0" brushRef="#br0" timeOffset="2837.87">10276 8811 0,'0'0'0,"0"0"0,0 0 0,17 0 15,0 0-15,-8 0 16,-1 0 0,9 0-16,0 0 15,18 0 1,-1 17-16,0 0 31,-9 17-31,-16 8 0,-18 18 16,-16 16-1,-1 9-15,-16-17 16,-18 0 0,9-8-1,8-18-15,9-16 0,8-1 16,9 1 15,0-1-31,17 1 16,26 8-16,25-17 0,68-8 15,112-35 17,-61-8-32,-127 25 15</inkml:trace>
+  <inkml:trace contextRef="#ctx0" brushRef="#br0" timeOffset="3805.11">3363 8981 0,'0'0'0,"-17"17"0,-35 34 31,-24 34-31,-18 34 16,-9 17 0,18-9-16,25-16 15,35-26-15,8-25 16,17-26-1,0-17-15,42-17 16,44-43-16,33-42 16,1-34-1,-35-9 1,-34 18-16,-17 25 16,-17 25-1,-8 26-15,-9 0 16,-9 26-1,-16 16-15,-52 35 16,-34 33 0,-8 9-16,42-25 15,43-35 1,16 1 0,1-18-16,9-8 15,16-25-15,27-35 16,24-33-1,18-18-15,0 9 16,-26 43 0,-25 25-16,-9 17 15,-9 17 1,-16 17-16,-18 51 16,-34 59-1,1 26 1,25-25-16,34-69 15</inkml:trace>
+  <inkml:trace contextRef="#ctx0" brushRef="#br0" timeOffset="4679.45">11718 8760 0,'0'0'0,"0"0"0,18 0 16,24 8-16,9 1 15,-8-1-15,-17 1 16,-1-1-1,-8 1-15,-8-1 16,-1 9 0,-8 0-1,-17 26-15,-25 8 16,-9-9-16,16 1 16,10-18-1,8-16-15,17-1 16,0-8-1,8 0 1,26 0-16,9 9 16,0 8-1,8 0-15,0 17 16,-8 0 0,-9 0-16,-26 0 15,-16 8 1,-52 18-16,-102 33 15,-145 61-15</inkml:trace>
+  <inkml:trace contextRef="#ctx0" brushRef="#br0" timeOffset="5550.23">4575 8504 0,'0'0'0,"0"0"0,0 0 31,8 17-31,1 34 16,-26 35-16,-17 33 15,-9 17 1,0 0-16,9-17 15,17-9 1,8-33-16,9-26 16,9-17-1,0-17-15,8-9 16,25-16-16,18-26 16,0-9-1,-18 1 1,-7 8-1,-10 17-15,-16 0 16,-1 8 0,-25 18-16,-34 16 15,-9 18 1,9-1-16,8-8 16,26-25-1,9-1-15,8-16 0,42-43 16,44-51-1,16-26 1,-16 26-16,-35 34 16,-26 43-1,-16 16 1,-18 18-16,-16 50 16,-69 103-1,-43 59-15,43-25 16,43-52-1,34-42-15,17-59 16</inkml:trace>
+  <inkml:trace contextRef="#ctx0" brushRef="#br0" timeOffset="6213.35">12999 8598 0,'0'0'0,"-9"0"0,-8 26 0,-8 16 31,-27 26-31,-16 17 16,0 0 0,17-17-16,16 9 15,10-1-15,8-25 16,25-8-16,35-9 16,51-9-1,17-16 1,0-18-1,0-16-15,-9 8 16,-25 0-16,-9 0 16,-34 8-1</inkml:trace>
+  <inkml:trace contextRef="#ctx0" brushRef="#br0" timeOffset="6440.3">13135 9117 0,'0'0'0,"0"34"0,0 42 15,0 35 1,-17 33-1,-8-16-15,-10-43 16,27-34 0</inkml:trace>
+  <inkml:trace contextRef="#ctx0" brushRef="#br0" timeOffset="7472.08">6359 8802 0,'0'0'0,"-9"0"0,-8 0 15,-34 17 1,-18 17-1,-33 34-15,-35 17 16,27 0-16,7-17 31,35-17-31,34-25 16,17-18-16,8 1 0,18-26 31,59-51-15,51-51-16,-8 0 0,-17 8 15,-17 35 1,-26 33 0,-25 18-16,-18 16 15,-16 18 1,-26 59-16,-52 68 16,-16 25-1,17-16 1,-1-1-16,35-42 15,25-42 1,26-26-16,9-17 16,42-25-1,35-35-15,7-17 16,10-8 0,8-8-16,-34 25 15,-26 17 1,-17 17-16,-8 17 15,-18 0 1,1 17-16,-1 25 16,-8 26-1,34 0-15,-8-25 16</inkml:trace>
+  <inkml:trace contextRef="#ctx0" brushRef="#br0" timeOffset="8366.12">15295 8836 0,'0'0'0,"0"0"0,0 0 16,-17 9 0,-18 16-16,-7 9 15,-1 0 1,-17 9-16,9-1 15,8-8 1,9 0-16,17 0 16,9-8-1,8 8-15,17-9 16,17 1 0,9-1-16,-1 1 15,-16-1 1,-1 9-16,-25 17 15,-25 17 1,-26 26-16,-35-9 16,1-17-1,34-25 1,0-18-16,25-8 16</inkml:trace>
+  <inkml:trace contextRef="#ctx0" brushRef="#br0" timeOffset="8602.31">15150 9040 0,'0'0'0,"8"9"0,26 33 16,26 18-1,42-1 1,26-8 0,-8-25-16,-18-26 15,-50-9-15</inkml:trace>
+  <inkml:trace contextRef="#ctx0" brushRef="#br0" timeOffset="9701.76">7477 8683 0,'0'0'0,"0"0"0,0 9 16,-9 25 0,1 17-16,-18 8 15,0 18 1,-8-9-16,0-17 16,8-17-1,9-9-15,17-16 16,0-1-1,26-16-15,17-26 16,16-17 0,1 0-16,-26 8 15,-8 26 1,-18 0-16,1 17 16,-9 9-1,-26 59-15,-33 51 16,-44 34-1,9 8-15,35-42 16,7-25 0,27-34-16,8-35 15,17-16 1,0-18 0,34-33-16,43-35 15,17-8-15,-1 8 16,-24 26-1,-27 17-15,-16 17 16,-9 0 0,-8 17-16,-9 0 15,0 9-15,-9 16 16,0 9 0,1-8-16,-1-1 15,1-8 1,8-8-1,0-1-15,17-25 16,43-51-16,42-51 16,1-8-1,-44 25 1,-25 42-16,-25 35 16,-35 8-16,-42 34 15,-68 59 1,-35 35-1,43-18-15,34-16 16,51-9 0,26-34-16</inkml:trace>
+  <inkml:trace contextRef="#ctx0" brushRef="#br0" timeOffset="10916.45">1169 10256 0,'-17'0'0,"-8"43"0,-44 59 16,18 34 0,17-17-1,25-8-15,9-1 16,9-8-16,25-8 16,-8-26-1,-1-34-15,9-9 16,1-8-1,24-8 1,52-9-16,26-17 16,17-26-16,50-33 15,27-1 1,33 1 0,9 25-16,52 25 15,-9 9 1,-1-8-16,35 25 15,-34 8 1,68 1-16,-17 8 16,-42-26-16,50 18 15,-25-9 1,-60 8-16,52 9 16,-35 0-1,9 9-15,-43 8 16,-51 0-1,-9-9 1,-76-16-16,-44-9 16,-16 8-1,-25 1-15,-27-1 16,-16-8 0,-1-8-16,1-9 15,-1-17-15,-16-26 16,-1 26-1</inkml:trace>
+  <inkml:trace contextRef="#ctx0" brushRef="#br0" timeOffset="26537.59">1750 6880 0,'0'0'0,"0"0"0,0 0 16,0 0 0,0 0-16,0 0 15,0 0 1,0 0-16,-9 0 16,-8 0-16,-9 0 15,-8 9 1,-8 8-1,-1 0-15,0 8 16,-8 9 0,-17 9-1,0 8-15,8 8 16,-9 26 0,1 9-16,8-9 15,18-9-15,8-25 16,25 9-16,-8 0 15,34-1 1,0 9 0,26-8-16,-9-18 15,9-8 1,25 9-16,-17-18 16,17-16-16,-8-18 15,8-8 1,1-8-16,-27-9 31,-24 8-31,-10 9 16,1 0-16,-18 9 15,-17 8 1,-59 0-16,-17 17 16,33 0-1,1-9 1,0-8-16,42-8 15</inkml:trace>
+  <inkml:trace contextRef="#ctx0" brushRef="#br0" timeOffset="41862.97">22532 17162 0,'0'0'0,"0"0"15,0 0-15,-8 9 16,-18 33-1,-25 43-15,-9 34 16,0 26 0,9 8-16,17 34 15,17-9 1,8 103-16</inkml:trace>
+  <inkml:trace contextRef="#ctx0" brushRef="#br0" timeOffset="42752.64">25443 8513 0,'0'0'0,"0"0"0,-17 34 16,-43 68-1,-51 43 1,-60 50 0,18-25-16,50-68 15,35-25 1,34-43-16,25-17 16,52-17-1,93-34-15,61-43 16,-1-33-1,-8-1 1,-52 26-16,-50 26 0,-35 16 16,-25 26-16,-18 9 31,1 8-15,-35 51-16,-68 102 15,-25 17-15,25-34 16,17-34-1,34-43 1,26-33-16,9-9 16,16-25-1,43-9-15,43-35 16,26 10 0,-35 25-16,-51 8 15</inkml:trace>
+  <inkml:trace contextRef="#ctx0" brushRef="#br0" timeOffset="43542.81">19972 15189 0,'0'0'0,"0"0"0,0 0 15,0 0 1,-9 17-16,9 17 16,0 0-1,0 0-15,17 0 0,43 9 16,25-1 0,1-16-1,8 8-15,-18 0 16,-16 8-1,-17 9 1,-18 26-16,-33 42 16,-43 42-1,-52 18-15,-8-26 16,0-17-16,9-34 16,25-34-1,9-25 1,25-18-16,9 1 15,26-18 1,8-8-16,17-17 16,42-17-1,52-8-15,26 8 0,-1 8 16,10 35 0,-10 16-1,1 26-15,-1-8 16,-68-26-1</inkml:trace>
+  <inkml:trace contextRef="#ctx0" brushRef="#br0" timeOffset="44522.83">27687 10656 0,'0'0'0,"0"0"0,0 0 31,-8 9-31,-1 8 16,-16 17-16,-1 8 15,-8 1 1,17-18-16,0 1 15,8-18-15,9 1 16,0-9 0,9-9-1,42-25-15,17-8 16,9-18 0,-17 1-16,-26 16 15,-17 18-15,-8 16 16,-26 9-16,-26 9 31,-34 25-31,9-9 16,25 1-1,17-18 1,9 1-16,17-9 16,17-17-1,52-43-15,42-16 16,0 8-16,-35 25 15,-24 17 1,-27 18 0,-16 8-16,-26 34 15,-26 43 1,-51 50-16,-25 1 16,8-35-1,60-50-15</inkml:trace>
+  <inkml:trace contextRef="#ctx0" brushRef="#br0" timeOffset="45276.7">19383 13063 0,'0'0'0,"8"0"15,35-9-15,42 1 16,26-9 0,-8 17-1,-9 0-15,-18 0 16,-16 8-16,-9 9 16,-16 9-16,-27 16 15,-25 35 1,-34 16-16,-17-7 15,8-27 1,-26-8 0,10-25-16,33-18 15,9-16 1,17-1-16,0 1 16,17-1-1,8-8-15,9 0 16,17 0-16,1 0 15,7 17 1,9 34 0,-16 26-16,-18 50 15,-34 35 1,-43 8-16,-17-17 16,9-51-16,17-34 15,25-26 1</inkml:trace>
+  <inkml:trace contextRef="#ctx0" brushRef="#br0" timeOffset="46038.59">28379 13046 0,'-17'8'0,"-35"26"0,-41 34 16,7 9-16,9-18 15,35-25 1,16-16-16,9-10 16,8 1-1,9-1-15,9-16 16,34-18-1,25-17 1,0 1-16,1 8 16,-35 17-1,-17 17-15,-9 8 16,-25 43-16,-25 43 16,-10 0-1,10-26 1,8-26-16,16-16 15,1-18 1,17 1-16,0-9 16,9-9-16,17 1 15,25-9 1,-9 17 0,1 0-16,-9 0 15,-8 8-15,-18 1 16,-8-9-1</inkml:trace>
+  <inkml:trace contextRef="#ctx0" brushRef="#br0" timeOffset="46598.3">20202 10120 0,'0'0'0,"0"0"0,0 9 31,0 25-15,-8 42-16,-26 26 15,-9 17 1,0 9-16,9 8 16,17-17-1,17-25-15,0-26 0,26 0 16,33-9-16,10-25 31,7-8-15,10-26-16,8-17 15,25-26 1,-16-16-16,-27-1 16,-50 35-1</inkml:trace>
+  <inkml:trace contextRef="#ctx0" brushRef="#br0" timeOffset="46770.18">20484 10571 0,'0'0'0,"-34"60"0,-35 127 15,1 25 1,17-25 0,17-8-16,51 17 15,34 118-15</inkml:trace>
+  <inkml:trace contextRef="#ctx0" brushRef="#br0" timeOffset="47730.09">27517 15878 0,'0'0'0,"-9"-9"0,1 1 16,-18-18-1,0 9 1,-8 0 0,-34 9-16,-9 16 15,0 26 1,9 17-16,25 0 0,18-8 31,25-18-15,17-8-16,34-8 15,26-9-15,0-26 16,0 1 0,-18-1-1,-16 1-15,-17 8 16,-18 17-16,1 0 15,-18 0 1,-8 0 0,-26 25-16,-42 9 15,8 9-15,17-1 16,18-16 0,25-9-16,8-9 15,9-8 1,9-17-16,42-25 15,26-35 1,-9 9-16,-25 17 16,-18 17-1,-16 9 1,-1 8-16,-16 8 16,-18 9-16,-42 17 15,0 17 1,8 9-16,17-1 15,18 1 1,16-9 0,9-9-16,17 1 15,26-18-15,-18 1 16</inkml:trace>
+  <inkml:trace contextRef="#ctx0" brushRef="#br0" timeOffset="48444.34">21892 8947 0,'0'0'0,"0"0"0,0 0 16,0 8 0,-8 9-16,-1 26 31,-8 8-31,-9 8 16,9-8-1,0-17-15,17-8 16,0-1-1,17-8-15,9 9 16,17-1 0,8 1-16,0-9 15,-8 8 1,-18-8-16,1 9 16,-9 25-1,-8-8-15,-18-1 16,0-8-1,-16-8-15,-26-18 16,16-8 0</inkml:trace>
+  <inkml:trace contextRef="#ctx0" brushRef="#br0" timeOffset="48620.75">22148 8989 0,'9'0'0,"76"17"16,137 26-16,85 33 15,43 9 1,51-42-16,0-26 16</inkml:trace>
+  <inkml:trace contextRef="#ctx0" brushRef="#br0" timeOffset="49520.18">25178 17298 0,'-8'9'0,"-35"25"15,-8 25 1,8 1-16,26-26 16,17-9-1,8-16-15,18-18 16,34-16-16,8-18 16,-8 1-1,-9-9 1,-17 0-16,-8 8 15,-18-8-15,-16 17 16,-1 0 0,-8 17-16,-17 17 15,-9 17 1,-8 9 0,17-1-16,17-16 15,17-1-15,17-8 16,51-25-1,35-27 1,-9-7-16,-43 16 16,-17 26-16,-8 17 15,-18 9 1,-8 25-16,-17 25 16,0 1-1,8-34-15</inkml:trace>
+  <inkml:trace contextRef="#ctx0" brushRef="#br0" timeOffset="50208.38">26339 7008 0,'-17'8'0,"-43"60"15,-42 51-15,8 0 16,17 0 0,17-8-16,35-9 15,25 0 1,34-8-16,25-26 15,27-9 1,25-33-16,17-43 16,-17-26-1,-34-8-15,-26 0 16,-17 0 0,-26-8-16,-25 8 15,-17 8 1,-26 17-16,-33 26 15,-27 18 1,26 7-16,43-8 16,42-8-1</inkml:trace>
+  <inkml:trace contextRef="#ctx0" brushRef="#br0" timeOffset="50998.16">23044 17068 0,'-8'-8'0,"-26"-9"0,-18 0 15,-24 25 1,-44 26-16,-8 34 31,0 26-31,0 8 16,26 17-16,33-8 15,27-43 1,25-26-16,17 1 16,8-18-1,18-8 1,25-8-16,34-26 16,35-26-16,-1-33 15,-8-9 1,-42 17-16,-18 25 15,-17 18 1,-26 8-16,1 17 16,-35 25-1,-50 52 1,-10 25-16,-8 0 16,0-9-16,43-33 15,26-26 1,16-26-1,9 1-15,9-18 16,16 1 0,9-9-16,9 8 15,8 1 1,-25 8-16</inkml:trace>
+  <inkml:trace contextRef="#ctx0" brushRef="#br0" timeOffset="51536.49">29172 8896 0,'0'0'0,"0"0"0,26 0 16,17 17-16,34-9 16,16 1-1,27-1-15,-1 9 16,-8 0-1,-25 9 1,-18 8-16,-17 0 16,-25 8-16,-18 35 15,-67 42 1,-95 42-16,-68 27 16,0-27-1,26-33 1,17-9-16,-86 59 15</inkml:trace>
+  <inkml:trace contextRef="#ctx0" brushRef="#br0" timeOffset="52414.15">20390 15963 0,'-9'0'0,"-25"-9"0,-17 1 15,-9 8-15,9 0 16,17 17-1,0 8 1,0 18 0,8 16-16,9 1 15,17 0-15,0-9 16,17-17-16,9-17 31,42-26-15,26-33-16,8-35 15,-25 9 1,-26 17-16,-25 8 16,-18 26-16,-16 0 0,-35 26 15,-85 59 1,-17 34 0,43-17-1,25-17-15,34-17 16,18-17-1,25-8-15,25-18 0,52-33 32,77-35-32,25-33 15,-34-10 1,-51-16 0,-43 34-16,-34 34 15,-25 17 1,-26 26-16,-69 42 15,-102 93-15,-8 61 16,34 16 0,8 17-16,69-60 15,59-59 1,34-34 0,35-34-16,68-34 15,111-85 1,51-51-16,59-42 15</inkml:trace>
+  <inkml:trace contextRef="#ctx0" brushRef="#br0" timeOffset="64692.33">9875 12978 0,'0'0'0,"0"0"0,0 0 16,0 0-16,0 0 16,-17 8-1,-43 26 1,-34 26-16,0 25 16,0 8-16,26-7 15,34-35 1,8 0-16,9-17 15,0-17 1,9-9 0</inkml:trace>
+  <inkml:trace contextRef="#ctx0" brushRef="#br0" timeOffset="65159.85">9167 12961 0,'0'0'0,"0"0"0,0 0 15,-9 0-15,0 0 16,-25 25 0,-25 18-16,-10 25 15,18-9 1,17-8-16,25-8 16,9-1-1,17-8-15,18-8 0,-1-17 31,17-9-15,9-17-16,-9-9 0,-17 0 31,-8 1-31,-1-9 16,-16 8-16,-1-8 16,-16 9-1,8 16-15</inkml:trace>
+  <inkml:trace contextRef="#ctx0" brushRef="#br0" timeOffset="65613.75">10071 13701 0,'0'0'0,"0"0"0,-8 0 15,-9 0 1,-9 0-16,-8 0 15,8 17 1,-16 8-16,-10 18 16,18-1-1,9 1-15,16-1 32,9-16-32,17-18 15,43-16 1,25-26-16,9-34 15,-17 0 1,-26 8-16,-25 18 16,-26 8-1,-17 0-15,-52 17 0,18 8 16</inkml:trace>
+  <inkml:trace contextRef="#ctx0" brushRef="#br0" timeOffset="66573.33">11462 12646 0,'0'0'0,"0"0"0,-8 9 0,-1 42 0,-25 42 16,-17 26 15,-17 26-16,25-1-15,17-42 0,9-42 16,17-34 0</inkml:trace>
+  <inkml:trace contextRef="#ctx0" brushRef="#br0" timeOffset="66996.69">11915 13301 0,'0'0'0,"0"0"0,0 17 16,17 0 0,0-8-16,0-1 15,9-16 1,16-27-16,9-7 15,-8-9 1,0 0 0,-18 17-16,-16 0 15,-18 0 1,-8 8-16,-8 9 16,-44 17-16,-41 43 15,-18 59 1,17 25-16,42-33 15,35-26 1,26 0-16,33-8 16,43-18-1,18-16 1,-18-26-16,26-26 16,-26 9-16</inkml:trace>
+  <inkml:trace contextRef="#ctx0" brushRef="#br0" timeOffset="67398.8">12760 13403 0,'-9'0'0,"-16"34"0,-18 51 16,9 34-1,17-17 1,0-42-16,8-18 16,9-25-1,0-8-15,9-18 16,42-33-16,17-35 31,9 9-31,0 9 16,-9 16-1,-25 9-15,-9 17 16,-9 0-16,1 17 16,-9 17-1,-8 17-15,8 34 16,0 17-16,0-17 31,0-25-31,-9-26 16</inkml:trace>
+  <inkml:trace contextRef="#ctx0" brushRef="#br0" timeOffset="67921.75">13775 13514 0,'0'0'0,"-8"0"0,-18 25 31,-16 35-31,-10 42 16,1 8-16,8-25 16,26-42-1,17-18-15,17 1 16,1-1 0,7-16-1,18-1-15,25-16 16,0-9-1,-16-17-15,-10 0 16,-8 0 0,-8 0-16,-17 17 15,-1 0-15,1 0 16,-9 17 0,0 0-1,-9 0-15,1 17 16,-10 25-16,-7 9 15,-18 26-15,1 25 32,-10 34-32,10-17 15,-35-8 1,-43-1-16,-16-16 16,25-43-1,25-26-15,-7-33 16,50-1-1</inkml:trace>
+  <inkml:trace contextRef="#ctx0" brushRef="#br0" timeOffset="68225.6">14765 13250 0,'0'0'0,"-8"42"0,-18 44 16,-16 24-1,-18 18-15,0 16 16,17-42 0,9-51-16,9-8 15,8-26 1</inkml:trace>
+  <inkml:trace contextRef="#ctx0" brushRef="#br0" timeOffset="68429.64">14185 13607 0,'0'0'0,"0"9"0,0 16 16,26 35 0,42 25-1,51-17 1,1-43-16,-35-33 15,18-35-15,170-76 16</inkml:trace>
+  <inkml:trace contextRef="#ctx0" brushRef="#br0" timeOffset="68840.39">15286 13097 0,'0'0'0,"-8"17"0,8 42 16,-9 26-16,0 1 15,1-10-15,-1-16 16,-8-1-16,9 1 31,8-1-31,0-16 16,17-9-16,0-9 15,9-8-15,25-8 32,9-1-32,-18-8 15,1 0 1,-9 17-16,-8 26 15,-1 25-15,1 8 16,-9-16-16,8-18 16,-7-25-16</inkml:trace>
+</inkml:ink>
+</file>
+
+<file path=ppt/ink/ink5.xml><?xml version="1.0" encoding="utf-8"?>
+<inkml:ink xmlns:inkml="http://www.w3.org/2003/InkML">
+  <inkml:definitions>
+    <inkml:context xml:id="ctx0">
+      <inkml:inkSource xml:id="inkSrc0">
+        <inkml:traceFormat>
+          <inkml:channel name="X" type="integer" max="3968" units="cm"/>
+          <inkml:channel name="Y" type="integer" max="2240" units="cm"/>
+          <inkml:channel name="T" type="integer" max="2.14748E9" units="dev"/>
+        </inkml:traceFormat>
+        <inkml:channelProperties>
+          <inkml:channelProperty channel="X" name="resolution" value="128.41425" units="1/cm"/>
+          <inkml:channelProperty channel="Y" name="resolution" value="128.73563" units="1/cm"/>
+          <inkml:channelProperty channel="T" name="resolution" value="1" units="1/dev"/>
+        </inkml:channelProperties>
+      </inkml:inkSource>
+      <inkml:timestamp xml:id="ts0" timeString="2026-04-01T19:53:13.358"/>
+    </inkml:context>
+    <inkml:brush xml:id="br0">
+      <inkml:brushProperty name="width" value="0.05292" units="cm"/>
+      <inkml:brushProperty name="height" value="0.05292" units="cm"/>
+      <inkml:brushProperty name="color" value="#FF0000"/>
+    </inkml:brush>
+    <inkml:context xml:id="ctx1">
+      <inkml:inkSource xml:id="inkSrc12">
+        <inkml:traceFormat>
+          <inkml:channel name="X" type="integer" max="1920" units="cm"/>
+          <inkml:channel name="Y" type="integer" max="1080" units="cm"/>
+          <inkml:channel name="T" type="integer" max="2.14748E9" units="dev"/>
+        </inkml:traceFormat>
+        <inkml:channelProperties>
+          <inkml:channelProperty channel="X" name="resolution" value="62.13592" units="1/cm"/>
+          <inkml:channelProperty channel="Y" name="resolution" value="62.42775" units="1/cm"/>
+          <inkml:channelProperty channel="T" name="resolution" value="1" units="1/dev"/>
+        </inkml:channelProperties>
+      </inkml:inkSource>
+      <inkml:timestamp xml:id="ts1" timeString="2026-04-01T19:54:27.435"/>
+    </inkml:context>
+  </inkml:definitions>
+  <inkml:trace contextRef="#ctx0" brushRef="#br0">15098 10852 0,'0'0'0,"0"0"0,0 0 16,-8 0-16,-1 0 15,1 0 1,-1 0-16,1 17 31,-1 0-31,1 0 16,-1 17-1,1 8-15,-1 9 16,0 0 0,9-8-16,0-1 15,0-8 1,0-8-16,0-1 16,18-8-1,-1 0-15,17-8 16,0-1-1,0-16-15,-8-1 16,-1 1 0,9 8-16,0 0 15,1 0 1,16 0-16,-8 0 16,-1 0-1,9 8-15,1 9 16,-1-8-1,9-1 1,-18 1-16,1-1 16,17 1-16,16-1 15,1-16 1,17-1 0,0 1-16,-17-1 15,17 1 1,0-1-16,0 1 15,-1-1-15,1 9 16,-17 0 0,17 0-16,8-8 15,9-9 1,9-9-16,-18 1 16,-8 8-1,0 0 1,-17 0-16,8 17 15,9-9-15,-17 1 16,-17 8 0,8 0-16,0 0 15,-17 0 1,-8 0 0,-9 0-16,-8 8 15,-1 1-15,1-9 16,0 0-1,-9 0 1,0 0-16,0 0 16,0-9-16,-9 1 15,10-1 1,-10 1 0,1-9-16,-1 0 15,1 0 1,8-9-16,0 1 15,0-1 1,8-8-16,10-8 0,-18 25 16</inkml:trace>
+  <inkml:trace contextRef="#ctx0" brushRef="#br0" timeOffset="5344.32">17505 11387 0,'0'0'0,"0"0"0,-8 9 16,-1 8-1,1 17 1,-10 17-16,1 9 0,0 16 15,0-8 17,0-8-32,9-1 15,8-8 1,0 0-16,8 0 16,9-8-16,0-1 15,26-16 1,17-1-1,8-16-15,26-9 16,8-9 0,-8 1-16,17-1 0,0 9 31,9 0-31,-9 0 0,17 0 16,8 9-1,-16-1 1,-9 1-1,0 8-15,17 0 16,-17 0 0,-18 0-16,10 0 15,-18 0-15,-17 0 0,9-9 32,-17 1-32,-9-1 0,-8-8 15,0-8 1,-1-1-1,-16 1 1,-1-1 0,1-16-16,-9-1 0,-8-8 31,-1-8-31,-8-1 16,0 9-1,0 0-15,17 0 16,0 17-1</inkml:trace>
+  <inkml:trace contextRef="#ctx0" brushRef="#br0" timeOffset="6338.27">21115 11524 0,'0'0'0,"0"0"0,-8 17 16,-1 17 0,1 0-16,-1-9 15,1 1 1,-1-1 0,1 9-16,-18 9 15,1 16-15,-1 9 16,-8-8-1,17-9-15,0-9 16,8-16 0,9 8-16,0 0 15,0 0 1,0 17-16,0 0 16,9 0-1,-1-9 1,1-7-16,-1-10 15,9-8 1,0 0-16,9-8 16,17 8-16,8-9 15,26 1 1,25-9-16,9-9 16,26 1-1,25-18-15,0 1 16,0 8-1,26 0-15,17-9 16,25 0 0,1-8-16,-1 0 15,-8 9 1,-9 8 0,-16 17-16,-18-9 15,-17 9 1,-34 0-16,-17 9 15,-34-1 1,-26 1-16,-8-1 16,-18 1-16,-16-1 15,-1-8 1,1 0 0,-9-8-16,0-9 15,8-43-15,1 18 16</inkml:trace>
+  <inkml:trace contextRef="#ctx0" brushRef="#br0" timeOffset="13113.13">15679 12757 0,'0'0'0,"0"-9"0,17 1 16,0-9 0,0 0-1,9 0-15,16 17 16,35 17 0,60 17-16,67 17 15,78 0 1,17-26-16,17-8 15,51-17 1</inkml:trace>
+  <inkml:trace contextRef="#ctx0" brushRef="#br0" timeOffset="36025.03">1485 13922 0,'0'0'0,"0"0"0,0 0 0,0 0 15,0 0 1,0 0-1,0 0-15,-17 8 16,8 18 0,1 33-1,-9 43-15,8 26 16,1-9-16,8-34 16,8-25-1,1-1 1,8-25-16,0-8 15,9-18 1,16 1-16,27-26 16,50-34-16,18-34 15,-1-9 1,1 1-16,16 16 16,10 17-1,-1 18-15,25 25 16,27 17-1,8 8 1,25 18-16,-16-1 16,8 9-1,-9 0-15,9 9 16,0 0 0,-34-9-16,-26-9 15,-25-16-15,-18-1 16,-16-8-1,-18-8 1,-25-18-16,0-8 16,25-60-16,18-101 15,33-111 1</inkml:trace>
+  <inkml:trace contextRef="#ctx0" brushRef="#br0" timeOffset="41638.46">17462 14390 0,'0'0'0,"0"0"0,0 0 15,0 0 1,0 0-16,0 0 16,0 0-16,0 0 15,0 0 1,0 0-1,0 0-15,0 0 16,0 0-16,0 0 16,0 0-1,0 0 1,0 0-16,0 8 16,0 18-1,0 8-15,0 0 16,0 0-16,0 0 15,0 8 1,0-8-16,0 9 16,0-18-1,0 1 1,0-1-16,0 9 16,0-8-1,18-1-15,-1 1 16,0-1-16,8-8 15,9-8 1,1-1-16,16-8 31,26-8-31,-9-1 16,-17 1-16,-17 8 16,17 0-16,26 0 15,-8 0 1,-1 17-1,26 0-15,-9-9 0,-17 1 16,35-18 0,33-8-16,9-17 15,-34 0 1,17-8 0,26-1-1,-9 9-15,-17 0 16,9 9-1,8 8-15,-9 8 16,-25 9-16,9 0 16,16 0-1,-16 0 1,-1 0-16,-16 9 0,8 8 31,0 8-31,0 9 16,-9-8-1,-25-1-15,-17 1 16,-1-1 0,-7 1-16,-27-18 15,1 1-15,-18-1 16,1-8-16,-9 0 31,0 0-31,-9-17 16,1-8-1,-1-26-15,9-26 0,0-8 16,0 43 0</inkml:trace>
+  <inkml:trace contextRef="#ctx0" brushRef="#br0" timeOffset="45795.03">17582 15172 0,'0'0'0,"0"0"0,0 0 16,0 0-1,0 17 1,0 8-16,0 18 15,0 17-15,0 8 16,0-9 0,0-8-16,0-8 15,0-1 1,0-8-16,9-8 16,8-1-16,0 1 31,8-1-31,18 1 15,17-18 1,42-8-16,18 0 16,-1-8-16,26-18 15,26 1 1,0-9 0,-18 25-16,26 1 15,1-1 1,-18 1-16,26 8 15,-1 0 1,-50 8-16,17 18 16,8-1-16,-26 1 15,-33-1 1,-26 1 0,-9-9-16,-8 0 15,-1-9 1,-16 1-16,-17-1 15,-1 1 1,-16-9-16,-1 0 0,1-9 16,8 1-1,0-26-15,9-17 32,-18 25-32</inkml:trace>
+  <inkml:trace contextRef="#ctx0" brushRef="#br0" timeOffset="49369.33">21346 15129 0,'0'0'0,"0"0"0,0 0 15,0 0 1,0 0-16,0 0 15,0 0 1,8 17-16,1 0 16,0 17-1,-1 9-15,1 17 16,-1 8 0,1 8-16,-9 1 15,0-9 1,0-9-16,0-16 15,0-18 1,0 1-16,0-9 16,8-9-1,9 9-15,0-8 16,17-1 0,1 1-16,24-1 15,52 1 1,0-9-16,9-9 15,25-8-15,34 0 16,0-8 0,35-1-1,25 1-15,-17 16 16,25 9-16,-16-8 16,16 8-1,-17 0 1,-8 0-16,9 0 15,-52 0 1,0 0-16,-8 0 16,-52-9-1,-25 9-15,9-8 16,8-9-16,-34 8 16,-26 1-1,-26-1-15,1 1 16,-9-1-1,0 1 1,-8-1-16,-9 1 16</inkml:trace>
+  <inkml:trace contextRef="#ctx0" brushRef="#br0" timeOffset="53264">15329 16082 0,'0'0'0,"0"0"0,0 0 0,0 0 16,0 0-16,25 0 15,27-9 1,67 1-1,18-1-15,42-16 16,43-1 0,-17 9-1,119 0-15</inkml:trace>
+  <inkml:trace contextRef="#ctx0" brushRef="#br0" timeOffset="54994.07">17992 16762 0,'0'0'0,"0"0"0,0 0 16</inkml:trace>
+  <inkml:trace contextRef="#ctx0" brushRef="#br0" timeOffset="55342.34">17992 16822 0,'0'0'0,"51"-17"0,103-17 16,93-43 0,43-25-16,52 9 15,33 16 1</inkml:trace>
+  <inkml:trace contextRef="#ctx0" brushRef="#br0" timeOffset="60827.25">20911 16966 0,'0'0'0,"0"0"0,0 0 16,0 0 0,0 0-1,0 0-15,0 0 16,-9 0-16,-17 0 16,1 0-1,-18 17 1,-8 9-1,-9 8-15,1 17 16,-18 9-16,0 16 16,0-8-1,-8 9-15,25-9 16,17-34 0,18-9-1,8-16-15,8-1 0,1-25 31,-1-8-31,9-9 16,0 0 0,0 0-16,0 0 15,0 17-15,-9 0 16,1 8 0,-1 9-1,-16 0-15,-26 26 0,-18 33 31,1 43-31,17-8 16,25-35 0,18-8-16,8-25 15,17-1-15,34-8 32,43-17-32,42-25 15,27-18 1,-18-16-16,-77 33 0</inkml:trace>
+  <inkml:trace contextRef="#ctx1" brushRef="#br0">20496 17604 0</inkml:trace>
+</inkml:ink>
+</file>
+
+<file path=ppt/ink/ink6.xml><?xml version="1.0" encoding="utf-8"?>
+<inkml:ink xmlns:inkml="http://www.w3.org/2003/InkML">
+  <inkml:definitions>
+    <inkml:context xml:id="ctx0">
+      <inkml:inkSource xml:id="inkSrc0">
+        <inkml:traceFormat>
+          <inkml:channel name="X" type="integer" max="3968" units="cm"/>
+          <inkml:channel name="Y" type="integer" max="2240" units="cm"/>
+          <inkml:channel name="T" type="integer" max="2.14748E9" units="dev"/>
+        </inkml:traceFormat>
+        <inkml:channelProperties>
+          <inkml:channelProperty channel="X" name="resolution" value="128.41425" units="1/cm"/>
+          <inkml:channelProperty channel="Y" name="resolution" value="128.73563" units="1/cm"/>
+          <inkml:channelProperty channel="T" name="resolution" value="1" units="1/dev"/>
+        </inkml:channelProperties>
+      </inkml:inkSource>
+      <inkml:timestamp xml:id="ts0" timeString="2026-04-01T19:54:47.054"/>
+    </inkml:context>
+    <inkml:brush xml:id="br0">
+      <inkml:brushProperty name="width" value="0.05292" units="cm"/>
+      <inkml:brushProperty name="height" value="0.05292" units="cm"/>
+      <inkml:brushProperty name="color" value="#FF0000"/>
+    </inkml:brush>
+  </inkml:definitions>
+  <inkml:trace contextRef="#ctx0" brushRef="#br0">17198 10256 0,'0'0'0,"0"0"0,0 0 0,0 0 16,0 0 0,0 0-16,0 0 15,-9 17-15,1 26 16,-26 42-1,-9 9 1,9-18-16,0 1 16,0-18-1,17-8-15,-1 0 16,1-8 0,9-9-1,8-9-15,0 1 16,25-1-16,27-8 0,24-8 15,10-9 1,-9-9-16,-9 1 31,17 8-15,9 0-16,17 17 16,9 0-1,-18-9-15,26 1 0,26-1 16,-9 1-1,-26-1 1,9 9-16,34 17 16,-8-8-1,-17 16-15,25 1 16,17-9-16,-8-9 31,25-8-31,17-8 16,18-18-1,25 1-15,-9-9 16,9 8 0,-25 9-16,-1 9 15,1-1 1,16-8-16,18 9 16,-9-1-1,9-8-15,8 0 16,0 9-1,17-9-15,9 0 16,-9 0 0,17 0-16,9 0 15,0-9 1,-18-8-16,27 0 16,-18 17-1,-8 9-15,-9-1 16,0 1-1,-8-9-15,-43 0 16,-9 0 0,-16 0-16,-27 0 15,-33 0 1,-35 0-16,-33 0 16,-18-9-1,0 1-15,-8-1 16,0 1-1,0-18-15,-1 1 16,-16-1 0,0 1-16,-18-1 15,1 1 1,-9-1-16,9-16 16,-1-9-1,1-9-15,-9 1 16,0 8-1,0 0-15,-8-9 16,-1 9 0,1-8-16,-1-26 15,1-1 1,-1 1-16,-8 9 16,-8 25-1,-1 0-15,-25 8 16,-17-8-1,-9 17-15,0 0 16,-17 0 0,-8 0-16,-26 0 15,-17 17 1,9 17-16,-18 0 16,-25 0-1,-9 17-15,18-8 16,-44-1-1,-33 1-15,-9-1 16,8 1 0,1-9-16,-9 17 15,0-9 1,-17 1-16,0-1 16,8-16-1,-16 8-15,-9 0 16,8 0-1,-16 17-15,-18 0 16,0 8 0,0 1-16,18-9 15,8 0 1,17-9-16,-9-16 16,-17-1-1,-8-16-15,17-1 16,-17 1-1,-9-1-15,-8 1 16,-9 16 0,-8 9-1,-69 17-15,26 17 16,-43 34 0,-25 9-16,-9 33 15,-17-42-15,69-59 16</inkml:trace>
+  <inkml:trace contextRef="#ctx0" brushRef="#br0" timeOffset="27570.47">3115 4941 0,'0'0'0,"-8"9"0,-1 25 16,-8 25-1,-8 35-15,7-1 16,-7 18 0,-1 25-16,1 34 15,8-25 1,-1-52-16,10-8 15,-1-8 1,9-9-16,17-17 16,1 0-16,-1-9 15,17-16 1,8-1 0,18 1-16,17-1 15,17-8-15,25 0 16,52-17-1,25 0-15,26-8 16,17-9 0,9 8-1,8 9-15,8 17 16,10-8-16,24-1 16,35 1-1,34-9-15,-17 8 16,-17 1-1,34-9 1,-17 0-16,-9 17 16,-8-9-16,9 1 15,33-9 1,9-9 0,9 1-16,16-1 15,18 1 1,8-1-16,-25 9 15,17 17-15,17 0 16,17-8 0,17 8-16,-26 0 15,0 0 1,18-9 0,-9 9-16,-9 9 15,0 8 1,-76-9-1,-18 9-15,-8 1 16,-68-10-16,-35 1 16,-33-1-1,-44-8 1,-59-8-16,-42-1 16,-27-8-16,-8-8 15,1-1 1,7-25-16,9-42 15,1-18-15,-18-25 16,-17-26 0,0-25-1,-26-119 1</inkml:trace>
+  <inkml:trace contextRef="#ctx0" brushRef="#br0" timeOffset="30578.34">16063 4677 0,'0'0'0,"-9"26"0,1 33 16,-9 27-16,0 7 15,-1-25 1,10-17-16,8-17 16,0-8-1,-9-18 1,9 1-16</inkml:trace>
+  <inkml:trace contextRef="#ctx0" brushRef="#br0" timeOffset="31195.38">17616 4499 0,'0'0'0,"0"0"0,0 0 0,17 17 31,0 17-15,9 0-16,-1 8 0,1 9 16,-17 0-16,-9 9 15,-17 0 1,-26 8-1,-17 0 1,9-17-16,8-17 16,9-9-1,0-16 1,17-1-16,0 1 0,17-9 31,0 0-31,0 0 16,17 8-16,43 35 0,85 16 15,51 18 1,17-18 0,18 1-1,85 16-15</inkml:trace>
+  <inkml:trace contextRef="#ctx0" brushRef="#br0" timeOffset="56685.79">27406 7960 0,'0'0'0,"0"0"0,0 0 16,0 17-1,-9 0-15,-8 17 16,-17 17-16,-9 26 15,9 25 17,9 25-32,7-8 15,1-8-15,-8 59 16,-9 9 0,-9-52-16,-8 18 15,0 25 1,8-42-16,17-60 15,9-26-15,0-16 16,0-9 0,0-9-1,-9-8-15,-8-25 16,0-43 0,0 0-16,17-1 15,0 27 1,0 8-16,0 8 15,8 9 1,1 9 0,8 8-16,0 0 15,0 25-15,0 18 16,0 8 0,17 0-1,8 17-15,27-8 16,-1-18-16,8-16 15,10-1 1,8-16-16,-9-1 16,-34-8-1</inkml:trace>
+</inkml:ink>
+</file>
+
+<file path=ppt/ink/ink7.xml><?xml version="1.0" encoding="utf-8"?>
+<inkml:ink xmlns:inkml="http://www.w3.org/2003/InkML">
+  <inkml:definitions>
+    <inkml:context xml:id="ctx0">
+      <inkml:inkSource xml:id="inkSrc0">
+        <inkml:traceFormat>
+          <inkml:channel name="X" type="integer" max="3968" units="cm"/>
+          <inkml:channel name="Y" type="integer" max="2240" units="cm"/>
+          <inkml:channel name="T" type="integer" max="2.14748E9" units="dev"/>
+        </inkml:traceFormat>
+        <inkml:channelProperties>
+          <inkml:channelProperty channel="X" name="resolution" value="128.41425" units="1/cm"/>
+          <inkml:channelProperty channel="Y" name="resolution" value="128.73563" units="1/cm"/>
+          <inkml:channelProperty channel="T" name="resolution" value="1" units="1/dev"/>
+        </inkml:channelProperties>
+      </inkml:inkSource>
+      <inkml:timestamp xml:id="ts0" timeString="2026-04-01T20:05:38.510"/>
+    </inkml:context>
+    <inkml:brush xml:id="br0">
+      <inkml:brushProperty name="width" value="0.05292" units="cm"/>
+      <inkml:brushProperty name="height" value="0.05292" units="cm"/>
+      <inkml:brushProperty name="color" value="#FF0000"/>
+    </inkml:brush>
+  </inkml:definitions>
+  <inkml:trace contextRef="#ctx0" brushRef="#br0">4293 9814 0,'0'0'0,"34"0"15,69 9-15,59-1 16,26-8 0,25 17-16,17 0 15,26-8 1,94-9-16</inkml:trace>
+  <inkml:trace contextRef="#ctx0" brushRef="#br0" timeOffset="919.64">4541 11991 0,'0'0'0,"0"0"16,0 0-16,8 0 16,18 0-16,16 9 15,44-9 1,50-17 0,61-9-16,25 1 15,25 16-15,103 9 16</inkml:trace>
+  <inkml:trace contextRef="#ctx0" brushRef="#br0" timeOffset="1675.53">4472 13973 0,'0'0'0,"0"0"0,0 0 16,9 0-1,34 0-15,76 0 16,120 17 0,85-9-16,86-8 15,-9-8 1</inkml:trace>
+  <inkml:trace contextRef="#ctx0" brushRef="#br0" timeOffset="4016.57">4387 10911 0,'0'0'0,"0"0"0,0 0 16,0 0-1,0 0-15,0 9 16,0 8-16,17 17 15,0 17 1,-8 17 0,-9 34-16,-9 17 15,1 0 1,-1-8-16,0-18 16,9-16-1,0-18-15,9-16 16,0-9-16,-1-9 15,9 1 1,0-9 0,0 0-16,9 0 15,8 0 1,0 0-16,17-9 16,1-8-1,24-8-15,35-18 16,9-8-1,8 0-15,8 0 16,1 0-16,-9 17 16,0 9-1,0 16 1,-8 18-16,-9-9 16,-9 17-1,-17 0-15,-25-9 16,-9-8-16,-25-8 15,-1-1 1,-7 1-16,-10-1 16,1-8-1,-1 0 1,1-17-16,8-34 16,17-42-1,-9-26-15,1-9 16,0 1-1,-1 16-15,-16 34 16,-1 9-16,1 17 16,-9 0-1,0 17-15,0 0 16,-9 0 0,1 9-1,-1-1-15,-33 9 16,-44 9-1,-110 33-15,-77 52 0,-69 33 32,-42 9-32,-17-8 15,-34-34 1,42-43-16</inkml:trace>
+  <inkml:trace contextRef="#ctx0" brushRef="#br0" timeOffset="12786.44">2757 14449 0,'0'0'0,"0"0"0,0 0 15,0 0 1,0 0-1,0 0 1,0 0 0,0 0-16,0 0 15,17 0 1,17 17-16,17 0 16,26 26-1,25 8-15,1-9 16,8 1-1,17-1-15,0-8 16,0-8 0,-26-1-16,1 1 15,-1-1 1,-34-8-16,-16 0 16,-1 9-1,-17-9-15</inkml:trace>
+  <inkml:trace contextRef="#ctx0" brushRef="#br0" timeOffset="13105.93">4285 14628 0,'0'0'0,"0"0"0,0 0 16,0 0-16,0 0 15,0 0 1,0 0-16,17 8 16,0 9-1,8 0 1,9 0-16,1 9 16,-1 8-16,-9-9 15,-8 1 1,-8-1-1,-1 1-15,1-18 16,-18 9-16,1 0 16,-52 43-1,9-9-15</inkml:trace>
+</inkml:ink>
+</file>
+
+<file path=ppt/ink/ink8.xml><?xml version="1.0" encoding="utf-8"?>
+<inkml:ink xmlns:inkml="http://www.w3.org/2003/InkML">
+  <inkml:definitions>
+    <inkml:context xml:id="ctx0">
+      <inkml:inkSource xml:id="inkSrc0">
+        <inkml:traceFormat>
+          <inkml:channel name="X" type="integer" max="3968" units="cm"/>
+          <inkml:channel name="Y" type="integer" max="2240" units="cm"/>
+          <inkml:channel name="T" type="integer" max="2.14748E9" units="dev"/>
+        </inkml:traceFormat>
+        <inkml:channelProperties>
+          <inkml:channelProperty channel="X" name="resolution" value="128.41425" units="1/cm"/>
+          <inkml:channelProperty channel="Y" name="resolution" value="128.73563" units="1/cm"/>
+          <inkml:channelProperty channel="T" name="resolution" value="1" units="1/dev"/>
+        </inkml:channelProperties>
+      </inkml:inkSource>
+      <inkml:timestamp xml:id="ts0" timeString="2026-04-01T20:18:28.210"/>
+    </inkml:context>
+    <inkml:brush xml:id="br0">
+      <inkml:brushProperty name="width" value="0.05292" units="cm"/>
+      <inkml:brushProperty name="height" value="0.05292" units="cm"/>
+      <inkml:brushProperty name="color" value="#FF0000"/>
+    </inkml:brush>
+  </inkml:definitions>
+  <inkml:trace contextRef="#ctx0" brushRef="#br0">8262 5536 0,'0'0'0,"0"0"0,0 0 0,8 26 15,9 25 1,-17 42-16,-8 1 16,-1-17-1,1-9-15,-1 0 16,1 0 0,8-9-16,0-16 15,0-1 1,0-16-16,0-1 15,8-8 1,9 9-16,26-18 16,8-8-1,35-8 1,7-18-16,-7 1 16,16-9-16,35 8 15,-1 18 1,-25 16-16,9 26 15,33 26 1,27-9-16,7-9 16,10 9-1,-1-17-15,17-8 16,43-1 0,-17-16-1,26-9-15,0 0 16,16-17-1,9 0-15,-8-17 16,34 8 0,0 9-16,51 0 15,-34 9 1,-60-1-16,51 1 16,-17-9-1,9-9-15,-26 1 16,-17-1-16,-25 1 15,-43 8-15,-9 8 32,-76 9-32,-61 0 15,-16 0 1,-17 9-16,-18-9 16,1 0-16,-1 0 15,-8-9 1,9-42-1,16-51-15,-8 34 16</inkml:trace>
+  <inkml:trace contextRef="#ctx0" brushRef="#br0" timeOffset="6518.05">18299 5570 0,'0'0'0,"0"0"0,0 0 15,0 17-15,0 9 16,0 8 0,-9 25-16,-16 10 15,8-10 1,0-16-16,0-9 15,0-9 1,8 1-16,9-1 16,0 1-1,0-9 1,17 8-16,9-8 16,16-8-16,18-1 15,8 1 1,9-1-1,26 1-15,8-1 16,25-16 0,35-1-16,17 1 15,8-9-15,26 0 16,8 0 0,26 8-16,0 9 15,17 9 1,-8-9-16,0 8 15,-1 1 1,1 8-16,8 0 16,26 0-1,25-9 1,-25 1-16,16-9 16,-7 0-16,7 8 15,-33 1 1,-43-9-1,-25 8-15,-61-16 16,-50 8 0,-27 0-16,-24 0 0,-27 0 15,-8 0 1,-8 0 0,-1-9-1,1 1-15,-1-1 16,1-8-16,-1-8 15,1-35 1,0-50-16,-1-163 16</inkml:trace>
+</inkml:ink>
+</file>
+
 <file path=ppt/notesMasters/notesMaster1.xml><?xml version="1.0" encoding="utf-8"?>
 <p:notesMaster xmlns:a="http://schemas.openxmlformats.org/drawingml/2006/main" xmlns:r="http://schemas.openxmlformats.org/officeDocument/2006/relationships" xmlns:p="http://schemas.openxmlformats.org/presentationml/2006/main">
   <p:cSld>
@@ -253,7 +581,7 @@
           <a:p>
             <a:fld id="{8F1DDF0B-ACD3-4CCE-9D96-FD5CAF21C13D}" type="datetimeFigureOut">
               <a:rPr lang="en-US" smtClean="0"/>
-              <a:t>1/6/2026</a:t>
+              <a:t>4/1/2026</a:t>
             </a:fld>
             <a:endParaRPr lang="en-US"/>
           </a:p>
@@ -588,7 +916,7 @@
           <a:p>
             <a:fld id="{98DA50AE-6676-4050-BB67-AE6E697DAE8C}" type="slidenum">
               <a:rPr lang="en-US" smtClean="0"/>
-              <a:t>30</a:t>
+              <a:t>32</a:t>
             </a:fld>
             <a:endParaRPr lang="en-US"/>
           </a:p>
@@ -754,7 +1082,7 @@
           <a:p>
             <a:fld id="{2DB93FBE-67AC-4C5C-B62E-CFFDEAF9BE53}" type="datetimeFigureOut">
               <a:rPr lang="en-US" smtClean="0"/>
-              <a:t>1/6/2026</a:t>
+              <a:t>4/1/2026</a:t>
             </a:fld>
             <a:endParaRPr lang="en-US"/>
           </a:p>
@@ -952,7 +1280,7 @@
           <a:p>
             <a:fld id="{2DB93FBE-67AC-4C5C-B62E-CFFDEAF9BE53}" type="datetimeFigureOut">
               <a:rPr lang="en-US" smtClean="0"/>
-              <a:t>1/6/2026</a:t>
+              <a:t>4/1/2026</a:t>
             </a:fld>
             <a:endParaRPr lang="en-US"/>
           </a:p>
@@ -1160,7 +1488,7 @@
           <a:p>
             <a:fld id="{2DB93FBE-67AC-4C5C-B62E-CFFDEAF9BE53}" type="datetimeFigureOut">
               <a:rPr lang="en-US" smtClean="0"/>
-              <a:t>1/6/2026</a:t>
+              <a:t>4/1/2026</a:t>
             </a:fld>
             <a:endParaRPr lang="en-US"/>
           </a:p>
@@ -1358,7 +1686,7 @@
           <a:p>
             <a:fld id="{2DB93FBE-67AC-4C5C-B62E-CFFDEAF9BE53}" type="datetimeFigureOut">
               <a:rPr lang="en-US" smtClean="0"/>
-              <a:t>1/6/2026</a:t>
+              <a:t>4/1/2026</a:t>
             </a:fld>
             <a:endParaRPr lang="en-US"/>
           </a:p>
@@ -1633,7 +1961,7 @@
           <a:p>
             <a:fld id="{2DB93FBE-67AC-4C5C-B62E-CFFDEAF9BE53}" type="datetimeFigureOut">
               <a:rPr lang="en-US" smtClean="0"/>
-              <a:t>1/6/2026</a:t>
+              <a:t>4/1/2026</a:t>
             </a:fld>
             <a:endParaRPr lang="en-US"/>
           </a:p>
@@ -1898,7 +2226,7 @@
           <a:p>
             <a:fld id="{2DB93FBE-67AC-4C5C-B62E-CFFDEAF9BE53}" type="datetimeFigureOut">
               <a:rPr lang="en-US" smtClean="0"/>
-              <a:t>1/6/2026</a:t>
+              <a:t>4/1/2026</a:t>
             </a:fld>
             <a:endParaRPr lang="en-US"/>
           </a:p>
@@ -2310,7 +2638,7 @@
           <a:p>
             <a:fld id="{2DB93FBE-67AC-4C5C-B62E-CFFDEAF9BE53}" type="datetimeFigureOut">
               <a:rPr lang="en-US" smtClean="0"/>
-              <a:t>1/6/2026</a:t>
+              <a:t>4/1/2026</a:t>
             </a:fld>
             <a:endParaRPr lang="en-US"/>
           </a:p>
@@ -2451,7 +2779,7 @@
           <a:p>
             <a:fld id="{2DB93FBE-67AC-4C5C-B62E-CFFDEAF9BE53}" type="datetimeFigureOut">
               <a:rPr lang="en-US" smtClean="0"/>
-              <a:t>1/6/2026</a:t>
+              <a:t>4/1/2026</a:t>
             </a:fld>
             <a:endParaRPr lang="en-US"/>
           </a:p>
@@ -2564,7 +2892,7 @@
           <a:p>
             <a:fld id="{2DB93FBE-67AC-4C5C-B62E-CFFDEAF9BE53}" type="datetimeFigureOut">
               <a:rPr lang="en-US" smtClean="0"/>
-              <a:t>1/6/2026</a:t>
+              <a:t>4/1/2026</a:t>
             </a:fld>
             <a:endParaRPr lang="en-US"/>
           </a:p>
@@ -2875,7 +3203,7 @@
           <a:p>
             <a:fld id="{2DB93FBE-67AC-4C5C-B62E-CFFDEAF9BE53}" type="datetimeFigureOut">
               <a:rPr lang="en-US" smtClean="0"/>
-              <a:t>1/6/2026</a:t>
+              <a:t>4/1/2026</a:t>
             </a:fld>
             <a:endParaRPr lang="en-US"/>
           </a:p>
@@ -3163,7 +3491,7 @@
           <a:p>
             <a:fld id="{2DB93FBE-67AC-4C5C-B62E-CFFDEAF9BE53}" type="datetimeFigureOut">
               <a:rPr lang="en-US" smtClean="0"/>
-              <a:t>1/6/2026</a:t>
+              <a:t>4/1/2026</a:t>
             </a:fld>
             <a:endParaRPr lang="en-US"/>
           </a:p>
@@ -3404,7 +3732,7 @@
           <a:p>
             <a:fld id="{2DB93FBE-67AC-4C5C-B62E-CFFDEAF9BE53}" type="datetimeFigureOut">
               <a:rPr lang="en-US" smtClean="0"/>
-              <a:t>1/6/2026</a:t>
+              <a:t>4/1/2026</a:t>
             </a:fld>
             <a:endParaRPr lang="en-US"/>
           </a:p>
@@ -3846,7 +4174,7 @@
           <a:p>
             <a:r>
               <a:rPr lang="en-US" dirty="0"/>
-              <a:t>CSE 332 Winter 2026</a:t>
+              <a:t>CSE 332 Spring 2026</a:t>
             </a:r>
             <a:br>
               <a:rPr lang="en-US" dirty="0"/>
@@ -3936,6 +4264,357 @@
           <p:cNvPr id="2" name="Title 1">
             <a:extLst>
               <a:ext uri="{FF2B5EF4-FFF2-40B4-BE49-F238E27FC236}">
+                <a16:creationId xmlns:a16="http://schemas.microsoft.com/office/drawing/2014/main" id="{FB3450B6-F0B1-452F-736A-CBAD5DE567E1}"/>
+              </a:ext>
+            </a:extLst>
+          </p:cNvPr>
+          <p:cNvSpPr>
+            <a:spLocks noGrp="1"/>
+          </p:cNvSpPr>
+          <p:nvPr>
+            <p:ph type="title"/>
+          </p:nvPr>
+        </p:nvSpPr>
+        <p:spPr/>
+        <p:txBody>
+          <a:bodyPr/>
+          <a:lstStyle/>
+          <a:p>
+            <a:r>
+              <a:rPr lang="en-US" dirty="0"/>
+              <a:t>Linked Nodes vs. Circular Array</a:t>
+            </a:r>
+          </a:p>
+        </p:txBody>
+      </p:sp>
+      <p:sp>
+        <p:nvSpPr>
+          <p:cNvPr id="3" name="Content Placeholder 2">
+            <a:extLst>
+              <a:ext uri="{FF2B5EF4-FFF2-40B4-BE49-F238E27FC236}">
+                <a16:creationId xmlns:a16="http://schemas.microsoft.com/office/drawing/2014/main" id="{E1FB6DFD-BFD3-6A83-79CC-23335BC24C61}"/>
+              </a:ext>
+            </a:extLst>
+          </p:cNvPr>
+          <p:cNvSpPr>
+            <a:spLocks noGrp="1"/>
+          </p:cNvSpPr>
+          <p:nvPr>
+            <p:ph idx="1"/>
+          </p:nvPr>
+        </p:nvSpPr>
+        <p:spPr/>
+        <p:txBody>
+          <a:bodyPr/>
+          <a:lstStyle/>
+          <a:p>
+            <a:r>
+              <a:rPr lang="en-US" dirty="0"/>
+              <a:t>Let’s Summarize some benefits and drawbacks of each</a:t>
+            </a:r>
+          </a:p>
+          <a:p>
+            <a:pPr lvl="1"/>
+            <a:r>
+              <a:rPr lang="en-US" dirty="0"/>
+              <a:t>Arrays provide random access, which the queue ADT doesn’t need</a:t>
+            </a:r>
+          </a:p>
+          <a:p>
+            <a:pPr lvl="1"/>
+            <a:r>
+              <a:rPr lang="en-US" dirty="0"/>
+              <a:t>Arrays have a resizing cost, Linked nodes don’t</a:t>
+            </a:r>
+          </a:p>
+          <a:p>
+            <a:pPr lvl="1"/>
+            <a:r>
+              <a:rPr lang="en-US" dirty="0"/>
+              <a:t>Linked nodes maybe use more storage</a:t>
+            </a:r>
+          </a:p>
+          <a:p>
+            <a:pPr lvl="1"/>
+            <a:r>
+              <a:rPr lang="en-US" dirty="0"/>
+              <a:t>Maybe if we knew that the approximate of our array, we wouldn’t need to do resizing, which saves object creation time</a:t>
+            </a:r>
+          </a:p>
+          <a:p>
+            <a:pPr lvl="1"/>
+            <a:r>
+              <a:rPr lang="en-US" dirty="0"/>
+              <a:t>Memory allocation is very slow</a:t>
+            </a:r>
+          </a:p>
+          <a:p>
+            <a:pPr lvl="2"/>
+            <a:r>
+              <a:rPr lang="en-US" dirty="0"/>
+              <a:t>Less frequently need to allocate memory for the array</a:t>
+            </a:r>
+          </a:p>
+          <a:p>
+            <a:pPr lvl="1"/>
+            <a:r>
+              <a:rPr lang="en-US" dirty="0"/>
+              <a:t>Constant time for all operations (both)</a:t>
+            </a:r>
+          </a:p>
+          <a:p>
+            <a:pPr lvl="1"/>
+            <a:r>
+              <a:rPr lang="en-US" dirty="0"/>
+              <a:t>Cache locality</a:t>
+            </a:r>
+          </a:p>
+        </p:txBody>
+      </p:sp>
+    </p:spTree>
+    <p:extLst>
+      <p:ext uri="{BB962C8B-B14F-4D97-AF65-F5344CB8AC3E}">
+        <p14:creationId xmlns:p14="http://schemas.microsoft.com/office/powerpoint/2010/main" val="1374528974"/>
+      </p:ext>
+    </p:extLst>
+  </p:cSld>
+  <p:clrMapOvr>
+    <a:masterClrMapping/>
+  </p:clrMapOvr>
+</p:sld>
+</file>
+
+<file path=ppt/slides/slide11.xml><?xml version="1.0" encoding="utf-8"?>
+<p:sld xmlns:a="http://schemas.openxmlformats.org/drawingml/2006/main" xmlns:r="http://schemas.openxmlformats.org/officeDocument/2006/relationships" xmlns:p="http://schemas.openxmlformats.org/presentationml/2006/main">
+  <p:cSld>
+    <p:spTree>
+      <p:nvGrpSpPr>
+        <p:cNvPr id="1" name=""/>
+        <p:cNvGrpSpPr/>
+        <p:nvPr/>
+      </p:nvGrpSpPr>
+      <p:grpSpPr>
+        <a:xfrm>
+          <a:off x="0" y="0"/>
+          <a:ext cx="0" cy="0"/>
+          <a:chOff x="0" y="0"/>
+          <a:chExt cx="0" cy="0"/>
+        </a:xfrm>
+      </p:grpSpPr>
+      <p:sp>
+        <p:nvSpPr>
+          <p:cNvPr id="2" name="Title 1">
+            <a:extLst>
+              <a:ext uri="{FF2B5EF4-FFF2-40B4-BE49-F238E27FC236}">
+                <a16:creationId xmlns:a16="http://schemas.microsoft.com/office/drawing/2014/main" id="{D70D41E5-465C-EBB5-E9CD-029376B833DF}"/>
+              </a:ext>
+            </a:extLst>
+          </p:cNvPr>
+          <p:cNvSpPr>
+            <a:spLocks noGrp="1"/>
+          </p:cNvSpPr>
+          <p:nvPr>
+            <p:ph type="title"/>
+          </p:nvPr>
+        </p:nvSpPr>
+        <p:spPr/>
+        <p:txBody>
+          <a:bodyPr/>
+          <a:lstStyle/>
+          <a:p>
+            <a:r>
+              <a:rPr lang="en-US" dirty="0"/>
+              <a:t>ADT: Stack</a:t>
+            </a:r>
+          </a:p>
+        </p:txBody>
+      </p:sp>
+      <p:sp>
+        <p:nvSpPr>
+          <p:cNvPr id="3" name="Content Placeholder 2">
+            <a:extLst>
+              <a:ext uri="{FF2B5EF4-FFF2-40B4-BE49-F238E27FC236}">
+                <a16:creationId xmlns:a16="http://schemas.microsoft.com/office/drawing/2014/main" id="{B5EF048E-DA88-5227-7793-0EE138E7390F}"/>
+              </a:ext>
+            </a:extLst>
+          </p:cNvPr>
+          <p:cNvSpPr>
+            <a:spLocks noGrp="1"/>
+          </p:cNvSpPr>
+          <p:nvPr>
+            <p:ph idx="1"/>
+          </p:nvPr>
+        </p:nvSpPr>
+        <p:spPr/>
+        <p:txBody>
+          <a:bodyPr>
+            <a:normAutofit/>
+          </a:bodyPr>
+          <a:lstStyle/>
+          <a:p>
+            <a:r>
+              <a:rPr lang="en-US" dirty="0"/>
+              <a:t>What is it?</a:t>
+            </a:r>
+          </a:p>
+          <a:p>
+            <a:pPr lvl="1"/>
+            <a:r>
+              <a:rPr lang="en-US" dirty="0"/>
+              <a:t>A “Last In First Out” (LIFO) collection of items (sometimes called FILO)</a:t>
+            </a:r>
+          </a:p>
+          <a:p>
+            <a:r>
+              <a:rPr lang="en-US" dirty="0"/>
+              <a:t>What operations do we need?</a:t>
+            </a:r>
+          </a:p>
+          <a:p>
+            <a:pPr lvl="1"/>
+            <a:r>
+              <a:rPr lang="en-US" dirty="0"/>
+              <a:t>push</a:t>
+            </a:r>
+          </a:p>
+          <a:p>
+            <a:pPr lvl="2"/>
+            <a:r>
+              <a:rPr lang="en-US" dirty="0"/>
+              <a:t>Add a new item onto the stack</a:t>
+            </a:r>
+          </a:p>
+          <a:p>
+            <a:pPr lvl="1"/>
+            <a:r>
+              <a:rPr lang="en-US" dirty="0"/>
+              <a:t>peek</a:t>
+            </a:r>
+          </a:p>
+          <a:p>
+            <a:pPr lvl="2"/>
+            <a:r>
+              <a:rPr lang="en-US" dirty="0"/>
+              <a:t>Return the value of the most recently pushed item</a:t>
+            </a:r>
+          </a:p>
+          <a:p>
+            <a:pPr lvl="1"/>
+            <a:r>
+              <a:rPr lang="en-US" dirty="0"/>
+              <a:t>pop</a:t>
+            </a:r>
+          </a:p>
+          <a:p>
+            <a:pPr lvl="2"/>
+            <a:r>
+              <a:rPr lang="en-US" dirty="0"/>
+              <a:t>Return the value of the most recently pushed item and remove it from the stack</a:t>
+            </a:r>
+          </a:p>
+          <a:p>
+            <a:pPr lvl="1"/>
+            <a:r>
+              <a:rPr lang="en-US" dirty="0" err="1"/>
+              <a:t>isEmpty</a:t>
+            </a:r>
+            <a:endParaRPr lang="en-US" dirty="0"/>
+          </a:p>
+          <a:p>
+            <a:pPr lvl="2"/>
+            <a:r>
+              <a:rPr lang="en-US" dirty="0"/>
+              <a:t>Indicate whether or not there are items still on the stack</a:t>
+            </a:r>
+          </a:p>
+        </p:txBody>
+      </p:sp>
+      <mc:AlternateContent xmlns:mc="http://schemas.openxmlformats.org/markup-compatibility/2006">
+        <mc:Choice xmlns:p14="http://schemas.microsoft.com/office/powerpoint/2010/main" Requires="p14">
+          <p:contentPart p14:bwMode="auto" r:id="rId2">
+            <p14:nvContentPartPr>
+              <p14:cNvPr id="4" name="Ink 3">
+                <a:extLst>
+                  <a:ext uri="{FF2B5EF4-FFF2-40B4-BE49-F238E27FC236}">
+                    <a16:creationId xmlns:a16="http://schemas.microsoft.com/office/drawing/2014/main" id="{5AAB074B-FDFA-95C1-E348-F2C5B9CEE736}"/>
+                  </a:ext>
+                </a:extLst>
+              </p14:cNvPr>
+              <p14:cNvContentPartPr/>
+              <p14:nvPr/>
+            </p14:nvContentPartPr>
+            <p14:xfrm>
+              <a:off x="992520" y="3533040"/>
+              <a:ext cx="1373760" cy="1868040"/>
+            </p14:xfrm>
+          </p:contentPart>
+        </mc:Choice>
+        <mc:Fallback>
+          <p:pic>
+            <p:nvPicPr>
+              <p:cNvPr id="4" name="Ink 3">
+                <a:extLst>
+                  <a:ext uri="{FF2B5EF4-FFF2-40B4-BE49-F238E27FC236}">
+                    <a16:creationId xmlns:a16="http://schemas.microsoft.com/office/drawing/2014/main" id="{5AAB074B-FDFA-95C1-E348-F2C5B9CEE736}"/>
+                  </a:ext>
+                </a:extLst>
+              </p:cNvPr>
+              <p:cNvPicPr/>
+              <p:nvPr/>
+            </p:nvPicPr>
+            <p:blipFill>
+              <a:blip r:embed="rId3"/>
+              <a:stretch>
+                <a:fillRect/>
+              </a:stretch>
+            </p:blipFill>
+            <p:spPr>
+              <a:xfrm>
+                <a:off x="983160" y="3523680"/>
+                <a:ext cx="1392480" cy="1886760"/>
+              </a:xfrm>
+              <a:prstGeom prst="rect">
+                <a:avLst/>
+              </a:prstGeom>
+            </p:spPr>
+          </p:pic>
+        </mc:Fallback>
+      </mc:AlternateContent>
+    </p:spTree>
+    <p:extLst>
+      <p:ext uri="{BB962C8B-B14F-4D97-AF65-F5344CB8AC3E}">
+        <p14:creationId xmlns:p14="http://schemas.microsoft.com/office/powerpoint/2010/main" val="39125618"/>
+      </p:ext>
+    </p:extLst>
+  </p:cSld>
+  <p:clrMapOvr>
+    <a:masterClrMapping/>
+  </p:clrMapOvr>
+</p:sld>
+</file>
+
+<file path=ppt/slides/slide12.xml><?xml version="1.0" encoding="utf-8"?>
+<p:sld xmlns:a="http://schemas.openxmlformats.org/drawingml/2006/main" xmlns:r="http://schemas.openxmlformats.org/officeDocument/2006/relationships" xmlns:p="http://schemas.openxmlformats.org/presentationml/2006/main">
+  <p:cSld>
+    <p:spTree>
+      <p:nvGrpSpPr>
+        <p:cNvPr id="1" name=""/>
+        <p:cNvGrpSpPr/>
+        <p:nvPr/>
+      </p:nvGrpSpPr>
+      <p:grpSpPr>
+        <a:xfrm>
+          <a:off x="0" y="0"/>
+          <a:ext cx="0" cy="0"/>
+          <a:chOff x="0" y="0"/>
+          <a:chExt cx="0" cy="0"/>
+        </a:xfrm>
+      </p:grpSpPr>
+      <p:sp>
+        <p:nvSpPr>
+          <p:cNvPr id="2" name="Title 1">
+            <a:extLst>
+              <a:ext uri="{FF2B5EF4-FFF2-40B4-BE49-F238E27FC236}">
                 <a16:creationId xmlns:a16="http://schemas.microsoft.com/office/drawing/2014/main" id="{149F71B3-2D7D-74A2-E5C3-63EBD2C239C8}"/>
               </a:ext>
             </a:extLst>
@@ -3997,7 +4676,7 @@
 </p:sld>
 </file>
 
-<file path=ppt/slides/slide11.xml><?xml version="1.0" encoding="utf-8"?>
+<file path=ppt/slides/slide13.xml><?xml version="1.0" encoding="utf-8"?>
 <p:sld xmlns:a="http://schemas.openxmlformats.org/drawingml/2006/main" xmlns:r="http://schemas.openxmlformats.org/officeDocument/2006/relationships" xmlns:p="http://schemas.openxmlformats.org/presentationml/2006/main">
   <p:cSld>
     <p:spTree>
@@ -4126,7 +4805,7 @@
       </p:sp>
       <p:grpSp>
         <p:nvGrpSpPr>
-          <p:cNvPr id="7" name="Group 6">
+          <p:cNvPr id="7" name="Group 6" descr="Depicts the problem of trying to find the end of the yarn from a pile. There is a blanket which possesses one end of the yarn. The other end is in a tangled pile. We need to find the end from among that tangled pile.">
             <a:extLst>
               <a:ext uri="{FF2B5EF4-FFF2-40B4-BE49-F238E27FC236}">
                 <a16:creationId xmlns:a16="http://schemas.microsoft.com/office/drawing/2014/main" id="{494A9C52-F5D2-C88A-3A31-49852E7FE19D}"/>
@@ -6511,7 +7190,7 @@
 </p:sld>
 </file>
 
-<file path=ppt/slides/slide12.xml><?xml version="1.0" encoding="utf-8"?>
+<file path=ppt/slides/slide14.xml><?xml version="1.0" encoding="utf-8"?>
 <p:sld xmlns:a="http://schemas.openxmlformats.org/drawingml/2006/main" xmlns:r="http://schemas.openxmlformats.org/officeDocument/2006/relationships" xmlns:p="http://schemas.openxmlformats.org/presentationml/2006/main">
   <p:cSld>
     <p:spTree>
@@ -6597,6 +7276,9 @@
             <a:extLst>
               <a:ext uri="{FF2B5EF4-FFF2-40B4-BE49-F238E27FC236}">
                 <a16:creationId xmlns:a16="http://schemas.microsoft.com/office/drawing/2014/main" id="{2F972420-6B26-4271-AD3A-A848D46D6A0E}"/>
+              </a:ext>
+              <a:ext uri="{C183D7F6-B498-43B3-948B-1728B52AA6E4}">
+                <adec:decorative xmlns:adec="http://schemas.microsoft.com/office/drawing/2017/decorative" val="1"/>
               </a:ext>
             </a:extLst>
           </p:cNvPr>
@@ -8978,7 +9660,7 @@
 </p:sld>
 </file>
 
-<file path=ppt/slides/slide13.xml><?xml version="1.0" encoding="utf-8"?>
+<file path=ppt/slides/slide15.xml><?xml version="1.0" encoding="utf-8"?>
 <p:sld xmlns:a="http://schemas.openxmlformats.org/drawingml/2006/main" xmlns:r="http://schemas.openxmlformats.org/officeDocument/2006/relationships" xmlns:p="http://schemas.openxmlformats.org/presentationml/2006/main">
   <p:cSld>
     <p:spTree>
@@ -9025,7 +9707,7 @@
       </p:sp>
       <p:pic>
         <p:nvPicPr>
-          <p:cNvPr id="14" name="Picture 13">
+          <p:cNvPr id="14" name="Picture 13" descr="Input: the blanket with one end of yarn, the pile with the other end.">
             <a:extLst>
               <a:ext uri="{FF2B5EF4-FFF2-40B4-BE49-F238E27FC236}">
                 <a16:creationId xmlns:a16="http://schemas.microsoft.com/office/drawing/2014/main" id="{EEAE774A-BB99-6245-DF87-E1B9D0363D2A}"/>
@@ -9067,7 +9749,7 @@
       </p:pic>
       <p:pic>
         <p:nvPicPr>
-          <p:cNvPr id="12" name="Picture 11" descr="A picture containing whistle, key&#10;&#10;Description automatically generated">
+          <p:cNvPr id="12" name="Picture 11" descr="step 1: split the pile in half, count the number of strands between them. If there is an even number then that means the end of the yarn must be in the half-pile which connects to the blanket.">
             <a:extLst>
               <a:ext uri="{FF2B5EF4-FFF2-40B4-BE49-F238E27FC236}">
                 <a16:creationId xmlns:a16="http://schemas.microsoft.com/office/drawing/2014/main" id="{3B6BBC2D-A66F-DB9C-04C2-A9C2963A4EF2}"/>
@@ -9109,7 +9791,7 @@
       </p:pic>
       <p:pic>
         <p:nvPicPr>
-          <p:cNvPr id="10" name="Picture 9">
+          <p:cNvPr id="10" name="Picture 9" descr="In the previous step we had 7 strands crossing, so we next repeat the process of dividing the pile in half on the pile that does not attach to the blanket. In the next step we again count the crossing strands. If it's even then we continue with the pile that connects to the previously discarded pile.">
             <a:extLst>
               <a:ext uri="{FF2B5EF4-FFF2-40B4-BE49-F238E27FC236}">
                 <a16:creationId xmlns:a16="http://schemas.microsoft.com/office/drawing/2014/main" id="{58BED0D0-21C6-FBC0-34A7-7C88AC53F1FB}"/>
@@ -9151,7 +9833,7 @@
       </p:pic>
       <p:pic>
         <p:nvPicPr>
-          <p:cNvPr id="8" name="Content Placeholder 7" descr="A picture containing accessory, key&#10;&#10;Description automatically generated">
+          <p:cNvPr id="8" name="Content Placeholder 7" descr="We continue until we pile is small enough that we can simply spot the end.">
             <a:extLst>
               <a:ext uri="{FF2B5EF4-FFF2-40B4-BE49-F238E27FC236}">
                 <a16:creationId xmlns:a16="http://schemas.microsoft.com/office/drawing/2014/main" id="{7559EE6A-C753-DE43-1417-771D507A9974}"/>
@@ -9216,7 +9898,7 @@
           <a:p>
             <a:fld id="{F4E8603E-186F-4CC7-B8E2-5FD613D3E28C}" type="slidenum">
               <a:rPr lang="en-US" smtClean="0"/>
-              <a:t>13</a:t>
+              <a:t>15</a:t>
             </a:fld>
             <a:endParaRPr lang="en-US" dirty="0"/>
           </a:p>
@@ -9477,7 +10159,7 @@
 </p:sld>
 </file>
 
-<file path=ppt/slides/slide14.xml><?xml version="1.0" encoding="utf-8"?>
+<file path=ppt/slides/slide16.xml><?xml version="1.0" encoding="utf-8"?>
 <p:sld xmlns:a="http://schemas.openxmlformats.org/drawingml/2006/main" xmlns:r="http://schemas.openxmlformats.org/officeDocument/2006/relationships" xmlns:p="http://schemas.openxmlformats.org/presentationml/2006/main">
   <p:cSld>
     <p:spTree>
@@ -9603,6 +10285,9 @@
             <a:extLst>
               <a:ext uri="{FF2B5EF4-FFF2-40B4-BE49-F238E27FC236}">
                 <a16:creationId xmlns:a16="http://schemas.microsoft.com/office/drawing/2014/main" id="{4D1B2CB4-59D7-A41F-E296-7ABCB1DC156F}"/>
+              </a:ext>
+              <a:ext uri="{C183D7F6-B498-43B3-948B-1728B52AA6E4}">
+                <adec:decorative xmlns:adec="http://schemas.microsoft.com/office/drawing/2017/decorative" val="1"/>
               </a:ext>
             </a:extLst>
           </p:cNvPr>
@@ -11973,7 +12658,7 @@
       </p:grpSp>
       <p:grpSp>
         <p:nvGrpSpPr>
-          <p:cNvPr id="18" name="Group 17">
+          <p:cNvPr id="18" name="Group 17" descr="Pile A refers to the pile that connects to the blanket. Pile B is the other pile.">
             <a:extLst>
               <a:ext uri="{FF2B5EF4-FFF2-40B4-BE49-F238E27FC236}">
                 <a16:creationId xmlns:a16="http://schemas.microsoft.com/office/drawing/2014/main" id="{1A47E06E-C41F-E698-74B1-DFA8100725AB}"/>
@@ -13528,6 +14213,9 @@
               <a:ext uri="{FF2B5EF4-FFF2-40B4-BE49-F238E27FC236}">
                 <a16:creationId xmlns:a16="http://schemas.microsoft.com/office/drawing/2014/main" id="{7CFFEF35-1F9B-40D0-9482-87780E141A1F}"/>
               </a:ext>
+              <a:ext uri="{C183D7F6-B498-43B3-948B-1728B52AA6E4}">
+                <adec:decorative xmlns:adec="http://schemas.microsoft.com/office/drawing/2017/decorative" val="1"/>
+              </a:ext>
             </a:extLst>
           </p:cNvPr>
           <p:cNvSpPr/>
@@ -13675,7 +14363,7 @@
           <a:p>
             <a:fld id="{F4E8603E-186F-4CC7-B8E2-5FD613D3E28C}" type="slidenum">
               <a:rPr lang="en-US" smtClean="0"/>
-              <a:t>14</a:t>
+              <a:t>16</a:t>
             </a:fld>
             <a:endParaRPr lang="en-US" dirty="0"/>
           </a:p>
@@ -13694,7 +14382,7 @@
 </p:sld>
 </file>
 
-<file path=ppt/slides/slide15.xml><?xml version="1.0" encoding="utf-8"?>
+<file path=ppt/slides/slide17.xml><?xml version="1.0" encoding="utf-8"?>
 <p:sld xmlns:a="http://schemas.openxmlformats.org/drawingml/2006/main" xmlns:r="http://schemas.openxmlformats.org/officeDocument/2006/relationships" xmlns:p="http://schemas.openxmlformats.org/presentationml/2006/main">
   <p:cSld>
     <p:spTree>
@@ -13783,7 +14471,7 @@
 </p:sld>
 </file>
 
-<file path=ppt/slides/slide16.xml><?xml version="1.0" encoding="utf-8"?>
+<file path=ppt/slides/slide18.xml><?xml version="1.0" encoding="utf-8"?>
 <p:sld xmlns:a="http://schemas.openxmlformats.org/drawingml/2006/main" xmlns:r="http://schemas.openxmlformats.org/officeDocument/2006/relationships" xmlns:p="http://schemas.openxmlformats.org/presentationml/2006/main">
   <p:cSld>
     <p:spTree>
@@ -13907,6 +14595,57 @@
           </a:p>
         </p:txBody>
       </p:sp>
+      <mc:AlternateContent xmlns:mc="http://schemas.openxmlformats.org/markup-compatibility/2006">
+        <mc:Choice xmlns:p14="http://schemas.microsoft.com/office/powerpoint/2010/main" Requires="p14">
+          <p:contentPart p14:bwMode="auto" r:id="rId2">
+            <p14:nvContentPartPr>
+              <p14:cNvPr id="4" name="Ink 3">
+                <a:extLst>
+                  <a:ext uri="{FF2B5EF4-FFF2-40B4-BE49-F238E27FC236}">
+                    <a16:creationId xmlns:a16="http://schemas.microsoft.com/office/drawing/2014/main" id="{F85CF0E8-A7F6-8170-5A0F-FA9B4AC2D3B9}"/>
+                  </a:ext>
+                </a:extLst>
+              </p14:cNvPr>
+              <p14:cNvContentPartPr/>
+              <p14:nvPr/>
+            </p14:nvContentPartPr>
+            <p14:xfrm>
+              <a:off x="2968200" y="1992960"/>
+              <a:ext cx="6050160" cy="361800"/>
+            </p14:xfrm>
+          </p:contentPart>
+        </mc:Choice>
+        <mc:Fallback>
+          <p:pic>
+            <p:nvPicPr>
+              <p:cNvPr id="4" name="Ink 3">
+                <a:extLst>
+                  <a:ext uri="{FF2B5EF4-FFF2-40B4-BE49-F238E27FC236}">
+                    <a16:creationId xmlns:a16="http://schemas.microsoft.com/office/drawing/2014/main" id="{F85CF0E8-A7F6-8170-5A0F-FA9B4AC2D3B9}"/>
+                  </a:ext>
+                </a:extLst>
+              </p:cNvPr>
+              <p:cNvPicPr/>
+              <p:nvPr/>
+            </p:nvPicPr>
+            <p:blipFill>
+              <a:blip r:embed="rId3"/>
+              <a:stretch>
+                <a:fillRect/>
+              </a:stretch>
+            </p:blipFill>
+            <p:spPr>
+              <a:xfrm>
+                <a:off x="2958840" y="1983600"/>
+                <a:ext cx="6068880" cy="380520"/>
+              </a:xfrm>
+              <a:prstGeom prst="rect">
+                <a:avLst/>
+              </a:prstGeom>
+            </p:spPr>
+          </p:pic>
+        </mc:Fallback>
+      </mc:AlternateContent>
     </p:spTree>
     <p:extLst>
       <p:ext uri="{BB962C8B-B14F-4D97-AF65-F5344CB8AC3E}">
@@ -13920,7 +14659,7 @@
 </p:sld>
 </file>
 
-<file path=ppt/slides/slide17.xml><?xml version="1.0" encoding="utf-8"?>
+<file path=ppt/slides/slide19.xml><?xml version="1.0" encoding="utf-8"?>
 <p:sld xmlns:a="http://schemas.openxmlformats.org/drawingml/2006/main" xmlns:r="http://schemas.openxmlformats.org/officeDocument/2006/relationships" xmlns:p="http://schemas.openxmlformats.org/presentationml/2006/main">
   <p:cSld>
     <p:spTree>
@@ -14072,7 +14811,153 @@
 </p:sld>
 </file>
 
-<file path=ppt/slides/slide18.xml><?xml version="1.0" encoding="utf-8"?>
+<file path=ppt/slides/slide2.xml><?xml version="1.0" encoding="utf-8"?>
+<p:sld xmlns:a="http://schemas.openxmlformats.org/drawingml/2006/main" xmlns:r="http://schemas.openxmlformats.org/officeDocument/2006/relationships" xmlns:p="http://schemas.openxmlformats.org/presentationml/2006/main">
+  <p:cSld>
+    <p:spTree>
+      <p:nvGrpSpPr>
+        <p:cNvPr id="1" name=""/>
+        <p:cNvGrpSpPr/>
+        <p:nvPr/>
+      </p:nvGrpSpPr>
+      <p:grpSpPr>
+        <a:xfrm>
+          <a:off x="0" y="0"/>
+          <a:ext cx="0" cy="0"/>
+          <a:chOff x="0" y="0"/>
+          <a:chExt cx="0" cy="0"/>
+        </a:xfrm>
+      </p:grpSpPr>
+      <p:sp>
+        <p:nvSpPr>
+          <p:cNvPr id="2" name="Title 1">
+            <a:extLst>
+              <a:ext uri="{FF2B5EF4-FFF2-40B4-BE49-F238E27FC236}">
+                <a16:creationId xmlns:a16="http://schemas.microsoft.com/office/drawing/2014/main" id="{06138DD4-06E1-4997-10CD-58E9D69CC843}"/>
+              </a:ext>
+            </a:extLst>
+          </p:cNvPr>
+          <p:cNvSpPr>
+            <a:spLocks noGrp="1"/>
+          </p:cNvSpPr>
+          <p:nvPr>
+            <p:ph type="title"/>
+          </p:nvPr>
+        </p:nvSpPr>
+        <p:spPr/>
+        <p:txBody>
+          <a:bodyPr/>
+          <a:lstStyle/>
+          <a:p>
+            <a:r>
+              <a:rPr lang="en-US" dirty="0"/>
+              <a:t>Announcements</a:t>
+            </a:r>
+          </a:p>
+        </p:txBody>
+      </p:sp>
+      <p:sp>
+        <p:nvSpPr>
+          <p:cNvPr id="3" name="Content Placeholder 2">
+            <a:extLst>
+              <a:ext uri="{FF2B5EF4-FFF2-40B4-BE49-F238E27FC236}">
+                <a16:creationId xmlns:a16="http://schemas.microsoft.com/office/drawing/2014/main" id="{2B4BBE2C-C693-B1FE-74D0-68C0E05A99A1}"/>
+              </a:ext>
+            </a:extLst>
+          </p:cNvPr>
+          <p:cNvSpPr>
+            <a:spLocks noGrp="1"/>
+          </p:cNvSpPr>
+          <p:nvPr>
+            <p:ph idx="1"/>
+          </p:nvPr>
+        </p:nvSpPr>
+        <p:spPr/>
+        <p:txBody>
+          <a:bodyPr/>
+          <a:lstStyle/>
+          <a:p>
+            <a:r>
+              <a:rPr lang="en-US" dirty="0"/>
+              <a:t>Exercise 0 released</a:t>
+            </a:r>
+          </a:p>
+          <a:p>
+            <a:pPr lvl="1"/>
+            <a:r>
+              <a:rPr lang="en-US" dirty="0"/>
+              <a:t>Due Wednesday 4/8</a:t>
+            </a:r>
+          </a:p>
+          <a:p>
+            <a:pPr lvl="1"/>
+            <a:r>
+              <a:rPr lang="en-US" dirty="0"/>
+              <a:t>There are 2 separate </a:t>
+            </a:r>
+            <a:r>
+              <a:rPr lang="en-US" dirty="0" err="1"/>
+              <a:t>gradescope</a:t>
+            </a:r>
+            <a:r>
+              <a:rPr lang="en-US" dirty="0"/>
+              <a:t> submissions</a:t>
+            </a:r>
+          </a:p>
+          <a:p>
+            <a:r>
+              <a:rPr lang="en-US" dirty="0"/>
+              <a:t>Concept check 0 released</a:t>
+            </a:r>
+          </a:p>
+          <a:p>
+            <a:pPr lvl="1"/>
+            <a:r>
+              <a:rPr lang="en-US" dirty="0"/>
+              <a:t>Helps us to get more familiar with each other!</a:t>
+            </a:r>
+          </a:p>
+          <a:p>
+            <a:pPr lvl="1"/>
+            <a:r>
+              <a:rPr lang="en-US" dirty="0" err="1"/>
+              <a:t>Gradescope</a:t>
+            </a:r>
+            <a:r>
+              <a:rPr lang="en-US" dirty="0"/>
+              <a:t> submission due 4/10</a:t>
+            </a:r>
+          </a:p>
+          <a:p>
+            <a:pPr lvl="1"/>
+            <a:r>
+              <a:rPr lang="en-US" dirty="0"/>
+              <a:t>Meet the staff activity due by 5/1</a:t>
+            </a:r>
+          </a:p>
+          <a:p>
+            <a:pPr lvl="2"/>
+            <a:r>
+              <a:rPr lang="en-US" dirty="0"/>
+              <a:t>Come to any office hours, chat with us, ask us to mark you off for this</a:t>
+            </a:r>
+          </a:p>
+        </p:txBody>
+      </p:sp>
+    </p:spTree>
+    <p:extLst>
+      <p:ext uri="{BB962C8B-B14F-4D97-AF65-F5344CB8AC3E}">
+        <p14:creationId xmlns:p14="http://schemas.microsoft.com/office/powerpoint/2010/main" val="3210885505"/>
+      </p:ext>
+    </p:extLst>
+  </p:cSld>
+  <p:clrMapOvr>
+    <a:masterClrMapping/>
+  </p:clrMapOvr>
+</p:sld>
+</file>
+
+<file path=ppt/slides/slide20.xml><?xml version="1.0" encoding="utf-8"?>
 <p:sld xmlns:a="http://schemas.openxmlformats.org/drawingml/2006/main" xmlns:r="http://schemas.openxmlformats.org/officeDocument/2006/relationships" xmlns:p="http://schemas.openxmlformats.org/presentationml/2006/main">
   <p:cSld>
     <p:spTree>
@@ -14347,7 +15232,7 @@
 </p:sld>
 </file>
 
-<file path=ppt/slides/slide19.xml><?xml version="1.0" encoding="utf-8"?>
+<file path=ppt/slides/slide21.xml><?xml version="1.0" encoding="utf-8"?>
 <p:sld xmlns:a="http://schemas.openxmlformats.org/drawingml/2006/main" xmlns:r="http://schemas.openxmlformats.org/officeDocument/2006/relationships" xmlns:p="http://schemas.openxmlformats.org/presentationml/2006/main">
   <p:cSld>
     <p:spTree>
@@ -14652,153 +15537,7 @@
 </p:sld>
 </file>
 
-<file path=ppt/slides/slide2.xml><?xml version="1.0" encoding="utf-8"?>
-<p:sld xmlns:a="http://schemas.openxmlformats.org/drawingml/2006/main" xmlns:r="http://schemas.openxmlformats.org/officeDocument/2006/relationships" xmlns:p="http://schemas.openxmlformats.org/presentationml/2006/main">
-  <p:cSld>
-    <p:spTree>
-      <p:nvGrpSpPr>
-        <p:cNvPr id="1" name=""/>
-        <p:cNvGrpSpPr/>
-        <p:nvPr/>
-      </p:nvGrpSpPr>
-      <p:grpSpPr>
-        <a:xfrm>
-          <a:off x="0" y="0"/>
-          <a:ext cx="0" cy="0"/>
-          <a:chOff x="0" y="0"/>
-          <a:chExt cx="0" cy="0"/>
-        </a:xfrm>
-      </p:grpSpPr>
-      <p:sp>
-        <p:nvSpPr>
-          <p:cNvPr id="2" name="Title 1">
-            <a:extLst>
-              <a:ext uri="{FF2B5EF4-FFF2-40B4-BE49-F238E27FC236}">
-                <a16:creationId xmlns:a16="http://schemas.microsoft.com/office/drawing/2014/main" id="{06138DD4-06E1-4997-10CD-58E9D69CC843}"/>
-              </a:ext>
-            </a:extLst>
-          </p:cNvPr>
-          <p:cNvSpPr>
-            <a:spLocks noGrp="1"/>
-          </p:cNvSpPr>
-          <p:nvPr>
-            <p:ph type="title"/>
-          </p:nvPr>
-        </p:nvSpPr>
-        <p:spPr/>
-        <p:txBody>
-          <a:bodyPr/>
-          <a:lstStyle/>
-          <a:p>
-            <a:r>
-              <a:rPr lang="en-US" dirty="0"/>
-              <a:t>Announcements</a:t>
-            </a:r>
-          </a:p>
-        </p:txBody>
-      </p:sp>
-      <p:sp>
-        <p:nvSpPr>
-          <p:cNvPr id="3" name="Content Placeholder 2">
-            <a:extLst>
-              <a:ext uri="{FF2B5EF4-FFF2-40B4-BE49-F238E27FC236}">
-                <a16:creationId xmlns:a16="http://schemas.microsoft.com/office/drawing/2014/main" id="{2B4BBE2C-C693-B1FE-74D0-68C0E05A99A1}"/>
-              </a:ext>
-            </a:extLst>
-          </p:cNvPr>
-          <p:cNvSpPr>
-            <a:spLocks noGrp="1"/>
-          </p:cNvSpPr>
-          <p:nvPr>
-            <p:ph idx="1"/>
-          </p:nvPr>
-        </p:nvSpPr>
-        <p:spPr/>
-        <p:txBody>
-          <a:bodyPr/>
-          <a:lstStyle/>
-          <a:p>
-            <a:r>
-              <a:rPr lang="en-US" dirty="0"/>
-              <a:t>Exercise 0 released</a:t>
-            </a:r>
-          </a:p>
-          <a:p>
-            <a:pPr lvl="1"/>
-            <a:r>
-              <a:rPr lang="en-US" dirty="0"/>
-              <a:t>Due Wednesday 1/14</a:t>
-            </a:r>
-          </a:p>
-          <a:p>
-            <a:pPr lvl="1"/>
-            <a:r>
-              <a:rPr lang="en-US" dirty="0"/>
-              <a:t>There are 2 separate </a:t>
-            </a:r>
-            <a:r>
-              <a:rPr lang="en-US" dirty="0" err="1"/>
-              <a:t>gradescope</a:t>
-            </a:r>
-            <a:r>
-              <a:rPr lang="en-US" dirty="0"/>
-              <a:t> submissions</a:t>
-            </a:r>
-          </a:p>
-          <a:p>
-            <a:r>
-              <a:rPr lang="en-US" dirty="0"/>
-              <a:t>Concept check 0 released</a:t>
-            </a:r>
-          </a:p>
-          <a:p>
-            <a:pPr lvl="1"/>
-            <a:r>
-              <a:rPr lang="en-US" dirty="0"/>
-              <a:t>Helps us to get more familiar with each other!</a:t>
-            </a:r>
-          </a:p>
-          <a:p>
-            <a:pPr lvl="1"/>
-            <a:r>
-              <a:rPr lang="en-US" dirty="0" err="1"/>
-              <a:t>Gradescope</a:t>
-            </a:r>
-            <a:r>
-              <a:rPr lang="en-US" dirty="0"/>
-              <a:t> submission due 1/15</a:t>
-            </a:r>
-          </a:p>
-          <a:p>
-            <a:pPr lvl="1"/>
-            <a:r>
-              <a:rPr lang="en-US" dirty="0"/>
-              <a:t>Meet the staff activity due by 1/30</a:t>
-            </a:r>
-          </a:p>
-          <a:p>
-            <a:pPr lvl="2"/>
-            <a:r>
-              <a:rPr lang="en-US" dirty="0"/>
-              <a:t>Come to any office hours, chat with us, ask us to mark you off for this</a:t>
-            </a:r>
-          </a:p>
-        </p:txBody>
-      </p:sp>
-    </p:spTree>
-    <p:extLst>
-      <p:ext uri="{BB962C8B-B14F-4D97-AF65-F5344CB8AC3E}">
-        <p14:creationId xmlns:p14="http://schemas.microsoft.com/office/powerpoint/2010/main" val="3210885505"/>
-      </p:ext>
-    </p:extLst>
-  </p:cSld>
-  <p:clrMapOvr>
-    <a:masterClrMapping/>
-  </p:clrMapOvr>
-</p:sld>
-</file>
-
-<file path=ppt/slides/slide20.xml><?xml version="1.0" encoding="utf-8"?>
+<file path=ppt/slides/slide22.xml><?xml version="1.0" encoding="utf-8"?>
 <p:sld xmlns:a="http://schemas.openxmlformats.org/drawingml/2006/main" xmlns:r="http://schemas.openxmlformats.org/officeDocument/2006/relationships" xmlns:p="http://schemas.openxmlformats.org/presentationml/2006/main">
   <p:cSld>
     <p:spTree>
@@ -15079,7 +15818,7 @@
 </p:sld>
 </file>
 
-<file path=ppt/slides/slide21.xml><?xml version="1.0" encoding="utf-8"?>
+<file path=ppt/slides/slide23.xml><?xml version="1.0" encoding="utf-8"?>
 <p:sld xmlns:a="http://schemas.openxmlformats.org/drawingml/2006/main" xmlns:r="http://schemas.openxmlformats.org/officeDocument/2006/relationships" xmlns:p="http://schemas.openxmlformats.org/presentationml/2006/main">
   <p:cSld>
     <p:spTree>
@@ -15562,7 +16301,7 @@
 </p:sld>
 </file>
 
-<file path=ppt/slides/slide22.xml><?xml version="1.0" encoding="utf-8"?>
+<file path=ppt/slides/slide24.xml><?xml version="1.0" encoding="utf-8"?>
 <p:sld xmlns:a="http://schemas.openxmlformats.org/drawingml/2006/main" xmlns:r="http://schemas.openxmlformats.org/officeDocument/2006/relationships" xmlns:p="http://schemas.openxmlformats.org/presentationml/2006/main">
   <p:cSld>
     <p:spTree>
@@ -15613,8 +16352,8 @@
           </a:p>
         </p:txBody>
       </p:sp>
-      <mc:AlternateContent xmlns:mc="http://schemas.openxmlformats.org/markup-compatibility/2006">
-        <mc:Choice xmlns:a14="http://schemas.microsoft.com/office/drawing/2010/main" Requires="a14">
+      <mc:AlternateContent xmlns:mc="http://schemas.openxmlformats.org/markup-compatibility/2006" xmlns:a14="http://schemas.microsoft.com/office/drawing/2010/main">
+        <mc:Choice Requires="a14">
           <p:sp>
             <p:nvSpPr>
               <p:cNvPr id="3" name="Content Placeholder 2">
@@ -15779,7 +16518,7 @@
             </p:txBody>
           </p:sp>
         </mc:Choice>
-        <mc:Fallback>
+        <mc:Fallback xmlns="">
           <p:sp>
             <p:nvSpPr>
               <p:cNvPr id="3" name="Content Placeholder 2">
@@ -15832,7 +16571,7 @@
 </p:sld>
 </file>
 
-<file path=ppt/slides/slide23.xml><?xml version="1.0" encoding="utf-8"?>
+<file path=ppt/slides/slide25.xml><?xml version="1.0" encoding="utf-8"?>
 <p:sld xmlns:a="http://schemas.openxmlformats.org/drawingml/2006/main" xmlns:r="http://schemas.openxmlformats.org/officeDocument/2006/relationships" xmlns:p="http://schemas.openxmlformats.org/presentationml/2006/main">
   <p:cSld>
     <p:spTree>
@@ -15883,7 +16622,7 @@
           <a:p>
             <a:r>
               <a:rPr lang="en-US" dirty="0"/>
-              <a:t>Worst Case Running Time - Example</a:t>
+              <a:t>Worst Case – Example 1 (Questions)</a:t>
             </a:r>
           </a:p>
         </p:txBody>
@@ -16300,7 +17039,7 @@
 </p:sld>
 </file>
 
-<file path=ppt/slides/slide24.xml><?xml version="1.0" encoding="utf-8"?>
+<file path=ppt/slides/slide26.xml><?xml version="1.0" encoding="utf-8"?>
 <p:sld xmlns:a="http://schemas.openxmlformats.org/drawingml/2006/main" xmlns:r="http://schemas.openxmlformats.org/officeDocument/2006/relationships" xmlns:p="http://schemas.openxmlformats.org/presentationml/2006/main">
   <p:cSld>
     <p:spTree>
@@ -16345,7 +17084,7 @@
           <a:p>
             <a:r>
               <a:rPr lang="en-US" dirty="0"/>
-              <a:t>Worst Case Running Time - Example</a:t>
+              <a:t>Worst Case – Example 1 (Answers)</a:t>
             </a:r>
           </a:p>
         </p:txBody>
@@ -16616,8 +17355,8 @@
           </a:p>
         </p:txBody>
       </p:sp>
-      <mc:AlternateContent xmlns:mc="http://schemas.openxmlformats.org/markup-compatibility/2006">
-        <mc:Choice xmlns:a14="http://schemas.microsoft.com/office/drawing/2010/main" Requires="a14">
+      <mc:AlternateContent xmlns:mc="http://schemas.openxmlformats.org/markup-compatibility/2006" xmlns:a14="http://schemas.microsoft.com/office/drawing/2010/main">
+        <mc:Choice Requires="a14">
           <p:sp>
             <p:nvSpPr>
               <p:cNvPr id="4" name="TextBox 3">
@@ -16839,7 +17578,7 @@
             </p:txBody>
           </p:sp>
         </mc:Choice>
-        <mc:Fallback>
+        <mc:Fallback xmlns="">
           <p:sp>
             <p:nvSpPr>
               <p:cNvPr id="4" name="TextBox 3">
@@ -16897,7 +17636,7 @@
 </p:sld>
 </file>
 
-<file path=ppt/slides/slide25.xml><?xml version="1.0" encoding="utf-8"?>
+<file path=ppt/slides/slide27.xml><?xml version="1.0" encoding="utf-8"?>
 <p:sld xmlns:a="http://schemas.openxmlformats.org/drawingml/2006/main" xmlns:r="http://schemas.openxmlformats.org/officeDocument/2006/relationships" xmlns:p="http://schemas.openxmlformats.org/presentationml/2006/main">
   <p:cSld>
     <p:spTree>
@@ -16942,7 +17681,7 @@
           <a:p>
             <a:r>
               <a:rPr lang="en-US" dirty="0"/>
-              <a:t>Worst Case Running Time – Example 2</a:t>
+              <a:t>Worst Case – Example 2 (Questions)</a:t>
             </a:r>
           </a:p>
         </p:txBody>
@@ -17254,7 +17993,7 @@
 </p:sld>
 </file>
 
-<file path=ppt/slides/slide26.xml><?xml version="1.0" encoding="utf-8"?>
+<file path=ppt/slides/slide28.xml><?xml version="1.0" encoding="utf-8"?>
 <p:sld xmlns:a="http://schemas.openxmlformats.org/drawingml/2006/main" xmlns:r="http://schemas.openxmlformats.org/officeDocument/2006/relationships" xmlns:p="http://schemas.openxmlformats.org/presentationml/2006/main">
   <p:cSld>
     <p:spTree>
@@ -17305,7 +18044,7 @@
           <a:p>
             <a:r>
               <a:rPr lang="en-US" dirty="0"/>
-              <a:t>Worst Case Running Time – Example 2</a:t>
+              <a:t>Worst Case – Example 2 (Answers)</a:t>
             </a:r>
           </a:p>
         </p:txBody>
@@ -17728,7 +18467,7 @@
 </p:sld>
 </file>
 
-<file path=ppt/slides/slide27.xml><?xml version="1.0" encoding="utf-8"?>
+<file path=ppt/slides/slide29.xml><?xml version="1.0" encoding="utf-8"?>
 <p:sld xmlns:a="http://schemas.openxmlformats.org/drawingml/2006/main" xmlns:r="http://schemas.openxmlformats.org/officeDocument/2006/relationships" xmlns:p="http://schemas.openxmlformats.org/presentationml/2006/main">
   <p:cSld>
     <p:spTree>
@@ -17913,7 +18652,149 @@
 </p:sld>
 </file>
 
-<file path=ppt/slides/slide28.xml><?xml version="1.0" encoding="utf-8"?>
+<file path=ppt/slides/slide3.xml><?xml version="1.0" encoding="utf-8"?>
+<p:sld xmlns:a="http://schemas.openxmlformats.org/drawingml/2006/main" xmlns:r="http://schemas.openxmlformats.org/officeDocument/2006/relationships" xmlns:p="http://schemas.openxmlformats.org/presentationml/2006/main">
+  <p:cSld>
+    <p:spTree>
+      <p:nvGrpSpPr>
+        <p:cNvPr id="1" name=""/>
+        <p:cNvGrpSpPr/>
+        <p:nvPr/>
+      </p:nvGrpSpPr>
+      <p:grpSpPr>
+        <a:xfrm>
+          <a:off x="0" y="0"/>
+          <a:ext cx="0" cy="0"/>
+          <a:chOff x="0" y="0"/>
+          <a:chExt cx="0" cy="0"/>
+        </a:xfrm>
+      </p:grpSpPr>
+      <p:sp>
+        <p:nvSpPr>
+          <p:cNvPr id="2" name="Title 1">
+            <a:extLst>
+              <a:ext uri="{FF2B5EF4-FFF2-40B4-BE49-F238E27FC236}">
+                <a16:creationId xmlns:a16="http://schemas.microsoft.com/office/drawing/2014/main" id="{D70D41E5-465C-EBB5-E9CD-029376B833DF}"/>
+              </a:ext>
+            </a:extLst>
+          </p:cNvPr>
+          <p:cNvSpPr>
+            <a:spLocks noGrp="1"/>
+          </p:cNvSpPr>
+          <p:nvPr>
+            <p:ph type="title"/>
+          </p:nvPr>
+        </p:nvSpPr>
+        <p:spPr/>
+        <p:txBody>
+          <a:bodyPr/>
+          <a:lstStyle/>
+          <a:p>
+            <a:r>
+              <a:rPr lang="en-US" dirty="0"/>
+              <a:t>ADT: Queue</a:t>
+            </a:r>
+          </a:p>
+        </p:txBody>
+      </p:sp>
+      <p:sp>
+        <p:nvSpPr>
+          <p:cNvPr id="3" name="Content Placeholder 2">
+            <a:extLst>
+              <a:ext uri="{FF2B5EF4-FFF2-40B4-BE49-F238E27FC236}">
+                <a16:creationId xmlns:a16="http://schemas.microsoft.com/office/drawing/2014/main" id="{B5EF048E-DA88-5227-7793-0EE138E7390F}"/>
+              </a:ext>
+            </a:extLst>
+          </p:cNvPr>
+          <p:cNvSpPr>
+            <a:spLocks noGrp="1"/>
+          </p:cNvSpPr>
+          <p:nvPr>
+            <p:ph idx="1"/>
+          </p:nvPr>
+        </p:nvSpPr>
+        <p:spPr/>
+        <p:txBody>
+          <a:bodyPr/>
+          <a:lstStyle/>
+          <a:p>
+            <a:r>
+              <a:rPr lang="en-US" dirty="0"/>
+              <a:t>What is it?</a:t>
+            </a:r>
+          </a:p>
+          <a:p>
+            <a:pPr lvl="1"/>
+            <a:r>
+              <a:rPr lang="en-US" dirty="0"/>
+              <a:t>A collection of items that we interact with in a “First In First Out” (FIFO) way</a:t>
+            </a:r>
+          </a:p>
+          <a:p>
+            <a:r>
+              <a:rPr lang="en-US" dirty="0"/>
+              <a:t>What operations do we need?</a:t>
+            </a:r>
+          </a:p>
+          <a:p>
+            <a:pPr lvl="1"/>
+            <a:r>
+              <a:rPr lang="en-US" dirty="0"/>
+              <a:t>Enqueue</a:t>
+            </a:r>
+          </a:p>
+          <a:p>
+            <a:pPr lvl="2"/>
+            <a:r>
+              <a:rPr lang="en-US" dirty="0"/>
+              <a:t>Add a new item to the queue</a:t>
+            </a:r>
+          </a:p>
+          <a:p>
+            <a:pPr lvl="1"/>
+            <a:r>
+              <a:rPr lang="en-US" dirty="0"/>
+              <a:t>Dequeue</a:t>
+            </a:r>
+          </a:p>
+          <a:p>
+            <a:pPr lvl="2"/>
+            <a:r>
+              <a:rPr lang="en-US" dirty="0"/>
+              <a:t>Remove the “oldest” item from the queue</a:t>
+            </a:r>
+          </a:p>
+          <a:p>
+            <a:pPr lvl="1"/>
+            <a:r>
+              <a:rPr lang="en-US" dirty="0" err="1"/>
+              <a:t>IsEmpty</a:t>
+            </a:r>
+            <a:endParaRPr lang="en-US" dirty="0"/>
+          </a:p>
+          <a:p>
+            <a:pPr lvl="2"/>
+            <a:r>
+              <a:rPr lang="en-US" dirty="0"/>
+              <a:t>Indicate whether or not there are items still on the queue</a:t>
+            </a:r>
+          </a:p>
+        </p:txBody>
+      </p:sp>
+    </p:spTree>
+    <p:extLst>
+      <p:ext uri="{BB962C8B-B14F-4D97-AF65-F5344CB8AC3E}">
+        <p14:creationId xmlns:p14="http://schemas.microsoft.com/office/powerpoint/2010/main" val="438875024"/>
+      </p:ext>
+    </p:extLst>
+  </p:cSld>
+  <p:clrMapOvr>
+    <a:masterClrMapping/>
+  </p:clrMapOvr>
+</p:sld>
+</file>
+
+<file path=ppt/slides/slide30.xml><?xml version="1.0" encoding="utf-8"?>
 <p:sld xmlns:a="http://schemas.openxmlformats.org/drawingml/2006/main" xmlns:r="http://schemas.openxmlformats.org/officeDocument/2006/relationships" xmlns:p="http://schemas.openxmlformats.org/presentationml/2006/main">
   <p:cSld>
     <p:spTree>
@@ -18052,7 +18933,7 @@
 </p:sld>
 </file>
 
-<file path=ppt/slides/slide29.xml><?xml version="1.0" encoding="utf-8"?>
+<file path=ppt/slides/slide31.xml><?xml version="1.0" encoding="utf-8"?>
 <p:sld xmlns:a="http://schemas.openxmlformats.org/drawingml/2006/main" xmlns:r="http://schemas.openxmlformats.org/officeDocument/2006/relationships" xmlns:p="http://schemas.openxmlformats.org/presentationml/2006/main">
   <p:cSld>
     <p:spTree>
@@ -18091,14 +18972,693 @@
           <a:lstStyle/>
           <a:p>
             <a:r>
-              <a:rPr lang="en-US" dirty="0"/>
-              <a:t>Amortized Complexity Example - </a:t>
-            </a:r>
-            <a:r>
               <a:rPr lang="en-US" dirty="0" err="1"/>
               <a:t>ArrayList</a:t>
             </a:r>
-            <a:endParaRPr lang="en-US" dirty="0"/>
+            <a:r>
+              <a:rPr lang="en-US" dirty="0"/>
+              <a:t> - Worst Case Time of Add</a:t>
+            </a:r>
+          </a:p>
+        </p:txBody>
+      </p:sp>
+      <p:sp>
+        <p:nvSpPr>
+          <p:cNvPr id="5" name="Content Placeholder 2">
+            <a:extLst>
+              <a:ext uri="{FF2B5EF4-FFF2-40B4-BE49-F238E27FC236}">
+                <a16:creationId xmlns:a16="http://schemas.microsoft.com/office/drawing/2014/main" id="{EBE0DF2B-2C50-08CC-5BA6-B5A1FBAD4B25}"/>
+              </a:ext>
+            </a:extLst>
+          </p:cNvPr>
+          <p:cNvSpPr>
+            <a:spLocks noGrp="1"/>
+          </p:cNvSpPr>
+          <p:nvPr>
+            <p:ph sz="half" idx="1"/>
+          </p:nvPr>
+        </p:nvSpPr>
+        <p:spPr>
+          <a:xfrm>
+            <a:off x="349135" y="1825625"/>
+            <a:ext cx="5670665" cy="4667250"/>
+          </a:xfrm>
+        </p:spPr>
+        <p:txBody>
+          <a:bodyPr>
+            <a:normAutofit/>
+          </a:bodyPr>
+          <a:lstStyle/>
+          <a:p>
+            <a:pPr marL="0" indent="0">
+              <a:buNone/>
+            </a:pPr>
+            <a:r>
+              <a:rPr lang="en-US" sz="1600" b="0" dirty="0">
+                <a:solidFill>
+                  <a:srgbClr val="0000FF"/>
+                </a:solidFill>
+                <a:effectLst/>
+                <a:highlight>
+                  <a:srgbClr val="FFFFFF"/>
+                </a:highlight>
+                <a:latin typeface="Consolas" panose="020B0609020204030204" pitchFamily="49" charset="0"/>
+              </a:rPr>
+              <a:t>public</a:t>
+            </a:r>
+            <a:r>
+              <a:rPr lang="en-US" sz="1600" b="0" dirty="0">
+                <a:solidFill>
+                  <a:srgbClr val="000000"/>
+                </a:solidFill>
+                <a:effectLst/>
+                <a:highlight>
+                  <a:srgbClr val="FFFFFF"/>
+                </a:highlight>
+                <a:latin typeface="Consolas" panose="020B0609020204030204" pitchFamily="49" charset="0"/>
+              </a:rPr>
+              <a:t> </a:t>
+            </a:r>
+            <a:r>
+              <a:rPr lang="en-US" sz="1600" b="0" dirty="0">
+                <a:solidFill>
+                  <a:srgbClr val="0000FF"/>
+                </a:solidFill>
+                <a:effectLst/>
+                <a:highlight>
+                  <a:srgbClr val="FFFFFF"/>
+                </a:highlight>
+                <a:latin typeface="Consolas" panose="020B0609020204030204" pitchFamily="49" charset="0"/>
+              </a:rPr>
+              <a:t>void</a:t>
+            </a:r>
+            <a:r>
+              <a:rPr lang="en-US" sz="1600" b="0" dirty="0">
+                <a:solidFill>
+                  <a:srgbClr val="000000"/>
+                </a:solidFill>
+                <a:effectLst/>
+                <a:highlight>
+                  <a:srgbClr val="FFFFFF"/>
+                </a:highlight>
+                <a:latin typeface="Consolas" panose="020B0609020204030204" pitchFamily="49" charset="0"/>
+              </a:rPr>
+              <a:t> add(</a:t>
+            </a:r>
+            <a:r>
+              <a:rPr lang="en-US" sz="1600" dirty="0">
+                <a:solidFill>
+                  <a:srgbClr val="0000FF"/>
+                </a:solidFill>
+                <a:highlight>
+                  <a:srgbClr val="FFFFFF"/>
+                </a:highlight>
+                <a:latin typeface="Consolas" panose="020B0609020204030204" pitchFamily="49" charset="0"/>
+              </a:rPr>
+              <a:t>int</a:t>
+            </a:r>
+            <a:r>
+              <a:rPr lang="en-US" sz="1600" b="0" dirty="0">
+                <a:solidFill>
+                  <a:srgbClr val="000000"/>
+                </a:solidFill>
+                <a:effectLst/>
+                <a:highlight>
+                  <a:srgbClr val="FFFFFF"/>
+                </a:highlight>
+                <a:latin typeface="Consolas" panose="020B0609020204030204" pitchFamily="49" charset="0"/>
+              </a:rPr>
+              <a:t> value){</a:t>
+            </a:r>
+          </a:p>
+          <a:p>
+            <a:pPr marL="0" indent="0">
+              <a:buNone/>
+            </a:pPr>
+            <a:r>
+              <a:rPr lang="en-US" sz="1600" b="0" dirty="0">
+                <a:solidFill>
+                  <a:srgbClr val="000000"/>
+                </a:solidFill>
+                <a:effectLst/>
+                <a:highlight>
+                  <a:srgbClr val="FFFFFF"/>
+                </a:highlight>
+                <a:latin typeface="Consolas" panose="020B0609020204030204" pitchFamily="49" charset="0"/>
+              </a:rPr>
+              <a:t>    </a:t>
+            </a:r>
+            <a:r>
+              <a:rPr lang="en-US" sz="1600" b="0" dirty="0">
+                <a:solidFill>
+                  <a:srgbClr val="0000FF"/>
+                </a:solidFill>
+                <a:effectLst/>
+                <a:highlight>
+                  <a:srgbClr val="FFFFFF"/>
+                </a:highlight>
+                <a:latin typeface="Consolas" panose="020B0609020204030204" pitchFamily="49" charset="0"/>
+              </a:rPr>
+              <a:t>if</a:t>
+            </a:r>
+            <a:r>
+              <a:rPr lang="en-US" sz="1600" b="0" dirty="0">
+                <a:solidFill>
+                  <a:srgbClr val="000000"/>
+                </a:solidFill>
+                <a:effectLst/>
+                <a:highlight>
+                  <a:srgbClr val="FFFFFF"/>
+                </a:highlight>
+                <a:latin typeface="Consolas" panose="020B0609020204030204" pitchFamily="49" charset="0"/>
+              </a:rPr>
+              <a:t>(</a:t>
+            </a:r>
+            <a:r>
+              <a:rPr lang="en-US" sz="1600" b="0" dirty="0" err="1">
+                <a:solidFill>
+                  <a:srgbClr val="000000"/>
+                </a:solidFill>
+                <a:effectLst/>
+                <a:highlight>
+                  <a:srgbClr val="FFFFFF"/>
+                </a:highlight>
+                <a:latin typeface="Consolas" panose="020B0609020204030204" pitchFamily="49" charset="0"/>
+              </a:rPr>
+              <a:t>data.length</a:t>
+            </a:r>
+            <a:r>
+              <a:rPr lang="en-US" sz="1600" b="0" dirty="0">
+                <a:solidFill>
+                  <a:srgbClr val="000000"/>
+                </a:solidFill>
+                <a:effectLst/>
+                <a:highlight>
+                  <a:srgbClr val="FFFFFF"/>
+                </a:highlight>
+                <a:latin typeface="Consolas" panose="020B0609020204030204" pitchFamily="49" charset="0"/>
+              </a:rPr>
+              <a:t> == size)</a:t>
+            </a:r>
+          </a:p>
+          <a:p>
+            <a:pPr marL="0" indent="0">
+              <a:buNone/>
+            </a:pPr>
+            <a:r>
+              <a:rPr lang="en-US" sz="1600" b="0" dirty="0">
+                <a:solidFill>
+                  <a:srgbClr val="000000"/>
+                </a:solidFill>
+                <a:effectLst/>
+                <a:highlight>
+                  <a:srgbClr val="FFFFFF"/>
+                </a:highlight>
+                <a:latin typeface="Consolas" panose="020B0609020204030204" pitchFamily="49" charset="0"/>
+              </a:rPr>
+              <a:t>        resize();</a:t>
+            </a:r>
+          </a:p>
+          <a:p>
+            <a:pPr marL="0" indent="0">
+              <a:buNone/>
+            </a:pPr>
+            <a:r>
+              <a:rPr lang="en-US" sz="1600" b="0" dirty="0">
+                <a:solidFill>
+                  <a:srgbClr val="000000"/>
+                </a:solidFill>
+                <a:effectLst/>
+                <a:highlight>
+                  <a:srgbClr val="FFFFFF"/>
+                </a:highlight>
+                <a:latin typeface="Consolas" panose="020B0609020204030204" pitchFamily="49" charset="0"/>
+              </a:rPr>
+              <a:t>    data[size] = value;</a:t>
+            </a:r>
+          </a:p>
+          <a:p>
+            <a:pPr marL="0" indent="0">
+              <a:buNone/>
+            </a:pPr>
+            <a:r>
+              <a:rPr lang="en-US" sz="1600" b="0" dirty="0">
+                <a:solidFill>
+                  <a:srgbClr val="000000"/>
+                </a:solidFill>
+                <a:effectLst/>
+                <a:highlight>
+                  <a:srgbClr val="FFFFFF"/>
+                </a:highlight>
+                <a:latin typeface="Consolas" panose="020B0609020204030204" pitchFamily="49" charset="0"/>
+              </a:rPr>
+              <a:t>    size++;</a:t>
+            </a:r>
+          </a:p>
+          <a:p>
+            <a:pPr marL="0" indent="0">
+              <a:buNone/>
+            </a:pPr>
+            <a:r>
+              <a:rPr lang="en-US" sz="1600" b="0" dirty="0">
+                <a:solidFill>
+                  <a:srgbClr val="000000"/>
+                </a:solidFill>
+                <a:effectLst/>
+                <a:highlight>
+                  <a:srgbClr val="FFFFFF"/>
+                </a:highlight>
+                <a:latin typeface="Consolas" panose="020B0609020204030204" pitchFamily="49" charset="0"/>
+              </a:rPr>
+              <a:t>}</a:t>
+            </a:r>
+            <a:endParaRPr lang="en-US" sz="1600" dirty="0">
+              <a:solidFill>
+                <a:srgbClr val="0000FF"/>
+              </a:solidFill>
+              <a:latin typeface="Consolas" panose="020B0609020204030204" pitchFamily="49" charset="0"/>
+            </a:endParaRPr>
+          </a:p>
+          <a:p>
+            <a:pPr marL="0" indent="0">
+              <a:buNone/>
+            </a:pPr>
+            <a:r>
+              <a:rPr lang="en-US" sz="1600" b="0" dirty="0">
+                <a:solidFill>
+                  <a:srgbClr val="0000FF"/>
+                </a:solidFill>
+                <a:effectLst/>
+                <a:latin typeface="Consolas" panose="020B0609020204030204" pitchFamily="49" charset="0"/>
+              </a:rPr>
+              <a:t>private</a:t>
+            </a:r>
+            <a:r>
+              <a:rPr lang="en-US" sz="1600" b="0" dirty="0">
+                <a:solidFill>
+                  <a:srgbClr val="000000"/>
+                </a:solidFill>
+                <a:effectLst/>
+                <a:latin typeface="Consolas" panose="020B0609020204030204" pitchFamily="49" charset="0"/>
+              </a:rPr>
+              <a:t> </a:t>
+            </a:r>
+            <a:r>
+              <a:rPr lang="en-US" sz="1600" b="0" dirty="0">
+                <a:solidFill>
+                  <a:srgbClr val="0000FF"/>
+                </a:solidFill>
+                <a:effectLst/>
+                <a:latin typeface="Consolas" panose="020B0609020204030204" pitchFamily="49" charset="0"/>
+              </a:rPr>
+              <a:t>void</a:t>
+            </a:r>
+            <a:r>
+              <a:rPr lang="en-US" sz="1600" b="0" dirty="0">
+                <a:solidFill>
+                  <a:srgbClr val="000000"/>
+                </a:solidFill>
+                <a:effectLst/>
+                <a:latin typeface="Consolas" panose="020B0609020204030204" pitchFamily="49" charset="0"/>
+              </a:rPr>
+              <a:t> resize(){</a:t>
+            </a:r>
+          </a:p>
+          <a:p>
+            <a:pPr marL="0" indent="0">
+              <a:buNone/>
+            </a:pPr>
+            <a:r>
+              <a:rPr lang="en-US" sz="1600" b="0" dirty="0">
+                <a:solidFill>
+                  <a:srgbClr val="000000"/>
+                </a:solidFill>
+                <a:effectLst/>
+                <a:latin typeface="Consolas" panose="020B0609020204030204" pitchFamily="49" charset="0"/>
+              </a:rPr>
+              <a:t>    </a:t>
+            </a:r>
+            <a:r>
+              <a:rPr lang="en-US" sz="1600" b="0" dirty="0">
+                <a:solidFill>
+                  <a:srgbClr val="0000FF"/>
+                </a:solidFill>
+                <a:effectLst/>
+                <a:latin typeface="Consolas" panose="020B0609020204030204" pitchFamily="49" charset="0"/>
+              </a:rPr>
+              <a:t>int</a:t>
+            </a:r>
+            <a:r>
+              <a:rPr lang="en-US" sz="1600" b="0" dirty="0">
+                <a:solidFill>
+                  <a:srgbClr val="000000"/>
+                </a:solidFill>
+                <a:effectLst/>
+                <a:latin typeface="Consolas" panose="020B0609020204030204" pitchFamily="49" charset="0"/>
+              </a:rPr>
+              <a:t>[] </a:t>
+            </a:r>
+            <a:r>
+              <a:rPr lang="en-US" sz="1600" b="0" dirty="0" err="1">
+                <a:solidFill>
+                  <a:srgbClr val="000000"/>
+                </a:solidFill>
+                <a:effectLst/>
+                <a:latin typeface="Consolas" panose="020B0609020204030204" pitchFamily="49" charset="0"/>
+              </a:rPr>
+              <a:t>oldData</a:t>
+            </a:r>
+            <a:r>
+              <a:rPr lang="en-US" sz="1600" b="0" dirty="0">
+                <a:solidFill>
+                  <a:srgbClr val="000000"/>
+                </a:solidFill>
+                <a:effectLst/>
+                <a:latin typeface="Consolas" panose="020B0609020204030204" pitchFamily="49" charset="0"/>
+              </a:rPr>
+              <a:t> = data;</a:t>
+            </a:r>
+          </a:p>
+          <a:p>
+            <a:pPr marL="0" indent="0">
+              <a:buNone/>
+            </a:pPr>
+            <a:r>
+              <a:rPr lang="en-US" sz="1600" b="0" dirty="0">
+                <a:solidFill>
+                  <a:srgbClr val="000000"/>
+                </a:solidFill>
+                <a:effectLst/>
+                <a:latin typeface="Consolas" panose="020B0609020204030204" pitchFamily="49" charset="0"/>
+              </a:rPr>
+              <a:t>    data = </a:t>
+            </a:r>
+            <a:r>
+              <a:rPr lang="en-US" sz="1600" b="0" dirty="0">
+                <a:solidFill>
+                  <a:srgbClr val="0000FF"/>
+                </a:solidFill>
+                <a:effectLst/>
+                <a:latin typeface="Consolas" panose="020B0609020204030204" pitchFamily="49" charset="0"/>
+              </a:rPr>
+              <a:t>new int</a:t>
+            </a:r>
+            <a:r>
+              <a:rPr lang="en-US" sz="1600" b="0" dirty="0">
+                <a:solidFill>
+                  <a:srgbClr val="000000"/>
+                </a:solidFill>
+                <a:effectLst/>
+                <a:latin typeface="Consolas" panose="020B0609020204030204" pitchFamily="49" charset="0"/>
+              </a:rPr>
+              <a:t>[</a:t>
+            </a:r>
+            <a:r>
+              <a:rPr lang="en-US" sz="1600" b="0" dirty="0" err="1">
+                <a:solidFill>
+                  <a:srgbClr val="000000"/>
+                </a:solidFill>
+                <a:effectLst/>
+                <a:latin typeface="Consolas" panose="020B0609020204030204" pitchFamily="49" charset="0"/>
+              </a:rPr>
+              <a:t>data.length</a:t>
+            </a:r>
+            <a:r>
+              <a:rPr lang="en-US" sz="1600" b="0" dirty="0">
+                <a:solidFill>
+                  <a:srgbClr val="000000"/>
+                </a:solidFill>
+                <a:effectLst/>
+                <a:latin typeface="Consolas" panose="020B0609020204030204" pitchFamily="49" charset="0"/>
+              </a:rPr>
+              <a:t>*</a:t>
+            </a:r>
+            <a:r>
+              <a:rPr lang="en-US" sz="1600" b="0" dirty="0">
+                <a:solidFill>
+                  <a:srgbClr val="098658"/>
+                </a:solidFill>
+                <a:effectLst/>
+                <a:latin typeface="Consolas" panose="020B0609020204030204" pitchFamily="49" charset="0"/>
+              </a:rPr>
+              <a:t>2</a:t>
+            </a:r>
+            <a:r>
+              <a:rPr lang="en-US" sz="1600" b="0" dirty="0">
+                <a:solidFill>
+                  <a:srgbClr val="000000"/>
+                </a:solidFill>
+                <a:effectLst/>
+                <a:latin typeface="Consolas" panose="020B0609020204030204" pitchFamily="49" charset="0"/>
+              </a:rPr>
+              <a:t>];</a:t>
+            </a:r>
+          </a:p>
+          <a:p>
+            <a:pPr marL="0" indent="0">
+              <a:buNone/>
+            </a:pPr>
+            <a:r>
+              <a:rPr lang="en-US" sz="1600" b="0" dirty="0">
+                <a:solidFill>
+                  <a:srgbClr val="000000"/>
+                </a:solidFill>
+                <a:effectLst/>
+                <a:latin typeface="Consolas" panose="020B0609020204030204" pitchFamily="49" charset="0"/>
+              </a:rPr>
+              <a:t>    </a:t>
+            </a:r>
+            <a:r>
+              <a:rPr lang="en-US" sz="1600" b="0" dirty="0">
+                <a:solidFill>
+                  <a:srgbClr val="0000FF"/>
+                </a:solidFill>
+                <a:effectLst/>
+                <a:latin typeface="Consolas" panose="020B0609020204030204" pitchFamily="49" charset="0"/>
+              </a:rPr>
+              <a:t>for</a:t>
+            </a:r>
+            <a:r>
+              <a:rPr lang="en-US" sz="1600" b="0" dirty="0">
+                <a:solidFill>
+                  <a:srgbClr val="000000"/>
+                </a:solidFill>
+                <a:effectLst/>
+                <a:latin typeface="Consolas" panose="020B0609020204030204" pitchFamily="49" charset="0"/>
+              </a:rPr>
+              <a:t>(</a:t>
+            </a:r>
+            <a:r>
+              <a:rPr lang="en-US" sz="1600" b="0" dirty="0">
+                <a:solidFill>
+                  <a:srgbClr val="0000FF"/>
+                </a:solidFill>
+                <a:effectLst/>
+                <a:latin typeface="Consolas" panose="020B0609020204030204" pitchFamily="49" charset="0"/>
+              </a:rPr>
+              <a:t>int</a:t>
+            </a:r>
+            <a:r>
+              <a:rPr lang="en-US" sz="1600" b="0" dirty="0">
+                <a:solidFill>
+                  <a:srgbClr val="000000"/>
+                </a:solidFill>
+                <a:effectLst/>
+                <a:latin typeface="Consolas" panose="020B0609020204030204" pitchFamily="49" charset="0"/>
+              </a:rPr>
+              <a:t> </a:t>
+            </a:r>
+            <a:r>
+              <a:rPr lang="en-US" sz="1600" b="0" dirty="0" err="1">
+                <a:solidFill>
+                  <a:srgbClr val="000000"/>
+                </a:solidFill>
+                <a:effectLst/>
+                <a:latin typeface="Consolas" panose="020B0609020204030204" pitchFamily="49" charset="0"/>
+              </a:rPr>
+              <a:t>i</a:t>
+            </a:r>
+            <a:r>
+              <a:rPr lang="en-US" sz="1600" b="0" dirty="0">
+                <a:solidFill>
+                  <a:srgbClr val="000000"/>
+                </a:solidFill>
+                <a:effectLst/>
+                <a:latin typeface="Consolas" panose="020B0609020204030204" pitchFamily="49" charset="0"/>
+              </a:rPr>
+              <a:t> = </a:t>
+            </a:r>
+            <a:r>
+              <a:rPr lang="en-US" sz="1600" b="0" dirty="0">
+                <a:solidFill>
+                  <a:srgbClr val="098658"/>
+                </a:solidFill>
+                <a:effectLst/>
+                <a:latin typeface="Consolas" panose="020B0609020204030204" pitchFamily="49" charset="0"/>
+              </a:rPr>
+              <a:t>0</a:t>
+            </a:r>
+            <a:r>
+              <a:rPr lang="en-US" sz="1600" b="0" dirty="0">
+                <a:solidFill>
+                  <a:srgbClr val="000000"/>
+                </a:solidFill>
+                <a:effectLst/>
+                <a:latin typeface="Consolas" panose="020B0609020204030204" pitchFamily="49" charset="0"/>
+              </a:rPr>
+              <a:t>; </a:t>
+            </a:r>
+            <a:r>
+              <a:rPr lang="en-US" sz="1600" b="0" dirty="0" err="1">
+                <a:solidFill>
+                  <a:srgbClr val="000000"/>
+                </a:solidFill>
+                <a:effectLst/>
+                <a:latin typeface="Consolas" panose="020B0609020204030204" pitchFamily="49" charset="0"/>
+              </a:rPr>
+              <a:t>i</a:t>
+            </a:r>
+            <a:r>
+              <a:rPr lang="en-US" sz="1600" b="0" dirty="0">
+                <a:solidFill>
+                  <a:srgbClr val="000000"/>
+                </a:solidFill>
+                <a:effectLst/>
+                <a:latin typeface="Consolas" panose="020B0609020204030204" pitchFamily="49" charset="0"/>
+              </a:rPr>
+              <a:t> &lt; </a:t>
+            </a:r>
+            <a:r>
+              <a:rPr lang="en-US" sz="1600" b="0" dirty="0" err="1">
+                <a:solidFill>
+                  <a:srgbClr val="000000"/>
+                </a:solidFill>
+                <a:effectLst/>
+                <a:latin typeface="Consolas" panose="020B0609020204030204" pitchFamily="49" charset="0"/>
+              </a:rPr>
+              <a:t>oldData.length</a:t>
+            </a:r>
+            <a:r>
+              <a:rPr lang="en-US" sz="1600" b="0" dirty="0">
+                <a:solidFill>
+                  <a:srgbClr val="000000"/>
+                </a:solidFill>
+                <a:effectLst/>
+                <a:latin typeface="Consolas" panose="020B0609020204030204" pitchFamily="49" charset="0"/>
+              </a:rPr>
+              <a:t>; </a:t>
+            </a:r>
+            <a:r>
+              <a:rPr lang="en-US" sz="1600" b="0" dirty="0" err="1">
+                <a:solidFill>
+                  <a:srgbClr val="000000"/>
+                </a:solidFill>
+                <a:effectLst/>
+                <a:latin typeface="Consolas" panose="020B0609020204030204" pitchFamily="49" charset="0"/>
+              </a:rPr>
+              <a:t>i</a:t>
+            </a:r>
+            <a:r>
+              <a:rPr lang="en-US" sz="1600" b="0" dirty="0">
+                <a:solidFill>
+                  <a:srgbClr val="000000"/>
+                </a:solidFill>
+                <a:effectLst/>
+                <a:latin typeface="Consolas" panose="020B0609020204030204" pitchFamily="49" charset="0"/>
+              </a:rPr>
+              <a:t>++)</a:t>
+            </a:r>
+          </a:p>
+          <a:p>
+            <a:pPr marL="0" indent="0">
+              <a:buNone/>
+            </a:pPr>
+            <a:r>
+              <a:rPr lang="en-US" sz="1600" b="0" dirty="0">
+                <a:solidFill>
+                  <a:srgbClr val="000000"/>
+                </a:solidFill>
+                <a:effectLst/>
+                <a:latin typeface="Consolas" panose="020B0609020204030204" pitchFamily="49" charset="0"/>
+              </a:rPr>
+              <a:t>        data[</a:t>
+            </a:r>
+            <a:r>
+              <a:rPr lang="en-US" sz="1600" b="0" dirty="0" err="1">
+                <a:solidFill>
+                  <a:srgbClr val="000000"/>
+                </a:solidFill>
+                <a:effectLst/>
+                <a:latin typeface="Consolas" panose="020B0609020204030204" pitchFamily="49" charset="0"/>
+              </a:rPr>
+              <a:t>i</a:t>
+            </a:r>
+            <a:r>
+              <a:rPr lang="en-US" sz="1600" b="0" dirty="0">
+                <a:solidFill>
+                  <a:srgbClr val="000000"/>
+                </a:solidFill>
+                <a:effectLst/>
+                <a:latin typeface="Consolas" panose="020B0609020204030204" pitchFamily="49" charset="0"/>
+              </a:rPr>
+              <a:t>] = </a:t>
+            </a:r>
+            <a:r>
+              <a:rPr lang="en-US" sz="1600" b="0" dirty="0" err="1">
+                <a:solidFill>
+                  <a:srgbClr val="000000"/>
+                </a:solidFill>
+                <a:effectLst/>
+                <a:latin typeface="Consolas" panose="020B0609020204030204" pitchFamily="49" charset="0"/>
+              </a:rPr>
+              <a:t>oldData</a:t>
+            </a:r>
+            <a:r>
+              <a:rPr lang="en-US" sz="1600" b="0" dirty="0">
+                <a:solidFill>
+                  <a:srgbClr val="000000"/>
+                </a:solidFill>
+                <a:effectLst/>
+                <a:latin typeface="Consolas" panose="020B0609020204030204" pitchFamily="49" charset="0"/>
+              </a:rPr>
+              <a:t>[</a:t>
+            </a:r>
+            <a:r>
+              <a:rPr lang="en-US" sz="1600" b="0" dirty="0" err="1">
+                <a:solidFill>
+                  <a:srgbClr val="000000"/>
+                </a:solidFill>
+                <a:effectLst/>
+                <a:latin typeface="Consolas" panose="020B0609020204030204" pitchFamily="49" charset="0"/>
+              </a:rPr>
+              <a:t>i</a:t>
+            </a:r>
+            <a:r>
+              <a:rPr lang="en-US" sz="1600" b="0" dirty="0">
+                <a:solidFill>
+                  <a:srgbClr val="000000"/>
+                </a:solidFill>
+                <a:effectLst/>
+                <a:latin typeface="Consolas" panose="020B0609020204030204" pitchFamily="49" charset="0"/>
+              </a:rPr>
+              <a:t>];</a:t>
+            </a:r>
+          </a:p>
+          <a:p>
+            <a:pPr marL="0" indent="0">
+              <a:buNone/>
+            </a:pPr>
+            <a:r>
+              <a:rPr lang="en-US" sz="1600" b="0" dirty="0">
+                <a:solidFill>
+                  <a:srgbClr val="000000"/>
+                </a:solidFill>
+                <a:effectLst/>
+                <a:latin typeface="Consolas" panose="020B0609020204030204" pitchFamily="49" charset="0"/>
+              </a:rPr>
+              <a:t>}</a:t>
+            </a:r>
+            <a:endParaRPr lang="en-US" sz="1600" dirty="0"/>
           </a:p>
         </p:txBody>
       </p:sp>
@@ -18220,12 +19780,74 @@
           </p:sp>
         </mc:Fallback>
       </mc:AlternateContent>
+    </p:spTree>
+    <p:extLst>
+      <p:ext uri="{BB962C8B-B14F-4D97-AF65-F5344CB8AC3E}">
+        <p14:creationId xmlns:p14="http://schemas.microsoft.com/office/powerpoint/2010/main" val="1158566627"/>
+      </p:ext>
+    </p:extLst>
+  </p:cSld>
+  <p:clrMapOvr>
+    <a:masterClrMapping/>
+  </p:clrMapOvr>
+</p:sld>
+</file>
+
+<file path=ppt/slides/slide32.xml><?xml version="1.0" encoding="utf-8"?>
+<p:sld xmlns:a="http://schemas.openxmlformats.org/drawingml/2006/main" xmlns:r="http://schemas.openxmlformats.org/officeDocument/2006/relationships" xmlns:p="http://schemas.openxmlformats.org/presentationml/2006/main">
+  <p:cSld>
+    <p:spTree>
+      <p:nvGrpSpPr>
+        <p:cNvPr id="1" name=""/>
+        <p:cNvGrpSpPr/>
+        <p:nvPr/>
+      </p:nvGrpSpPr>
+      <p:grpSpPr>
+        <a:xfrm>
+          <a:off x="0" y="0"/>
+          <a:ext cx="0" cy="0"/>
+          <a:chOff x="0" y="0"/>
+          <a:chExt cx="0" cy="0"/>
+        </a:xfrm>
+      </p:grpSpPr>
       <p:sp>
         <p:nvSpPr>
-          <p:cNvPr id="5" name="Content Placeholder 2">
+          <p:cNvPr id="2" name="Title 1">
             <a:extLst>
               <a:ext uri="{FF2B5EF4-FFF2-40B4-BE49-F238E27FC236}">
-                <a16:creationId xmlns:a16="http://schemas.microsoft.com/office/drawing/2014/main" id="{EBE0DF2B-2C50-08CC-5BA6-B5A1FBAD4B25}"/>
+                <a16:creationId xmlns:a16="http://schemas.microsoft.com/office/drawing/2014/main" id="{22E69A94-1220-2804-63AB-870822DBD0D0}"/>
+              </a:ext>
+            </a:extLst>
+          </p:cNvPr>
+          <p:cNvSpPr>
+            <a:spLocks noGrp="1"/>
+          </p:cNvSpPr>
+          <p:nvPr>
+            <p:ph type="title"/>
+          </p:nvPr>
+        </p:nvSpPr>
+        <p:spPr/>
+        <p:txBody>
+          <a:bodyPr/>
+          <a:lstStyle/>
+          <a:p>
+            <a:r>
+              <a:rPr lang="en-US" dirty="0" err="1"/>
+              <a:t>ArrayList</a:t>
+            </a:r>
+            <a:r>
+              <a:rPr lang="en-US" dirty="0"/>
+              <a:t> – Amortized Time of Add</a:t>
+            </a:r>
+          </a:p>
+        </p:txBody>
+      </p:sp>
+      <p:sp>
+        <p:nvSpPr>
+          <p:cNvPr id="14" name="Content Placeholder 2">
+            <a:extLst>
+              <a:ext uri="{FF2B5EF4-FFF2-40B4-BE49-F238E27FC236}">
+                <a16:creationId xmlns:a16="http://schemas.microsoft.com/office/drawing/2014/main" id="{959D7957-B208-5E47-448C-922F4E81772F}"/>
               </a:ext>
             </a:extLst>
           </p:cNvPr>
@@ -18252,11 +19874,10 @@
               <a:buNone/>
             </a:pPr>
             <a:r>
-              <a:rPr lang="en-US" sz="1600" b="0" dirty="0">
+              <a:rPr lang="en-US" sz="1600" dirty="0">
                 <a:solidFill>
                   <a:srgbClr val="0000FF"/>
                 </a:solidFill>
-                <a:effectLst/>
                 <a:highlight>
                   <a:srgbClr val="FFFFFF"/>
                 </a:highlight>
@@ -18265,11 +19886,10 @@
               <a:t>public</a:t>
             </a:r>
             <a:r>
-              <a:rPr lang="en-US" sz="1600" b="0" dirty="0">
+              <a:rPr lang="en-US" sz="1600" dirty="0">
                 <a:solidFill>
                   <a:srgbClr val="000000"/>
                 </a:solidFill>
-                <a:effectLst/>
                 <a:highlight>
                   <a:srgbClr val="FFFFFF"/>
                 </a:highlight>
@@ -18278,11 +19898,10 @@
               <a:t> </a:t>
             </a:r>
             <a:r>
-              <a:rPr lang="en-US" sz="1600" b="0" dirty="0">
+              <a:rPr lang="en-US" sz="1600" dirty="0">
                 <a:solidFill>
                   <a:srgbClr val="0000FF"/>
                 </a:solidFill>
-                <a:effectLst/>
                 <a:highlight>
                   <a:srgbClr val="FFFFFF"/>
                 </a:highlight>
@@ -18291,11 +19910,10 @@
               <a:t>void</a:t>
             </a:r>
             <a:r>
-              <a:rPr lang="en-US" sz="1600" b="0" dirty="0">
+              <a:rPr lang="en-US" sz="1600" dirty="0">
                 <a:solidFill>
                   <a:srgbClr val="000000"/>
                 </a:solidFill>
-                <a:effectLst/>
                 <a:highlight>
                   <a:srgbClr val="FFFFFF"/>
                 </a:highlight>
@@ -18316,11 +19934,10 @@
               <a:t>int</a:t>
             </a:r>
             <a:r>
-              <a:rPr lang="en-US" sz="1600" b="0" dirty="0">
+              <a:rPr lang="en-US" sz="1600" dirty="0">
                 <a:solidFill>
                   <a:srgbClr val="000000"/>
                 </a:solidFill>
-                <a:effectLst/>
                 <a:highlight>
                   <a:srgbClr val="FFFFFF"/>
                 </a:highlight>
@@ -18334,11 +19951,10 @@
               <a:buNone/>
             </a:pPr>
             <a:r>
-              <a:rPr lang="en-US" sz="1600" b="0" dirty="0">
+              <a:rPr lang="en-US" sz="1600" dirty="0">
                 <a:solidFill>
                   <a:srgbClr val="000000"/>
                 </a:solidFill>
-                <a:effectLst/>
                 <a:highlight>
                   <a:srgbClr val="FFFFFF"/>
                 </a:highlight>
@@ -18347,11 +19963,10 @@
               <a:t>    </a:t>
             </a:r>
             <a:r>
-              <a:rPr lang="en-US" sz="1600" b="0" dirty="0">
+              <a:rPr lang="en-US" sz="1600" dirty="0">
                 <a:solidFill>
                   <a:srgbClr val="0000FF"/>
                 </a:solidFill>
-                <a:effectLst/>
                 <a:highlight>
                   <a:srgbClr val="FFFFFF"/>
                 </a:highlight>
@@ -18360,11 +19975,10 @@
               <a:t>if</a:t>
             </a:r>
             <a:r>
-              <a:rPr lang="en-US" sz="1600" b="0" dirty="0">
+              <a:rPr lang="en-US" sz="1600" dirty="0">
                 <a:solidFill>
                   <a:srgbClr val="000000"/>
                 </a:solidFill>
-                <a:effectLst/>
                 <a:highlight>
                   <a:srgbClr val="FFFFFF"/>
                 </a:highlight>
@@ -18373,11 +19987,10 @@
               <a:t>(</a:t>
             </a:r>
             <a:r>
-              <a:rPr lang="en-US" sz="1600" b="0" dirty="0" err="1">
+              <a:rPr lang="en-US" sz="1600" dirty="0" err="1">
                 <a:solidFill>
                   <a:srgbClr val="000000"/>
                 </a:solidFill>
-                <a:effectLst/>
                 <a:highlight>
                   <a:srgbClr val="FFFFFF"/>
                 </a:highlight>
@@ -18386,11 +19999,10 @@
               <a:t>data.length</a:t>
             </a:r>
             <a:r>
-              <a:rPr lang="en-US" sz="1600" b="0" dirty="0">
+              <a:rPr lang="en-US" sz="1600" dirty="0">
                 <a:solidFill>
                   <a:srgbClr val="000000"/>
                 </a:solidFill>
-                <a:effectLst/>
                 <a:highlight>
                   <a:srgbClr val="FFFFFF"/>
                 </a:highlight>
@@ -18404,11 +20016,10 @@
               <a:buNone/>
             </a:pPr>
             <a:r>
-              <a:rPr lang="en-US" sz="1600" b="0" dirty="0">
+              <a:rPr lang="en-US" sz="1600" dirty="0">
                 <a:solidFill>
                   <a:srgbClr val="000000"/>
                 </a:solidFill>
-                <a:effectLst/>
                 <a:highlight>
                   <a:srgbClr val="FFFFFF"/>
                 </a:highlight>
@@ -18422,11 +20033,10 @@
               <a:buNone/>
             </a:pPr>
             <a:r>
-              <a:rPr lang="en-US" sz="1600" b="0" dirty="0">
+              <a:rPr lang="en-US" sz="1600" dirty="0">
                 <a:solidFill>
                   <a:srgbClr val="000000"/>
                 </a:solidFill>
-                <a:effectLst/>
                 <a:highlight>
                   <a:srgbClr val="FFFFFF"/>
                 </a:highlight>
@@ -18440,11 +20050,10 @@
               <a:buNone/>
             </a:pPr>
             <a:r>
-              <a:rPr lang="en-US" sz="1600" b="0" dirty="0">
+              <a:rPr lang="en-US" sz="1600" dirty="0">
                 <a:solidFill>
                   <a:srgbClr val="000000"/>
                 </a:solidFill>
-                <a:effectLst/>
                 <a:highlight>
                   <a:srgbClr val="FFFFFF"/>
                 </a:highlight>
@@ -18458,11 +20067,10 @@
               <a:buNone/>
             </a:pPr>
             <a:r>
-              <a:rPr lang="en-US" sz="1600" b="0" dirty="0">
+              <a:rPr lang="en-US" sz="1600" dirty="0">
                 <a:solidFill>
                   <a:srgbClr val="000000"/>
                 </a:solidFill>
-                <a:effectLst/>
                 <a:highlight>
                   <a:srgbClr val="FFFFFF"/>
                 </a:highlight>
@@ -18474,6 +20082,9 @@
               <a:solidFill>
                 <a:srgbClr val="0000FF"/>
               </a:solidFill>
+              <a:highlight>
+                <a:srgbClr val="FFFFFF"/>
+              </a:highlight>
               <a:latin typeface="Consolas" panose="020B0609020204030204" pitchFamily="49" charset="0"/>
             </a:endParaRPr>
           </a:p>
@@ -18482,41 +20093,49 @@
               <a:buNone/>
             </a:pPr>
             <a:r>
-              <a:rPr lang="en-US" sz="1600" b="0" dirty="0">
+              <a:rPr lang="en-US" sz="1600" dirty="0">
                 <a:solidFill>
                   <a:srgbClr val="0000FF"/>
                 </a:solidFill>
-                <a:effectLst/>
+                <a:highlight>
+                  <a:srgbClr val="FFFFFF"/>
+                </a:highlight>
                 <a:latin typeface="Consolas" panose="020B0609020204030204" pitchFamily="49" charset="0"/>
               </a:rPr>
               <a:t>private</a:t>
             </a:r>
             <a:r>
-              <a:rPr lang="en-US" sz="1600" b="0" dirty="0">
+              <a:rPr lang="en-US" sz="1600" dirty="0">
                 <a:solidFill>
                   <a:srgbClr val="000000"/>
                 </a:solidFill>
-                <a:effectLst/>
+                <a:highlight>
+                  <a:srgbClr val="FFFFFF"/>
+                </a:highlight>
                 <a:latin typeface="Consolas" panose="020B0609020204030204" pitchFamily="49" charset="0"/>
               </a:rPr>
               <a:t> </a:t>
             </a:r>
             <a:r>
-              <a:rPr lang="en-US" sz="1600" b="0" dirty="0">
+              <a:rPr lang="en-US" sz="1600" dirty="0">
                 <a:solidFill>
                   <a:srgbClr val="0000FF"/>
                 </a:solidFill>
-                <a:effectLst/>
+                <a:highlight>
+                  <a:srgbClr val="FFFFFF"/>
+                </a:highlight>
                 <a:latin typeface="Consolas" panose="020B0609020204030204" pitchFamily="49" charset="0"/>
               </a:rPr>
               <a:t>void</a:t>
             </a:r>
             <a:r>
-              <a:rPr lang="en-US" sz="1600" b="0" dirty="0">
+              <a:rPr lang="en-US" sz="1600" dirty="0">
                 <a:solidFill>
                   <a:srgbClr val="000000"/>
                 </a:solidFill>
-                <a:effectLst/>
+                <a:highlight>
+                  <a:srgbClr val="FFFFFF"/>
+                </a:highlight>
                 <a:latin typeface="Consolas" panose="020B0609020204030204" pitchFamily="49" charset="0"/>
               </a:rPr>
               <a:t> resize(){</a:t>
@@ -18527,51 +20146,61 @@
               <a:buNone/>
             </a:pPr>
             <a:r>
-              <a:rPr lang="en-US" sz="1600" b="0" dirty="0">
+              <a:rPr lang="en-US" sz="1600" dirty="0">
                 <a:solidFill>
                   <a:srgbClr val="000000"/>
                 </a:solidFill>
-                <a:effectLst/>
+                <a:highlight>
+                  <a:srgbClr val="FFFFFF"/>
+                </a:highlight>
                 <a:latin typeface="Consolas" panose="020B0609020204030204" pitchFamily="49" charset="0"/>
               </a:rPr>
               <a:t>    </a:t>
             </a:r>
             <a:r>
-              <a:rPr lang="en-US" sz="1600" b="0" dirty="0">
+              <a:rPr lang="en-US" sz="1600" dirty="0">
                 <a:solidFill>
                   <a:srgbClr val="0000FF"/>
                 </a:solidFill>
-                <a:effectLst/>
+                <a:highlight>
+                  <a:srgbClr val="FFFFFF"/>
+                </a:highlight>
                 <a:latin typeface="Consolas" panose="020B0609020204030204" pitchFamily="49" charset="0"/>
               </a:rPr>
               <a:t>int</a:t>
             </a:r>
             <a:r>
-              <a:rPr lang="en-US" sz="1600" b="0" dirty="0">
+              <a:rPr lang="en-US" sz="1600" dirty="0">
                 <a:solidFill>
                   <a:srgbClr val="000000"/>
                 </a:solidFill>
-                <a:effectLst/>
+                <a:highlight>
+                  <a:srgbClr val="FFFFFF"/>
+                </a:highlight>
                 <a:latin typeface="Consolas" panose="020B0609020204030204" pitchFamily="49" charset="0"/>
               </a:rPr>
               <a:t>[] </a:t>
             </a:r>
             <a:r>
-              <a:rPr lang="en-US" sz="1600" b="0" dirty="0" err="1">
+              <a:rPr lang="en-US" sz="1600" dirty="0" err="1">
                 <a:solidFill>
                   <a:srgbClr val="000000"/>
                 </a:solidFill>
-                <a:effectLst/>
+                <a:highlight>
+                  <a:srgbClr val="FFFFFF"/>
+                </a:highlight>
                 <a:latin typeface="Consolas" panose="020B0609020204030204" pitchFamily="49" charset="0"/>
               </a:rPr>
               <a:t>oldData</a:t>
             </a:r>
             <a:r>
-              <a:rPr lang="en-US" sz="1600" b="0" dirty="0">
+              <a:rPr lang="en-US" sz="1600" dirty="0">
                 <a:solidFill>
                   <a:srgbClr val="000000"/>
                 </a:solidFill>
-                <a:effectLst/>
+                <a:highlight>
+                  <a:srgbClr val="FFFFFF"/>
+                </a:highlight>
                 <a:latin typeface="Consolas" panose="020B0609020204030204" pitchFamily="49" charset="0"/>
               </a:rPr>
               <a:t> = data;</a:t>
@@ -18582,71 +20211,85 @@
               <a:buNone/>
             </a:pPr>
             <a:r>
-              <a:rPr lang="en-US" sz="1600" b="0" dirty="0">
+              <a:rPr lang="en-US" sz="1600" dirty="0">
                 <a:solidFill>
                   <a:srgbClr val="000000"/>
                 </a:solidFill>
-                <a:effectLst/>
+                <a:highlight>
+                  <a:srgbClr val="FFFFFF"/>
+                </a:highlight>
                 <a:latin typeface="Consolas" panose="020B0609020204030204" pitchFamily="49" charset="0"/>
               </a:rPr>
               <a:t>    data = </a:t>
             </a:r>
             <a:r>
-              <a:rPr lang="en-US" sz="1600" b="0" dirty="0">
+              <a:rPr lang="en-US" sz="1600" dirty="0">
                 <a:solidFill>
                   <a:srgbClr val="0000FF"/>
                 </a:solidFill>
-                <a:effectLst/>
+                <a:highlight>
+                  <a:srgbClr val="FFFFFF"/>
+                </a:highlight>
                 <a:latin typeface="Consolas" panose="020B0609020204030204" pitchFamily="49" charset="0"/>
               </a:rPr>
               <a:t>new int</a:t>
             </a:r>
             <a:r>
-              <a:rPr lang="en-US" sz="1600" b="0" dirty="0">
+              <a:rPr lang="en-US" sz="1600" dirty="0">
                 <a:solidFill>
                   <a:srgbClr val="000000"/>
                 </a:solidFill>
-                <a:effectLst/>
+                <a:highlight>
+                  <a:srgbClr val="FFFFFF"/>
+                </a:highlight>
                 <a:latin typeface="Consolas" panose="020B0609020204030204" pitchFamily="49" charset="0"/>
               </a:rPr>
               <a:t>[</a:t>
             </a:r>
             <a:r>
-              <a:rPr lang="en-US" sz="1600" b="0" dirty="0" err="1">
+              <a:rPr lang="en-US" sz="1600" dirty="0" err="1">
                 <a:solidFill>
                   <a:srgbClr val="000000"/>
                 </a:solidFill>
-                <a:effectLst/>
+                <a:highlight>
+                  <a:srgbClr val="FFFFFF"/>
+                </a:highlight>
                 <a:latin typeface="Consolas" panose="020B0609020204030204" pitchFamily="49" charset="0"/>
               </a:rPr>
               <a:t>data.length</a:t>
             </a:r>
             <a:r>
-              <a:rPr lang="en-US" sz="1600" b="0" dirty="0">
+              <a:rPr lang="en-US" sz="1600" dirty="0">
                 <a:solidFill>
                   <a:srgbClr val="000000"/>
                 </a:solidFill>
-                <a:effectLst/>
+                <a:highlight>
+                  <a:srgbClr val="FFFFFF"/>
+                </a:highlight>
                 <a:latin typeface="Consolas" panose="020B0609020204030204" pitchFamily="49" charset="0"/>
               </a:rPr>
               <a:t>*</a:t>
             </a:r>
             <a:r>
-              <a:rPr lang="en-US" sz="1600" b="0" dirty="0">
+              <a:rPr lang="en-US" sz="1600" dirty="0">
                 <a:solidFill>
                   <a:srgbClr val="098658"/>
                 </a:solidFill>
-                <a:effectLst/>
+                <a:highlight>
+                  <a:srgbClr val="FFFFFF"/>
+                </a:highlight>
                 <a:latin typeface="Consolas" panose="020B0609020204030204" pitchFamily="49" charset="0"/>
               </a:rPr>
               <a:t>2</a:t>
             </a:r>
             <a:r>
-              <a:rPr lang="en-US" sz="1600" b="0" dirty="0">
+              <a:rPr lang="en-US" sz="1600" dirty="0">
                 <a:solidFill>
                   <a:srgbClr val="000000"/>
                 </a:solidFill>
-                <a:effectLst/>
+                <a:highlight>
+                  <a:srgbClr val="FFFFFF"/>
+                </a:highlight>
                 <a:latin typeface="Consolas" panose="020B0609020204030204" pitchFamily="49" charset="0"/>
               </a:rPr>
               <a:t>];</a:t>
@@ -18657,151 +20300,181 @@
               <a:buNone/>
             </a:pPr>
             <a:r>
-              <a:rPr lang="en-US" sz="1600" b="0" dirty="0">
+              <a:rPr lang="en-US" sz="1600" dirty="0">
                 <a:solidFill>
                   <a:srgbClr val="000000"/>
                 </a:solidFill>
-                <a:effectLst/>
+                <a:highlight>
+                  <a:srgbClr val="FFFFFF"/>
+                </a:highlight>
                 <a:latin typeface="Consolas" panose="020B0609020204030204" pitchFamily="49" charset="0"/>
               </a:rPr>
               <a:t>    </a:t>
             </a:r>
             <a:r>
-              <a:rPr lang="en-US" sz="1600" b="0" dirty="0">
+              <a:rPr lang="en-US" sz="1600" dirty="0">
                 <a:solidFill>
                   <a:srgbClr val="0000FF"/>
                 </a:solidFill>
-                <a:effectLst/>
+                <a:highlight>
+                  <a:srgbClr val="FFFFFF"/>
+                </a:highlight>
                 <a:latin typeface="Consolas" panose="020B0609020204030204" pitchFamily="49" charset="0"/>
               </a:rPr>
               <a:t>for</a:t>
             </a:r>
             <a:r>
-              <a:rPr lang="en-US" sz="1600" b="0" dirty="0">
+              <a:rPr lang="en-US" sz="1600" dirty="0">
                 <a:solidFill>
                   <a:srgbClr val="000000"/>
                 </a:solidFill>
-                <a:effectLst/>
+                <a:highlight>
+                  <a:srgbClr val="FFFFFF"/>
+                </a:highlight>
                 <a:latin typeface="Consolas" panose="020B0609020204030204" pitchFamily="49" charset="0"/>
               </a:rPr>
               <a:t>(</a:t>
             </a:r>
             <a:r>
-              <a:rPr lang="en-US" sz="1600" b="0" dirty="0">
+              <a:rPr lang="en-US" sz="1600" dirty="0">
                 <a:solidFill>
                   <a:srgbClr val="0000FF"/>
                 </a:solidFill>
-                <a:effectLst/>
+                <a:highlight>
+                  <a:srgbClr val="FFFFFF"/>
+                </a:highlight>
                 <a:latin typeface="Consolas" panose="020B0609020204030204" pitchFamily="49" charset="0"/>
               </a:rPr>
               <a:t>int</a:t>
             </a:r>
             <a:r>
-              <a:rPr lang="en-US" sz="1600" b="0" dirty="0">
+              <a:rPr lang="en-US" sz="1600" dirty="0">
                 <a:solidFill>
                   <a:srgbClr val="000000"/>
                 </a:solidFill>
-                <a:effectLst/>
+                <a:highlight>
+                  <a:srgbClr val="FFFFFF"/>
+                </a:highlight>
                 <a:latin typeface="Consolas" panose="020B0609020204030204" pitchFamily="49" charset="0"/>
               </a:rPr>
               <a:t> </a:t>
             </a:r>
             <a:r>
-              <a:rPr lang="en-US" sz="1600" b="0" dirty="0" err="1">
+              <a:rPr lang="en-US" sz="1600" dirty="0" err="1">
                 <a:solidFill>
                   <a:srgbClr val="000000"/>
                 </a:solidFill>
-                <a:effectLst/>
+                <a:highlight>
+                  <a:srgbClr val="FFFFFF"/>
+                </a:highlight>
                 <a:latin typeface="Consolas" panose="020B0609020204030204" pitchFamily="49" charset="0"/>
               </a:rPr>
               <a:t>i</a:t>
             </a:r>
             <a:r>
-              <a:rPr lang="en-US" sz="1600" b="0" dirty="0">
+              <a:rPr lang="en-US" sz="1600" dirty="0">
                 <a:solidFill>
                   <a:srgbClr val="000000"/>
                 </a:solidFill>
-                <a:effectLst/>
+                <a:highlight>
+                  <a:srgbClr val="FFFFFF"/>
+                </a:highlight>
                 <a:latin typeface="Consolas" panose="020B0609020204030204" pitchFamily="49" charset="0"/>
               </a:rPr>
               <a:t> = </a:t>
             </a:r>
             <a:r>
-              <a:rPr lang="en-US" sz="1600" b="0" dirty="0">
+              <a:rPr lang="en-US" sz="1600" dirty="0">
                 <a:solidFill>
                   <a:srgbClr val="098658"/>
                 </a:solidFill>
-                <a:effectLst/>
+                <a:highlight>
+                  <a:srgbClr val="FFFFFF"/>
+                </a:highlight>
                 <a:latin typeface="Consolas" panose="020B0609020204030204" pitchFamily="49" charset="0"/>
               </a:rPr>
               <a:t>0</a:t>
             </a:r>
             <a:r>
-              <a:rPr lang="en-US" sz="1600" b="0" dirty="0">
+              <a:rPr lang="en-US" sz="1600" dirty="0">
                 <a:solidFill>
                   <a:srgbClr val="000000"/>
                 </a:solidFill>
-                <a:effectLst/>
+                <a:highlight>
+                  <a:srgbClr val="FFFFFF"/>
+                </a:highlight>
                 <a:latin typeface="Consolas" panose="020B0609020204030204" pitchFamily="49" charset="0"/>
               </a:rPr>
               <a:t>; </a:t>
             </a:r>
             <a:r>
-              <a:rPr lang="en-US" sz="1600" b="0" dirty="0" err="1">
+              <a:rPr lang="en-US" sz="1600" dirty="0" err="1">
                 <a:solidFill>
                   <a:srgbClr val="000000"/>
                 </a:solidFill>
-                <a:effectLst/>
+                <a:highlight>
+                  <a:srgbClr val="FFFFFF"/>
+                </a:highlight>
                 <a:latin typeface="Consolas" panose="020B0609020204030204" pitchFamily="49" charset="0"/>
               </a:rPr>
               <a:t>i</a:t>
             </a:r>
             <a:r>
-              <a:rPr lang="en-US" sz="1600" b="0" dirty="0">
+              <a:rPr lang="en-US" sz="1600" dirty="0">
                 <a:solidFill>
                   <a:srgbClr val="000000"/>
                 </a:solidFill>
-                <a:effectLst/>
+                <a:highlight>
+                  <a:srgbClr val="FFFFFF"/>
+                </a:highlight>
                 <a:latin typeface="Consolas" panose="020B0609020204030204" pitchFamily="49" charset="0"/>
               </a:rPr>
               <a:t> &lt; </a:t>
             </a:r>
             <a:r>
-              <a:rPr lang="en-US" sz="1600" b="0" dirty="0" err="1">
+              <a:rPr lang="en-US" sz="1600" dirty="0" err="1">
                 <a:solidFill>
                   <a:srgbClr val="000000"/>
                 </a:solidFill>
-                <a:effectLst/>
+                <a:highlight>
+                  <a:srgbClr val="FFFFFF"/>
+                </a:highlight>
                 <a:latin typeface="Consolas" panose="020B0609020204030204" pitchFamily="49" charset="0"/>
               </a:rPr>
               <a:t>oldData.length</a:t>
             </a:r>
             <a:r>
-              <a:rPr lang="en-US" sz="1600" b="0" dirty="0">
+              <a:rPr lang="en-US" sz="1600" dirty="0">
                 <a:solidFill>
                   <a:srgbClr val="000000"/>
                 </a:solidFill>
-                <a:effectLst/>
+                <a:highlight>
+                  <a:srgbClr val="FFFFFF"/>
+                </a:highlight>
                 <a:latin typeface="Consolas" panose="020B0609020204030204" pitchFamily="49" charset="0"/>
               </a:rPr>
               <a:t>; </a:t>
             </a:r>
             <a:r>
-              <a:rPr lang="en-US" sz="1600" b="0" dirty="0" err="1">
+              <a:rPr lang="en-US" sz="1600" dirty="0" err="1">
                 <a:solidFill>
                   <a:srgbClr val="000000"/>
                 </a:solidFill>
-                <a:effectLst/>
+                <a:highlight>
+                  <a:srgbClr val="FFFFFF"/>
+                </a:highlight>
                 <a:latin typeface="Consolas" panose="020B0609020204030204" pitchFamily="49" charset="0"/>
               </a:rPr>
               <a:t>i</a:t>
             </a:r>
             <a:r>
-              <a:rPr lang="en-US" sz="1600" b="0" dirty="0">
+              <a:rPr lang="en-US" sz="1600" dirty="0">
                 <a:solidFill>
                   <a:srgbClr val="000000"/>
                 </a:solidFill>
-                <a:effectLst/>
+                <a:highlight>
+                  <a:srgbClr val="FFFFFF"/>
+                </a:highlight>
                 <a:latin typeface="Consolas" panose="020B0609020204030204" pitchFamily="49" charset="0"/>
               </a:rPr>
               <a:t>++)</a:t>
@@ -18812,71 +20485,85 @@
               <a:buNone/>
             </a:pPr>
             <a:r>
-              <a:rPr lang="en-US" sz="1600" b="0" dirty="0">
+              <a:rPr lang="en-US" sz="1600" dirty="0">
                 <a:solidFill>
                   <a:srgbClr val="000000"/>
                 </a:solidFill>
-                <a:effectLst/>
+                <a:highlight>
+                  <a:srgbClr val="FFFFFF"/>
+                </a:highlight>
                 <a:latin typeface="Consolas" panose="020B0609020204030204" pitchFamily="49" charset="0"/>
               </a:rPr>
               <a:t>        data[</a:t>
             </a:r>
             <a:r>
-              <a:rPr lang="en-US" sz="1600" b="0" dirty="0" err="1">
+              <a:rPr lang="en-US" sz="1600" dirty="0" err="1">
                 <a:solidFill>
                   <a:srgbClr val="000000"/>
                 </a:solidFill>
-                <a:effectLst/>
+                <a:highlight>
+                  <a:srgbClr val="FFFFFF"/>
+                </a:highlight>
                 <a:latin typeface="Consolas" panose="020B0609020204030204" pitchFamily="49" charset="0"/>
               </a:rPr>
               <a:t>i</a:t>
             </a:r>
             <a:r>
-              <a:rPr lang="en-US" sz="1600" b="0" dirty="0">
+              <a:rPr lang="en-US" sz="1600" dirty="0">
                 <a:solidFill>
                   <a:srgbClr val="000000"/>
                 </a:solidFill>
-                <a:effectLst/>
+                <a:highlight>
+                  <a:srgbClr val="FFFFFF"/>
+                </a:highlight>
                 <a:latin typeface="Consolas" panose="020B0609020204030204" pitchFamily="49" charset="0"/>
               </a:rPr>
               <a:t>] = </a:t>
             </a:r>
             <a:r>
-              <a:rPr lang="en-US" sz="1600" b="0" dirty="0" err="1">
+              <a:rPr lang="en-US" sz="1600" dirty="0" err="1">
                 <a:solidFill>
                   <a:srgbClr val="000000"/>
                 </a:solidFill>
-                <a:effectLst/>
+                <a:highlight>
+                  <a:srgbClr val="FFFFFF"/>
+                </a:highlight>
                 <a:latin typeface="Consolas" panose="020B0609020204030204" pitchFamily="49" charset="0"/>
               </a:rPr>
               <a:t>oldData</a:t>
             </a:r>
             <a:r>
-              <a:rPr lang="en-US" sz="1600" b="0" dirty="0">
+              <a:rPr lang="en-US" sz="1600" dirty="0">
                 <a:solidFill>
                   <a:srgbClr val="000000"/>
                 </a:solidFill>
-                <a:effectLst/>
+                <a:highlight>
+                  <a:srgbClr val="FFFFFF"/>
+                </a:highlight>
                 <a:latin typeface="Consolas" panose="020B0609020204030204" pitchFamily="49" charset="0"/>
               </a:rPr>
               <a:t>[</a:t>
             </a:r>
             <a:r>
-              <a:rPr lang="en-US" sz="1600" b="0" dirty="0" err="1">
+              <a:rPr lang="en-US" sz="1600" dirty="0" err="1">
                 <a:solidFill>
                   <a:srgbClr val="000000"/>
                 </a:solidFill>
-                <a:effectLst/>
+                <a:highlight>
+                  <a:srgbClr val="FFFFFF"/>
+                </a:highlight>
                 <a:latin typeface="Consolas" panose="020B0609020204030204" pitchFamily="49" charset="0"/>
               </a:rPr>
               <a:t>i</a:t>
             </a:r>
             <a:r>
-              <a:rPr lang="en-US" sz="1600" b="0" dirty="0">
+              <a:rPr lang="en-US" sz="1600" dirty="0">
                 <a:solidFill>
                   <a:srgbClr val="000000"/>
                 </a:solidFill>
-                <a:effectLst/>
+                <a:highlight>
+                  <a:srgbClr val="FFFFFF"/>
+                </a:highlight>
                 <a:latin typeface="Consolas" panose="020B0609020204030204" pitchFamily="49" charset="0"/>
               </a:rPr>
               <a:t>];</a:t>
@@ -18887,23 +20574,550 @@
               <a:buNone/>
             </a:pPr>
             <a:r>
-              <a:rPr lang="en-US" sz="1600" b="0" dirty="0">
+              <a:rPr lang="en-US" sz="1600" dirty="0">
                 <a:solidFill>
                   <a:srgbClr val="000000"/>
                 </a:solidFill>
-                <a:effectLst/>
+                <a:highlight>
+                  <a:srgbClr val="FFFFFF"/>
+                </a:highlight>
                 <a:latin typeface="Consolas" panose="020B0609020204030204" pitchFamily="49" charset="0"/>
               </a:rPr>
               <a:t>}</a:t>
             </a:r>
-            <a:endParaRPr lang="en-US" sz="1600" dirty="0"/>
+            <a:endParaRPr lang="en-US" sz="1600" dirty="0">
+              <a:highlight>
+                <a:srgbClr val="FFFFFF"/>
+              </a:highlight>
+            </a:endParaRPr>
           </a:p>
         </p:txBody>
       </p:sp>
+      <p:grpSp>
+        <p:nvGrpSpPr>
+          <p:cNvPr id="10" name="Group 9" descr="In the resize method, we double the length of the array using the line:&#10;&#10;data = new int[data.length*2];&#10;&#10;By making the choice to double, we guarantee we will not have to do any more resizing until the size of the ArrayList has double.">
+            <a:extLst>
+              <a:ext uri="{FF2B5EF4-FFF2-40B4-BE49-F238E27FC236}">
+                <a16:creationId xmlns:a16="http://schemas.microsoft.com/office/drawing/2014/main" id="{9C129402-4FE1-5B72-A11C-459E5ABFB08C}"/>
+              </a:ext>
+            </a:extLst>
+          </p:cNvPr>
+          <p:cNvGrpSpPr/>
+          <p:nvPr/>
+        </p:nvGrpSpPr>
+        <p:grpSpPr>
+          <a:xfrm>
+            <a:off x="3603084" y="4899991"/>
+            <a:ext cx="2975957" cy="1873574"/>
+            <a:chOff x="3603084" y="4899991"/>
+            <a:chExt cx="2975957" cy="1873574"/>
+          </a:xfrm>
+        </p:grpSpPr>
+        <p:cxnSp>
+          <p:nvCxnSpPr>
+            <p:cNvPr id="7" name="Straight Arrow Connector 6">
+              <a:extLst>
+                <a:ext uri="{FF2B5EF4-FFF2-40B4-BE49-F238E27FC236}">
+                  <a16:creationId xmlns:a16="http://schemas.microsoft.com/office/drawing/2014/main" id="{1CA4A632-C2AC-7864-4F4E-4A5F61D15BA8}"/>
+                </a:ext>
+              </a:extLst>
+            </p:cNvPr>
+            <p:cNvCxnSpPr>
+              <a:cxnSpLocks/>
+              <a:stCxn id="3" idx="0"/>
+            </p:cNvCxnSpPr>
+            <p:nvPr/>
+          </p:nvCxnSpPr>
+          <p:spPr>
+            <a:xfrm flipH="1" flipV="1">
+              <a:off x="3856383" y="4899991"/>
+              <a:ext cx="1234680" cy="950244"/>
+            </a:xfrm>
+            <a:prstGeom prst="straightConnector1">
+              <a:avLst/>
+            </a:prstGeom>
+            <a:ln>
+              <a:solidFill>
+                <a:srgbClr val="FF0000"/>
+              </a:solidFill>
+              <a:tailEnd type="triangle"/>
+            </a:ln>
+          </p:spPr>
+          <p:style>
+            <a:lnRef idx="1">
+              <a:schemeClr val="accent1"/>
+            </a:lnRef>
+            <a:fillRef idx="0">
+              <a:schemeClr val="accent1"/>
+            </a:fillRef>
+            <a:effectRef idx="0">
+              <a:schemeClr val="accent1"/>
+            </a:effectRef>
+            <a:fontRef idx="minor">
+              <a:schemeClr val="tx1"/>
+            </a:fontRef>
+          </p:style>
+        </p:cxnSp>
+        <p:sp>
+          <p:nvSpPr>
+            <p:cNvPr id="3" name="TextBox 2">
+              <a:extLst>
+                <a:ext uri="{FF2B5EF4-FFF2-40B4-BE49-F238E27FC236}">
+                  <a16:creationId xmlns:a16="http://schemas.microsoft.com/office/drawing/2014/main" id="{16D5D4F1-8370-387D-F6D8-21C5C80D4F42}"/>
+                </a:ext>
+              </a:extLst>
+            </p:cNvPr>
+            <p:cNvSpPr txBox="1"/>
+            <p:nvPr/>
+          </p:nvSpPr>
+          <p:spPr>
+            <a:xfrm>
+              <a:off x="3603084" y="5850235"/>
+              <a:ext cx="2975957" cy="923330"/>
+            </a:xfrm>
+            <a:prstGeom prst="rect">
+              <a:avLst/>
+            </a:prstGeom>
+            <a:noFill/>
+            <a:ln>
+              <a:solidFill>
+                <a:srgbClr val="FF0000"/>
+              </a:solidFill>
+            </a:ln>
+          </p:spPr>
+          <p:txBody>
+            <a:bodyPr wrap="square" rtlCol="0">
+              <a:spAutoFit/>
+            </a:bodyPr>
+            <a:lstStyle/>
+            <a:p>
+              <a:r>
+                <a:rPr lang="en-US" dirty="0">
+                  <a:solidFill>
+                    <a:srgbClr val="FF0000"/>
+                  </a:solidFill>
+                </a:rPr>
+                <a:t>Every time we resize, we earn </a:t>
+              </a:r>
+              <a:r>
+                <a:rPr lang="en-US" dirty="0" err="1">
+                  <a:solidFill>
+                    <a:srgbClr val="FF0000"/>
+                  </a:solidFill>
+                  <a:latin typeface="Consolas" panose="020B0609020204030204" pitchFamily="49" charset="0"/>
+                </a:rPr>
+                <a:t>data.length</a:t>
+              </a:r>
+              <a:r>
+                <a:rPr lang="en-US" dirty="0">
+                  <a:solidFill>
+                    <a:srgbClr val="FF0000"/>
+                  </a:solidFill>
+                </a:rPr>
+                <a:t> more adds before the next resize!</a:t>
+              </a:r>
+            </a:p>
+          </p:txBody>
+        </p:sp>
+      </p:grpSp>
+      <mc:AlternateContent xmlns:mc="http://schemas.openxmlformats.org/markup-compatibility/2006" xmlns:a14="http://schemas.microsoft.com/office/drawing/2010/main">
+        <mc:Choice Requires="a14">
+          <p:sp>
+            <p:nvSpPr>
+              <p:cNvPr id="4" name="Content Placeholder 3">
+                <a:extLst>
+                  <a:ext uri="{FF2B5EF4-FFF2-40B4-BE49-F238E27FC236}">
+                    <a16:creationId xmlns:a16="http://schemas.microsoft.com/office/drawing/2014/main" id="{015840F2-52BA-DB0C-15EC-2298E887A62B}"/>
+                  </a:ext>
+                </a:extLst>
+              </p:cNvPr>
+              <p:cNvSpPr>
+                <a:spLocks noGrp="1"/>
+              </p:cNvSpPr>
+              <p:nvPr>
+                <p:ph sz="half" idx="2"/>
+              </p:nvPr>
+            </p:nvSpPr>
+            <p:spPr/>
+            <p:txBody>
+              <a:bodyPr>
+                <a:normAutofit/>
+              </a:bodyPr>
+              <a:lstStyle/>
+              <a:p>
+                <a:r>
+                  <a:rPr lang="en-US" dirty="0"/>
+                  <a:t>Amortized Analysis Idea:</a:t>
+                </a:r>
+              </a:p>
+              <a:p>
+                <a:pPr lvl="1"/>
+                <a:r>
+                  <a:rPr lang="en-US" dirty="0"/>
+                  <a:t>Suppose we have a program that in total does </a:t>
+                </a:r>
+                <a14:m>
+                  <m:oMath xmlns:m="http://schemas.openxmlformats.org/officeDocument/2006/math">
+                    <m:r>
+                      <a:rPr lang="en-US" b="0" i="1" smtClean="0">
+                        <a:latin typeface="Cambria Math" panose="02040503050406030204" pitchFamily="18" charset="0"/>
+                      </a:rPr>
+                      <m:t>𝑛</m:t>
+                    </m:r>
+                  </m:oMath>
+                </a14:m>
+                <a:r>
+                  <a:rPr lang="en-US" dirty="0"/>
+                  <a:t> adds.</a:t>
+                </a:r>
+              </a:p>
+              <a:p>
+                <a:pPr lvl="1"/>
+                <a:r>
+                  <a:rPr lang="en-US" dirty="0"/>
+                  <a:t>How much time was spent “on average” across all </a:t>
+                </a:r>
+                <a14:m>
+                  <m:oMath xmlns:m="http://schemas.openxmlformats.org/officeDocument/2006/math">
+                    <m:r>
+                      <a:rPr lang="en-US" b="0" i="1" smtClean="0">
+                        <a:latin typeface="Cambria Math" panose="02040503050406030204" pitchFamily="18" charset="0"/>
+                      </a:rPr>
+                      <m:t>𝑛</m:t>
+                    </m:r>
+                  </m:oMath>
+                </a14:m>
+                <a:r>
+                  <a:rPr lang="en-US" dirty="0"/>
+                  <a:t>?</a:t>
+                </a:r>
+              </a:p>
+              <a:p>
+                <a:r>
+                  <a:rPr lang="en-US" dirty="0"/>
+                  <a:t>Let </a:t>
+                </a:r>
+                <a14:m>
+                  <m:oMath xmlns:m="http://schemas.openxmlformats.org/officeDocument/2006/math">
+                    <m:r>
+                      <a:rPr lang="en-US" b="0" i="1" smtClean="0">
+                        <a:latin typeface="Cambria Math" panose="02040503050406030204" pitchFamily="18" charset="0"/>
+                      </a:rPr>
+                      <m:t>𝑐</m:t>
+                    </m:r>
+                  </m:oMath>
+                </a14:m>
+                <a:r>
+                  <a:rPr lang="en-US" dirty="0"/>
+                  <a:t> be the initial size of </a:t>
+                </a:r>
+                <a:r>
+                  <a:rPr lang="en-US" dirty="0">
+                    <a:latin typeface="Consolas" panose="020B0609020204030204" pitchFamily="49" charset="0"/>
+                  </a:rPr>
+                  <a:t>data</a:t>
+                </a:r>
+              </a:p>
+              <a:p>
+                <a:pPr lvl="1"/>
+                <a:r>
+                  <a:rPr lang="en-US" dirty="0"/>
+                  <a:t>The first </a:t>
+                </a:r>
+                <a14:m>
+                  <m:oMath xmlns:m="http://schemas.openxmlformats.org/officeDocument/2006/math">
+                    <m:r>
+                      <a:rPr lang="en-US" b="0" i="1" smtClean="0">
+                        <a:latin typeface="Cambria Math" panose="02040503050406030204" pitchFamily="18" charset="0"/>
+                      </a:rPr>
+                      <m:t>𝑐</m:t>
+                    </m:r>
+                  </m:oMath>
+                </a14:m>
+                <a:r>
+                  <a:rPr lang="en-US" dirty="0"/>
+                  <a:t> adds take: </a:t>
+                </a:r>
+                <a14:m>
+                  <m:oMath xmlns:m="http://schemas.openxmlformats.org/officeDocument/2006/math">
+                    <m:r>
+                      <a:rPr lang="en-US" b="0" i="1" smtClean="0">
+                        <a:latin typeface="Cambria Math" panose="02040503050406030204" pitchFamily="18" charset="0"/>
+                      </a:rPr>
+                      <m:t>𝑐</m:t>
+                    </m:r>
+                    <m:r>
+                      <a:rPr lang="en-US" b="0" i="1" smtClean="0">
+                        <a:latin typeface="Cambria Math" panose="02040503050406030204" pitchFamily="18" charset="0"/>
+                      </a:rPr>
+                      <m:t>+</m:t>
+                    </m:r>
+                    <m:r>
+                      <a:rPr lang="en-US" b="0" i="1" smtClean="0">
+                        <a:latin typeface="Cambria Math" panose="02040503050406030204" pitchFamily="18" charset="0"/>
+                      </a:rPr>
+                      <m:t>𝑐</m:t>
+                    </m:r>
+                    <m:r>
+                      <a:rPr lang="en-US" b="0" i="1" smtClean="0">
+                        <a:latin typeface="Cambria Math" panose="02040503050406030204" pitchFamily="18" charset="0"/>
+                      </a:rPr>
+                      <m:t>=2</m:t>
+                    </m:r>
+                    <m:r>
+                      <a:rPr lang="en-US" b="0" i="1" smtClean="0">
+                        <a:latin typeface="Cambria Math" panose="02040503050406030204" pitchFamily="18" charset="0"/>
+                      </a:rPr>
+                      <m:t>𝑐</m:t>
+                    </m:r>
+                  </m:oMath>
+                </a14:m>
+                <a:endParaRPr lang="en-US" dirty="0"/>
+              </a:p>
+              <a:p>
+                <a:pPr lvl="1"/>
+                <a:r>
+                  <a:rPr lang="en-US" dirty="0"/>
+                  <a:t>The next </a:t>
+                </a:r>
+                <a14:m>
+                  <m:oMath xmlns:m="http://schemas.openxmlformats.org/officeDocument/2006/math">
+                    <m:r>
+                      <a:rPr lang="en-US" b="0" i="1" smtClean="0">
+                        <a:latin typeface="Cambria Math" panose="02040503050406030204" pitchFamily="18" charset="0"/>
+                      </a:rPr>
+                      <m:t>2</m:t>
+                    </m:r>
+                    <m:r>
+                      <a:rPr lang="en-US" b="0" i="1" smtClean="0">
+                        <a:latin typeface="Cambria Math" panose="02040503050406030204" pitchFamily="18" charset="0"/>
+                      </a:rPr>
+                      <m:t>𝑐</m:t>
+                    </m:r>
+                  </m:oMath>
+                </a14:m>
+                <a:r>
+                  <a:rPr lang="en-US" dirty="0"/>
+                  <a:t> adds: </a:t>
+                </a:r>
+                <a14:m>
+                  <m:oMath xmlns:m="http://schemas.openxmlformats.org/officeDocument/2006/math">
+                    <m:r>
+                      <a:rPr lang="en-US" b="0" i="1" smtClean="0">
+                        <a:latin typeface="Cambria Math" panose="02040503050406030204" pitchFamily="18" charset="0"/>
+                      </a:rPr>
+                      <m:t>2</m:t>
+                    </m:r>
+                    <m:r>
+                      <a:rPr lang="en-US" b="0" i="1" smtClean="0">
+                        <a:latin typeface="Cambria Math" panose="02040503050406030204" pitchFamily="18" charset="0"/>
+                      </a:rPr>
+                      <m:t>𝑐</m:t>
+                    </m:r>
+                    <m:r>
+                      <a:rPr lang="en-US" b="0" i="1" smtClean="0">
+                        <a:latin typeface="Cambria Math" panose="02040503050406030204" pitchFamily="18" charset="0"/>
+                      </a:rPr>
+                      <m:t>+2</m:t>
+                    </m:r>
+                    <m:r>
+                      <a:rPr lang="en-US" b="0" i="1" smtClean="0">
+                        <a:latin typeface="Cambria Math" panose="02040503050406030204" pitchFamily="18" charset="0"/>
+                      </a:rPr>
+                      <m:t>𝑐</m:t>
+                    </m:r>
+                    <m:r>
+                      <a:rPr lang="en-US" b="0" i="1" smtClean="0">
+                        <a:latin typeface="Cambria Math" panose="02040503050406030204" pitchFamily="18" charset="0"/>
+                      </a:rPr>
+                      <m:t>=4</m:t>
+                    </m:r>
+                    <m:r>
+                      <a:rPr lang="en-US" b="0" i="1" smtClean="0">
+                        <a:latin typeface="Cambria Math" panose="02040503050406030204" pitchFamily="18" charset="0"/>
+                      </a:rPr>
+                      <m:t>𝑐</m:t>
+                    </m:r>
+                  </m:oMath>
+                </a14:m>
+                <a:endParaRPr lang="en-US" dirty="0"/>
+              </a:p>
+              <a:p>
+                <a:pPr lvl="1"/>
+                <a:r>
+                  <a:rPr lang="en-US" dirty="0"/>
+                  <a:t>The next </a:t>
+                </a:r>
+                <a14:m>
+                  <m:oMath xmlns:m="http://schemas.openxmlformats.org/officeDocument/2006/math">
+                    <m:r>
+                      <a:rPr lang="en-US" b="0" i="1" smtClean="0">
+                        <a:latin typeface="Cambria Math" panose="02040503050406030204" pitchFamily="18" charset="0"/>
+                      </a:rPr>
+                      <m:t>4</m:t>
+                    </m:r>
+                    <m:r>
+                      <a:rPr lang="en-US" b="0" i="1" smtClean="0">
+                        <a:latin typeface="Cambria Math" panose="02040503050406030204" pitchFamily="18" charset="0"/>
+                      </a:rPr>
+                      <m:t>𝑐</m:t>
+                    </m:r>
+                  </m:oMath>
+                </a14:m>
+                <a:r>
+                  <a:rPr lang="en-US" dirty="0"/>
+                  <a:t> adds: </a:t>
+                </a:r>
+                <a14:m>
+                  <m:oMath xmlns:m="http://schemas.openxmlformats.org/officeDocument/2006/math">
+                    <m:r>
+                      <a:rPr lang="en-US" b="0" i="1" smtClean="0">
+                        <a:latin typeface="Cambria Math" panose="02040503050406030204" pitchFamily="18" charset="0"/>
+                      </a:rPr>
+                      <m:t>4</m:t>
+                    </m:r>
+                    <m:r>
+                      <a:rPr lang="en-US" b="0" i="1" smtClean="0">
+                        <a:latin typeface="Cambria Math" panose="02040503050406030204" pitchFamily="18" charset="0"/>
+                      </a:rPr>
+                      <m:t>𝑐</m:t>
+                    </m:r>
+                    <m:r>
+                      <a:rPr lang="en-US" b="0" i="1" smtClean="0">
+                        <a:latin typeface="Cambria Math" panose="02040503050406030204" pitchFamily="18" charset="0"/>
+                      </a:rPr>
+                      <m:t>+4</m:t>
+                    </m:r>
+                    <m:r>
+                      <a:rPr lang="en-US" b="0" i="1" smtClean="0">
+                        <a:latin typeface="Cambria Math" panose="02040503050406030204" pitchFamily="18" charset="0"/>
+                      </a:rPr>
+                      <m:t>𝑐</m:t>
+                    </m:r>
+                    <m:r>
+                      <a:rPr lang="en-US" b="0" i="1" smtClean="0">
+                        <a:latin typeface="Cambria Math" panose="02040503050406030204" pitchFamily="18" charset="0"/>
+                      </a:rPr>
+                      <m:t>=8</m:t>
+                    </m:r>
+                    <m:r>
+                      <a:rPr lang="en-US" b="0" i="1" smtClean="0">
+                        <a:latin typeface="Cambria Math" panose="02040503050406030204" pitchFamily="18" charset="0"/>
+                      </a:rPr>
+                      <m:t>𝑐</m:t>
+                    </m:r>
+                  </m:oMath>
+                </a14:m>
+                <a:endParaRPr lang="en-US" dirty="0"/>
+              </a:p>
+              <a:p>
+                <a:pPr lvl="1"/>
+                <a:r>
+                  <a:rPr lang="en-US" dirty="0"/>
+                  <a:t>Overall: </a:t>
+                </a:r>
+                <a14:m>
+                  <m:oMath xmlns:m="http://schemas.openxmlformats.org/officeDocument/2006/math">
+                    <m:f>
+                      <m:fPr>
+                        <m:ctrlPr>
+                          <a:rPr lang="en-US" b="0" i="1" smtClean="0">
+                            <a:latin typeface="Cambria Math" panose="02040503050406030204" pitchFamily="18" charset="0"/>
+                          </a:rPr>
+                        </m:ctrlPr>
+                      </m:fPr>
+                      <m:num>
+                        <m:r>
+                          <a:rPr lang="en-US" b="0" i="1" smtClean="0">
+                            <a:latin typeface="Cambria Math" panose="02040503050406030204" pitchFamily="18" charset="0"/>
+                          </a:rPr>
+                          <m:t>14</m:t>
+                        </m:r>
+                        <m:r>
+                          <a:rPr lang="en-US" b="0" i="1" smtClean="0">
+                            <a:latin typeface="Cambria Math" panose="02040503050406030204" pitchFamily="18" charset="0"/>
+                          </a:rPr>
+                          <m:t>𝑐</m:t>
+                        </m:r>
+                      </m:num>
+                      <m:den>
+                        <m:r>
+                          <a:rPr lang="en-US" b="0" i="1" smtClean="0">
+                            <a:latin typeface="Cambria Math" panose="02040503050406030204" pitchFamily="18" charset="0"/>
+                          </a:rPr>
+                          <m:t>7</m:t>
+                        </m:r>
+                        <m:r>
+                          <a:rPr lang="en-US" b="0" i="1" smtClean="0">
+                            <a:latin typeface="Cambria Math" panose="02040503050406030204" pitchFamily="18" charset="0"/>
+                          </a:rPr>
+                          <m:t>𝑐</m:t>
+                        </m:r>
+                      </m:den>
+                    </m:f>
+                    <m:r>
+                      <a:rPr lang="en-US" b="0" i="1" smtClean="0">
+                        <a:latin typeface="Cambria Math" panose="02040503050406030204" pitchFamily="18" charset="0"/>
+                      </a:rPr>
+                      <m:t>=2</m:t>
+                    </m:r>
+                    <m:r>
+                      <a:rPr lang="en-US" b="0" i="1" smtClean="0">
+                        <a:latin typeface="Cambria Math" panose="02040503050406030204" pitchFamily="18" charset="0"/>
+                      </a:rPr>
+                      <m:t>𝑐</m:t>
+                    </m:r>
+                  </m:oMath>
+                </a14:m>
+                <a:endParaRPr lang="en-US" dirty="0"/>
+              </a:p>
+            </p:txBody>
+          </p:sp>
+        </mc:Choice>
+        <mc:Fallback xmlns="">
+          <p:sp>
+            <p:nvSpPr>
+              <p:cNvPr id="4" name="Content Placeholder 3">
+                <a:extLst>
+                  <a:ext uri="{FF2B5EF4-FFF2-40B4-BE49-F238E27FC236}">
+                    <a16:creationId xmlns:a16="http://schemas.microsoft.com/office/drawing/2014/main" id="{015840F2-52BA-DB0C-15EC-2298E887A62B}"/>
+                  </a:ext>
+                </a:extLst>
+              </p:cNvPr>
+              <p:cNvSpPr>
+                <a:spLocks noGrp="1" noRot="1" noChangeAspect="1" noMove="1" noResize="1" noEditPoints="1" noAdjustHandles="1" noChangeArrowheads="1" noChangeShapeType="1" noTextEdit="1"/>
+              </p:cNvSpPr>
+              <p:nvPr>
+                <p:ph sz="half" idx="2"/>
+              </p:nvPr>
+            </p:nvSpPr>
+            <p:spPr>
+              <a:blipFill>
+                <a:blip r:embed="rId3"/>
+                <a:stretch>
+                  <a:fillRect l="-2118" t="-2241"/>
+                </a:stretch>
+              </a:blipFill>
+            </p:spPr>
+            <p:txBody>
+              <a:bodyPr/>
+              <a:lstStyle/>
+              <a:p>
+                <a:r>
+                  <a:rPr lang="en-US">
+                    <a:noFill/>
+                  </a:rPr>
+                  <a:t> </a:t>
+                </a:r>
+              </a:p>
+            </p:txBody>
+          </p:sp>
+        </mc:Fallback>
+      </mc:AlternateContent>
     </p:spTree>
     <p:extLst>
       <p:ext uri="{BB962C8B-B14F-4D97-AF65-F5344CB8AC3E}">
-        <p14:creationId xmlns:p14="http://schemas.microsoft.com/office/powerpoint/2010/main" val="1158566627"/>
+        <p14:creationId xmlns:p14="http://schemas.microsoft.com/office/powerpoint/2010/main" val="349862771"/>
       </p:ext>
     </p:extLst>
   </p:cSld>
@@ -18913,7 +21127,1440 @@
 </p:sld>
 </file>
 
-<file path=ppt/slides/slide3.xml><?xml version="1.0" encoding="utf-8"?>
+<file path=ppt/slides/slide33.xml><?xml version="1.0" encoding="utf-8"?>
+<p:sld xmlns:a="http://schemas.openxmlformats.org/drawingml/2006/main" xmlns:r="http://schemas.openxmlformats.org/officeDocument/2006/relationships" xmlns:p="http://schemas.openxmlformats.org/presentationml/2006/main">
+  <p:cSld>
+    <p:spTree>
+      <p:nvGrpSpPr>
+        <p:cNvPr id="1" name=""/>
+        <p:cNvGrpSpPr/>
+        <p:nvPr/>
+      </p:nvGrpSpPr>
+      <p:grpSpPr>
+        <a:xfrm>
+          <a:off x="0" y="0"/>
+          <a:ext cx="0" cy="0"/>
+          <a:chOff x="0" y="0"/>
+          <a:chExt cx="0" cy="0"/>
+        </a:xfrm>
+      </p:grpSpPr>
+      <p:sp>
+        <p:nvSpPr>
+          <p:cNvPr id="2" name="Title 1">
+            <a:extLst>
+              <a:ext uri="{FF2B5EF4-FFF2-40B4-BE49-F238E27FC236}">
+                <a16:creationId xmlns:a16="http://schemas.microsoft.com/office/drawing/2014/main" id="{AE837711-2C9F-C400-7B2E-F7113BCCD397}"/>
+              </a:ext>
+            </a:extLst>
+          </p:cNvPr>
+          <p:cNvSpPr>
+            <a:spLocks noGrp="1"/>
+          </p:cNvSpPr>
+          <p:nvPr>
+            <p:ph type="title"/>
+          </p:nvPr>
+        </p:nvSpPr>
+        <p:spPr/>
+        <p:txBody>
+          <a:bodyPr/>
+          <a:lstStyle/>
+          <a:p>
+            <a:r>
+              <a:rPr lang="en-US" dirty="0"/>
+              <a:t>Amortized Analysis Analogy</a:t>
+            </a:r>
+          </a:p>
+        </p:txBody>
+      </p:sp>
+      <p:sp>
+        <p:nvSpPr>
+          <p:cNvPr id="3" name="Content Placeholder 2">
+            <a:extLst>
+              <a:ext uri="{FF2B5EF4-FFF2-40B4-BE49-F238E27FC236}">
+                <a16:creationId xmlns:a16="http://schemas.microsoft.com/office/drawing/2014/main" id="{E995483E-FA76-F83C-AF97-9517E9B1D9AB}"/>
+              </a:ext>
+            </a:extLst>
+          </p:cNvPr>
+          <p:cNvSpPr>
+            <a:spLocks noGrp="1"/>
+          </p:cNvSpPr>
+          <p:nvPr>
+            <p:ph idx="1"/>
+          </p:nvPr>
+        </p:nvSpPr>
+        <p:spPr/>
+        <p:txBody>
+          <a:bodyPr/>
+          <a:lstStyle/>
+          <a:p>
+            <a:r>
+              <a:rPr lang="en-US" dirty="0"/>
+              <a:t>Suppose I’d like to park in a lot where they charge $10 per day to park</a:t>
+            </a:r>
+          </a:p>
+          <a:p>
+            <a:r>
+              <a:rPr lang="en-US" dirty="0"/>
+              <a:t>If you are caught in the lot without paying you are given a warning</a:t>
+            </a:r>
+          </a:p>
+          <a:p>
+            <a:r>
+              <a:rPr lang="en-US" dirty="0"/>
+              <a:t>If you get 3 warnings, you are charged a $25 fine, and your warnings reset.</a:t>
+            </a:r>
+          </a:p>
+          <a:p>
+            <a:r>
+              <a:rPr lang="en-US" dirty="0"/>
+              <a:t>Should you actually pay to park?</a:t>
+            </a:r>
+          </a:p>
+          <a:p>
+            <a:pPr lvl="1"/>
+            <a:r>
+              <a:rPr lang="en-US" dirty="0"/>
+              <a:t>If you pay every day then you pay an average of $10 per day</a:t>
+            </a:r>
+          </a:p>
+          <a:p>
+            <a:pPr lvl="1"/>
+            <a:r>
+              <a:rPr lang="en-US" dirty="0"/>
+              <a:t>If you do not pay then for every three </a:t>
+            </a:r>
+            <a:r>
+              <a:rPr lang="en-US"/>
+              <a:t>days parking costs $</a:t>
+            </a:r>
+            <a:r>
+              <a:rPr lang="en-US" dirty="0"/>
+              <a:t>0+$0+$25, for an average of $8.33 per day</a:t>
+            </a:r>
+          </a:p>
+          <a:p>
+            <a:pPr lvl="2"/>
+            <a:r>
+              <a:rPr lang="en-US" dirty="0"/>
+              <a:t>This is an amortized analysis</a:t>
+            </a:r>
+          </a:p>
+        </p:txBody>
+      </p:sp>
+    </p:spTree>
+    <p:extLst>
+      <p:ext uri="{BB962C8B-B14F-4D97-AF65-F5344CB8AC3E}">
+        <p14:creationId xmlns:p14="http://schemas.microsoft.com/office/powerpoint/2010/main" val="948737531"/>
+      </p:ext>
+    </p:extLst>
+  </p:cSld>
+  <p:clrMapOvr>
+    <a:masterClrMapping/>
+  </p:clrMapOvr>
+</p:sld>
+</file>
+
+<file path=ppt/slides/slide4.xml><?xml version="1.0" encoding="utf-8"?>
+<p:sld xmlns:a="http://schemas.openxmlformats.org/drawingml/2006/main" xmlns:r="http://schemas.openxmlformats.org/officeDocument/2006/relationships" xmlns:p="http://schemas.openxmlformats.org/presentationml/2006/main">
+  <p:cSld>
+    <p:spTree>
+      <p:nvGrpSpPr>
+        <p:cNvPr id="1" name=""/>
+        <p:cNvGrpSpPr/>
+        <p:nvPr/>
+      </p:nvGrpSpPr>
+      <p:grpSpPr>
+        <a:xfrm>
+          <a:off x="0" y="0"/>
+          <a:ext cx="0" cy="0"/>
+          <a:chOff x="0" y="0"/>
+          <a:chExt cx="0" cy="0"/>
+        </a:xfrm>
+      </p:grpSpPr>
+      <p:sp>
+        <p:nvSpPr>
+          <p:cNvPr id="2" name="Title 1">
+            <a:extLst>
+              <a:ext uri="{FF2B5EF4-FFF2-40B4-BE49-F238E27FC236}">
+                <a16:creationId xmlns:a16="http://schemas.microsoft.com/office/drawing/2014/main" id="{C84B3408-2D56-B58E-F959-CF8F6AE7145D}"/>
+              </a:ext>
+            </a:extLst>
+          </p:cNvPr>
+          <p:cNvSpPr>
+            <a:spLocks noGrp="1"/>
+          </p:cNvSpPr>
+          <p:nvPr>
+            <p:ph type="title"/>
+          </p:nvPr>
+        </p:nvSpPr>
+        <p:spPr/>
+        <p:txBody>
+          <a:bodyPr/>
+          <a:lstStyle/>
+          <a:p>
+            <a:r>
+              <a:rPr lang="en-US" dirty="0"/>
+              <a:t>Linked Queue Data Structure (Idea)</a:t>
+            </a:r>
+          </a:p>
+        </p:txBody>
+      </p:sp>
+      <p:sp>
+        <p:nvSpPr>
+          <p:cNvPr id="3" name="Content Placeholder 2">
+            <a:extLst>
+              <a:ext uri="{FF2B5EF4-FFF2-40B4-BE49-F238E27FC236}">
+                <a16:creationId xmlns:a16="http://schemas.microsoft.com/office/drawing/2014/main" id="{1376FFCF-F09D-CE03-F022-D39AD4A97E9E}"/>
+              </a:ext>
+            </a:extLst>
+          </p:cNvPr>
+          <p:cNvSpPr>
+            <a:spLocks noGrp="1"/>
+          </p:cNvSpPr>
+          <p:nvPr>
+            <p:ph idx="1"/>
+          </p:nvPr>
+        </p:nvSpPr>
+        <p:spPr>
+          <a:xfrm>
+            <a:off x="198120" y="2313305"/>
+            <a:ext cx="7076440" cy="4351338"/>
+          </a:xfrm>
+          <a:ln>
+            <a:noFill/>
+          </a:ln>
+        </p:spPr>
+        <p:txBody>
+          <a:bodyPr>
+            <a:normAutofit fontScale="92500" lnSpcReduction="20000"/>
+          </a:bodyPr>
+          <a:lstStyle/>
+          <a:p>
+            <a:r>
+              <a:rPr lang="en-US" dirty="0"/>
+              <a:t>Queue represented as a “chain” of items</a:t>
+            </a:r>
+          </a:p>
+          <a:p>
+            <a:pPr lvl="1"/>
+            <a:r>
+              <a:rPr lang="en-US" dirty="0">
+                <a:solidFill>
+                  <a:srgbClr val="0070C0"/>
+                </a:solidFill>
+              </a:rPr>
+              <a:t>A “front” reference to the oldest item</a:t>
+            </a:r>
+          </a:p>
+          <a:p>
+            <a:pPr lvl="1"/>
+            <a:r>
+              <a:rPr lang="en-US" dirty="0">
+                <a:solidFill>
+                  <a:schemeClr val="accent2">
+                    <a:lumMod val="75000"/>
+                  </a:schemeClr>
+                </a:solidFill>
+              </a:rPr>
+              <a:t>A “back” reference to the most recent item</a:t>
+            </a:r>
+          </a:p>
+          <a:p>
+            <a:pPr lvl="1"/>
+            <a:r>
+              <a:rPr lang="en-US" dirty="0">
+                <a:solidFill>
+                  <a:srgbClr val="FF0000"/>
+                </a:solidFill>
+              </a:rPr>
+              <a:t>Each Node references the item enqueued after it</a:t>
+            </a:r>
+          </a:p>
+          <a:p>
+            <a:r>
+              <a:rPr lang="en-US" dirty="0"/>
+              <a:t>enqueue Procedure:</a:t>
+            </a:r>
+          </a:p>
+          <a:p>
+            <a:pPr marL="457200" lvl="1" indent="0">
+              <a:buNone/>
+            </a:pPr>
+            <a:endParaRPr lang="en-US" dirty="0"/>
+          </a:p>
+          <a:p>
+            <a:pPr marL="457200" lvl="1" indent="0">
+              <a:buNone/>
+            </a:pPr>
+            <a:endParaRPr lang="en-US" dirty="0"/>
+          </a:p>
+          <a:p>
+            <a:pPr lvl="1"/>
+            <a:endParaRPr lang="en-US" dirty="0"/>
+          </a:p>
+          <a:p>
+            <a:r>
+              <a:rPr lang="en-US" dirty="0"/>
+              <a:t>dequeue Procedure:</a:t>
+            </a:r>
+          </a:p>
+          <a:p>
+            <a:endParaRPr lang="en-US" dirty="0"/>
+          </a:p>
+          <a:p>
+            <a:endParaRPr lang="en-US" dirty="0"/>
+          </a:p>
+          <a:p>
+            <a:r>
+              <a:rPr lang="en-US" dirty="0" err="1"/>
+              <a:t>isEmpty</a:t>
+            </a:r>
+            <a:r>
+              <a:rPr lang="en-US" dirty="0"/>
+              <a:t> Procedure:</a:t>
+            </a:r>
+          </a:p>
+        </p:txBody>
+      </p:sp>
+      <p:grpSp>
+        <p:nvGrpSpPr>
+          <p:cNvPr id="19" name="Group 18" descr="An illustration of a linked queue data structure. The elements of the list are contained in node objects. Each node object has a reference to another node object to establish a sequence of elements. There is also a reference called &quot;front&quot; that points to the first node in the queue, and a reference called &quot;back&quot; that points to the last node in the queue.">
+            <a:extLst>
+              <a:ext uri="{FF2B5EF4-FFF2-40B4-BE49-F238E27FC236}">
+                <a16:creationId xmlns:a16="http://schemas.microsoft.com/office/drawing/2014/main" id="{EC75C82D-E1B4-51B9-7FE9-D680C96B6501}"/>
+              </a:ext>
+            </a:extLst>
+          </p:cNvPr>
+          <p:cNvGrpSpPr/>
+          <p:nvPr/>
+        </p:nvGrpSpPr>
+        <p:grpSpPr>
+          <a:xfrm>
+            <a:off x="838200" y="1554957"/>
+            <a:ext cx="8239760" cy="1718152"/>
+            <a:chOff x="838200" y="1554957"/>
+            <a:chExt cx="8239760" cy="1718152"/>
+          </a:xfrm>
+        </p:grpSpPr>
+        <p:grpSp>
+          <p:nvGrpSpPr>
+            <p:cNvPr id="31" name="Group 30">
+              <a:extLst>
+                <a:ext uri="{FF2B5EF4-FFF2-40B4-BE49-F238E27FC236}">
+                  <a16:creationId xmlns:a16="http://schemas.microsoft.com/office/drawing/2014/main" id="{EE47A3E1-F9C8-C154-58A8-A0F832437092}"/>
+                </a:ext>
+              </a:extLst>
+            </p:cNvPr>
+            <p:cNvGrpSpPr/>
+            <p:nvPr/>
+          </p:nvGrpSpPr>
+          <p:grpSpPr>
+            <a:xfrm>
+              <a:off x="2727960" y="1554957"/>
+              <a:ext cx="6350000" cy="528320"/>
+              <a:chOff x="2727960" y="1554957"/>
+              <a:chExt cx="6350000" cy="528320"/>
+            </a:xfrm>
+          </p:grpSpPr>
+          <p:grpSp>
+            <p:nvGrpSpPr>
+              <p:cNvPr id="6" name="Group 5">
+                <a:extLst>
+                  <a:ext uri="{FF2B5EF4-FFF2-40B4-BE49-F238E27FC236}">
+                    <a16:creationId xmlns:a16="http://schemas.microsoft.com/office/drawing/2014/main" id="{6AFBF987-7851-60B2-CF03-393FC95534F8}"/>
+                  </a:ext>
+                </a:extLst>
+              </p:cNvPr>
+              <p:cNvGrpSpPr/>
+              <p:nvPr/>
+            </p:nvGrpSpPr>
+            <p:grpSpPr>
+              <a:xfrm>
+                <a:off x="4053840" y="1554957"/>
+                <a:ext cx="1056640" cy="528320"/>
+                <a:chOff x="8117840" y="4104640"/>
+                <a:chExt cx="1056640" cy="528320"/>
+              </a:xfrm>
+            </p:grpSpPr>
+            <p:sp>
+              <p:nvSpPr>
+                <p:cNvPr id="4" name="Rectangle 3">
+                  <a:extLst>
+                    <a:ext uri="{FF2B5EF4-FFF2-40B4-BE49-F238E27FC236}">
+                      <a16:creationId xmlns:a16="http://schemas.microsoft.com/office/drawing/2014/main" id="{0D240B2B-22D3-91C7-A99D-36F8C313B7FD}"/>
+                    </a:ext>
+                  </a:extLst>
+                </p:cNvPr>
+                <p:cNvSpPr/>
+                <p:nvPr/>
+              </p:nvSpPr>
+              <p:spPr>
+                <a:xfrm>
+                  <a:off x="8117840" y="4104640"/>
+                  <a:ext cx="528320" cy="528320"/>
+                </a:xfrm>
+                <a:prstGeom prst="rect">
+                  <a:avLst/>
+                </a:prstGeom>
+                <a:solidFill>
+                  <a:schemeClr val="accent4">
+                    <a:lumMod val="40000"/>
+                    <a:lumOff val="60000"/>
+                  </a:schemeClr>
+                </a:solidFill>
+              </p:spPr>
+              <p:style>
+                <a:lnRef idx="2">
+                  <a:schemeClr val="accent1">
+                    <a:shade val="15000"/>
+                  </a:schemeClr>
+                </a:lnRef>
+                <a:fillRef idx="1">
+                  <a:schemeClr val="accent1"/>
+                </a:fillRef>
+                <a:effectRef idx="0">
+                  <a:schemeClr val="accent1"/>
+                </a:effectRef>
+                <a:fontRef idx="minor">
+                  <a:schemeClr val="lt1"/>
+                </a:fontRef>
+              </p:style>
+              <p:txBody>
+                <a:bodyPr rtlCol="0" anchor="ctr"/>
+                <a:lstStyle/>
+                <a:p>
+                  <a:pPr algn="ctr"/>
+                  <a:r>
+                    <a:rPr lang="en-US" dirty="0">
+                      <a:solidFill>
+                        <a:schemeClr val="tx1"/>
+                      </a:solidFill>
+                    </a:rPr>
+                    <a:t>8</a:t>
+                  </a:r>
+                </a:p>
+              </p:txBody>
+            </p:sp>
+            <p:sp>
+              <p:nvSpPr>
+                <p:cNvPr id="5" name="Rectangle 4">
+                  <a:extLst>
+                    <a:ext uri="{FF2B5EF4-FFF2-40B4-BE49-F238E27FC236}">
+                      <a16:creationId xmlns:a16="http://schemas.microsoft.com/office/drawing/2014/main" id="{4B5CC621-6E1F-A3F0-5D55-C08016EAD80D}"/>
+                    </a:ext>
+                  </a:extLst>
+                </p:cNvPr>
+                <p:cNvSpPr/>
+                <p:nvPr/>
+              </p:nvSpPr>
+              <p:spPr>
+                <a:xfrm>
+                  <a:off x="8646160" y="4104640"/>
+                  <a:ext cx="528320" cy="528320"/>
+                </a:xfrm>
+                <a:prstGeom prst="rect">
+                  <a:avLst/>
+                </a:prstGeom>
+                <a:solidFill>
+                  <a:schemeClr val="bg1"/>
+                </a:solidFill>
+              </p:spPr>
+              <p:style>
+                <a:lnRef idx="2">
+                  <a:schemeClr val="accent1">
+                    <a:shade val="15000"/>
+                  </a:schemeClr>
+                </a:lnRef>
+                <a:fillRef idx="1">
+                  <a:schemeClr val="accent1"/>
+                </a:fillRef>
+                <a:effectRef idx="0">
+                  <a:schemeClr val="accent1"/>
+                </a:effectRef>
+                <a:fontRef idx="minor">
+                  <a:schemeClr val="lt1"/>
+                </a:fontRef>
+              </p:style>
+              <p:txBody>
+                <a:bodyPr rtlCol="0" anchor="ctr"/>
+                <a:lstStyle/>
+                <a:p>
+                  <a:pPr algn="ctr"/>
+                  <a:endParaRPr lang="en-US"/>
+                </a:p>
+              </p:txBody>
+            </p:sp>
+          </p:grpSp>
+          <p:grpSp>
+            <p:nvGrpSpPr>
+              <p:cNvPr id="7" name="Group 6">
+                <a:extLst>
+                  <a:ext uri="{FF2B5EF4-FFF2-40B4-BE49-F238E27FC236}">
+                    <a16:creationId xmlns:a16="http://schemas.microsoft.com/office/drawing/2014/main" id="{E5D432AB-1E74-F08B-CEC5-A365264C947C}"/>
+                  </a:ext>
+                </a:extLst>
+              </p:cNvPr>
+              <p:cNvGrpSpPr/>
+              <p:nvPr/>
+            </p:nvGrpSpPr>
+            <p:grpSpPr>
+              <a:xfrm>
+                <a:off x="5374640" y="1554957"/>
+                <a:ext cx="1056640" cy="528320"/>
+                <a:chOff x="8117840" y="4104640"/>
+                <a:chExt cx="1056640" cy="528320"/>
+              </a:xfrm>
+            </p:grpSpPr>
+            <p:sp>
+              <p:nvSpPr>
+                <p:cNvPr id="8" name="Rectangle 7">
+                  <a:extLst>
+                    <a:ext uri="{FF2B5EF4-FFF2-40B4-BE49-F238E27FC236}">
+                      <a16:creationId xmlns:a16="http://schemas.microsoft.com/office/drawing/2014/main" id="{60CA4D0E-42E8-E538-D8FF-DC6E00DFC845}"/>
+                    </a:ext>
+                  </a:extLst>
+                </p:cNvPr>
+                <p:cNvSpPr/>
+                <p:nvPr/>
+              </p:nvSpPr>
+              <p:spPr>
+                <a:xfrm>
+                  <a:off x="8117840" y="4104640"/>
+                  <a:ext cx="528320" cy="528320"/>
+                </a:xfrm>
+                <a:prstGeom prst="rect">
+                  <a:avLst/>
+                </a:prstGeom>
+                <a:solidFill>
+                  <a:schemeClr val="accent4">
+                    <a:lumMod val="40000"/>
+                    <a:lumOff val="60000"/>
+                  </a:schemeClr>
+                </a:solidFill>
+              </p:spPr>
+              <p:style>
+                <a:lnRef idx="2">
+                  <a:schemeClr val="accent1">
+                    <a:shade val="15000"/>
+                  </a:schemeClr>
+                </a:lnRef>
+                <a:fillRef idx="1">
+                  <a:schemeClr val="accent1"/>
+                </a:fillRef>
+                <a:effectRef idx="0">
+                  <a:schemeClr val="accent1"/>
+                </a:effectRef>
+                <a:fontRef idx="minor">
+                  <a:schemeClr val="lt1"/>
+                </a:fontRef>
+              </p:style>
+              <p:txBody>
+                <a:bodyPr rtlCol="0" anchor="ctr"/>
+                <a:lstStyle/>
+                <a:p>
+                  <a:pPr algn="ctr"/>
+                  <a:r>
+                    <a:rPr lang="en-US" dirty="0">
+                      <a:solidFill>
+                        <a:schemeClr val="tx1"/>
+                      </a:solidFill>
+                    </a:rPr>
+                    <a:t>3</a:t>
+                  </a:r>
+                </a:p>
+              </p:txBody>
+            </p:sp>
+            <p:sp>
+              <p:nvSpPr>
+                <p:cNvPr id="9" name="Rectangle 8">
+                  <a:extLst>
+                    <a:ext uri="{FF2B5EF4-FFF2-40B4-BE49-F238E27FC236}">
+                      <a16:creationId xmlns:a16="http://schemas.microsoft.com/office/drawing/2014/main" id="{5852A5BB-697F-7122-8EBB-493FC932062B}"/>
+                    </a:ext>
+                  </a:extLst>
+                </p:cNvPr>
+                <p:cNvSpPr/>
+                <p:nvPr/>
+              </p:nvSpPr>
+              <p:spPr>
+                <a:xfrm>
+                  <a:off x="8646160" y="4104640"/>
+                  <a:ext cx="528320" cy="528320"/>
+                </a:xfrm>
+                <a:prstGeom prst="rect">
+                  <a:avLst/>
+                </a:prstGeom>
+                <a:solidFill>
+                  <a:schemeClr val="bg1"/>
+                </a:solidFill>
+              </p:spPr>
+              <p:style>
+                <a:lnRef idx="2">
+                  <a:schemeClr val="accent1">
+                    <a:shade val="15000"/>
+                  </a:schemeClr>
+                </a:lnRef>
+                <a:fillRef idx="1">
+                  <a:schemeClr val="accent1"/>
+                </a:fillRef>
+                <a:effectRef idx="0">
+                  <a:schemeClr val="accent1"/>
+                </a:effectRef>
+                <a:fontRef idx="minor">
+                  <a:schemeClr val="lt1"/>
+                </a:fontRef>
+              </p:style>
+              <p:txBody>
+                <a:bodyPr rtlCol="0" anchor="ctr"/>
+                <a:lstStyle/>
+                <a:p>
+                  <a:pPr algn="ctr"/>
+                  <a:endParaRPr lang="en-US"/>
+                </a:p>
+              </p:txBody>
+            </p:sp>
+          </p:grpSp>
+          <p:grpSp>
+            <p:nvGrpSpPr>
+              <p:cNvPr id="10" name="Group 9">
+                <a:extLst>
+                  <a:ext uri="{FF2B5EF4-FFF2-40B4-BE49-F238E27FC236}">
+                    <a16:creationId xmlns:a16="http://schemas.microsoft.com/office/drawing/2014/main" id="{6ECA4301-84E7-41A8-4817-7EF969030D46}"/>
+                  </a:ext>
+                </a:extLst>
+              </p:cNvPr>
+              <p:cNvGrpSpPr/>
+              <p:nvPr/>
+            </p:nvGrpSpPr>
+            <p:grpSpPr>
+              <a:xfrm>
+                <a:off x="6700520" y="1554957"/>
+                <a:ext cx="1056640" cy="528320"/>
+                <a:chOff x="8117840" y="4104640"/>
+                <a:chExt cx="1056640" cy="528320"/>
+              </a:xfrm>
+            </p:grpSpPr>
+            <p:sp>
+              <p:nvSpPr>
+                <p:cNvPr id="11" name="Rectangle 10">
+                  <a:extLst>
+                    <a:ext uri="{FF2B5EF4-FFF2-40B4-BE49-F238E27FC236}">
+                      <a16:creationId xmlns:a16="http://schemas.microsoft.com/office/drawing/2014/main" id="{AE88FDA0-F73F-1E24-18F2-F7925E8FC51E}"/>
+                    </a:ext>
+                  </a:extLst>
+                </p:cNvPr>
+                <p:cNvSpPr/>
+                <p:nvPr/>
+              </p:nvSpPr>
+              <p:spPr>
+                <a:xfrm>
+                  <a:off x="8117840" y="4104640"/>
+                  <a:ext cx="528320" cy="528320"/>
+                </a:xfrm>
+                <a:prstGeom prst="rect">
+                  <a:avLst/>
+                </a:prstGeom>
+                <a:solidFill>
+                  <a:schemeClr val="accent4">
+                    <a:lumMod val="40000"/>
+                    <a:lumOff val="60000"/>
+                  </a:schemeClr>
+                </a:solidFill>
+              </p:spPr>
+              <p:style>
+                <a:lnRef idx="2">
+                  <a:schemeClr val="accent1">
+                    <a:shade val="15000"/>
+                  </a:schemeClr>
+                </a:lnRef>
+                <a:fillRef idx="1">
+                  <a:schemeClr val="accent1"/>
+                </a:fillRef>
+                <a:effectRef idx="0">
+                  <a:schemeClr val="accent1"/>
+                </a:effectRef>
+                <a:fontRef idx="minor">
+                  <a:schemeClr val="lt1"/>
+                </a:fontRef>
+              </p:style>
+              <p:txBody>
+                <a:bodyPr rtlCol="0" anchor="ctr"/>
+                <a:lstStyle/>
+                <a:p>
+                  <a:pPr algn="ctr"/>
+                  <a:r>
+                    <a:rPr lang="en-US" dirty="0">
+                      <a:solidFill>
+                        <a:schemeClr val="tx1"/>
+                      </a:solidFill>
+                    </a:rPr>
+                    <a:t>4</a:t>
+                  </a:r>
+                </a:p>
+              </p:txBody>
+            </p:sp>
+            <p:sp>
+              <p:nvSpPr>
+                <p:cNvPr id="12" name="Rectangle 11">
+                  <a:extLst>
+                    <a:ext uri="{FF2B5EF4-FFF2-40B4-BE49-F238E27FC236}">
+                      <a16:creationId xmlns:a16="http://schemas.microsoft.com/office/drawing/2014/main" id="{1DA96747-E578-B3DB-2470-F7243CD49DD5}"/>
+                    </a:ext>
+                  </a:extLst>
+                </p:cNvPr>
+                <p:cNvSpPr/>
+                <p:nvPr/>
+              </p:nvSpPr>
+              <p:spPr>
+                <a:xfrm>
+                  <a:off x="8646160" y="4104640"/>
+                  <a:ext cx="528320" cy="528320"/>
+                </a:xfrm>
+                <a:prstGeom prst="rect">
+                  <a:avLst/>
+                </a:prstGeom>
+                <a:solidFill>
+                  <a:schemeClr val="bg1"/>
+                </a:solidFill>
+              </p:spPr>
+              <p:style>
+                <a:lnRef idx="2">
+                  <a:schemeClr val="accent1">
+                    <a:shade val="15000"/>
+                  </a:schemeClr>
+                </a:lnRef>
+                <a:fillRef idx="1">
+                  <a:schemeClr val="accent1"/>
+                </a:fillRef>
+                <a:effectRef idx="0">
+                  <a:schemeClr val="accent1"/>
+                </a:effectRef>
+                <a:fontRef idx="minor">
+                  <a:schemeClr val="lt1"/>
+                </a:fontRef>
+              </p:style>
+              <p:txBody>
+                <a:bodyPr rtlCol="0" anchor="ctr"/>
+                <a:lstStyle/>
+                <a:p>
+                  <a:pPr algn="ctr"/>
+                  <a:endParaRPr lang="en-US"/>
+                </a:p>
+              </p:txBody>
+            </p:sp>
+          </p:grpSp>
+          <p:grpSp>
+            <p:nvGrpSpPr>
+              <p:cNvPr id="13" name="Group 12">
+                <a:extLst>
+                  <a:ext uri="{FF2B5EF4-FFF2-40B4-BE49-F238E27FC236}">
+                    <a16:creationId xmlns:a16="http://schemas.microsoft.com/office/drawing/2014/main" id="{77951176-168B-B07B-7BE1-8239EFA9C9FE}"/>
+                  </a:ext>
+                </a:extLst>
+              </p:cNvPr>
+              <p:cNvGrpSpPr/>
+              <p:nvPr/>
+            </p:nvGrpSpPr>
+            <p:grpSpPr>
+              <a:xfrm>
+                <a:off x="8021320" y="1554957"/>
+                <a:ext cx="1056640" cy="528320"/>
+                <a:chOff x="8117840" y="4104640"/>
+                <a:chExt cx="1056640" cy="528320"/>
+              </a:xfrm>
+            </p:grpSpPr>
+            <p:sp>
+              <p:nvSpPr>
+                <p:cNvPr id="14" name="Rectangle 13">
+                  <a:extLst>
+                    <a:ext uri="{FF2B5EF4-FFF2-40B4-BE49-F238E27FC236}">
+                      <a16:creationId xmlns:a16="http://schemas.microsoft.com/office/drawing/2014/main" id="{2BA7BE02-D13E-4DA9-2B89-8660802D026E}"/>
+                    </a:ext>
+                  </a:extLst>
+                </p:cNvPr>
+                <p:cNvSpPr/>
+                <p:nvPr/>
+              </p:nvSpPr>
+              <p:spPr>
+                <a:xfrm>
+                  <a:off x="8117840" y="4104640"/>
+                  <a:ext cx="528320" cy="528320"/>
+                </a:xfrm>
+                <a:prstGeom prst="rect">
+                  <a:avLst/>
+                </a:prstGeom>
+                <a:solidFill>
+                  <a:schemeClr val="accent4">
+                    <a:lumMod val="40000"/>
+                    <a:lumOff val="60000"/>
+                  </a:schemeClr>
+                </a:solidFill>
+              </p:spPr>
+              <p:style>
+                <a:lnRef idx="2">
+                  <a:schemeClr val="accent1">
+                    <a:shade val="15000"/>
+                  </a:schemeClr>
+                </a:lnRef>
+                <a:fillRef idx="1">
+                  <a:schemeClr val="accent1"/>
+                </a:fillRef>
+                <a:effectRef idx="0">
+                  <a:schemeClr val="accent1"/>
+                </a:effectRef>
+                <a:fontRef idx="minor">
+                  <a:schemeClr val="lt1"/>
+                </a:fontRef>
+              </p:style>
+              <p:txBody>
+                <a:bodyPr rtlCol="0" anchor="ctr"/>
+                <a:lstStyle/>
+                <a:p>
+                  <a:pPr algn="ctr"/>
+                  <a:r>
+                    <a:rPr lang="en-US" dirty="0">
+                      <a:solidFill>
+                        <a:schemeClr val="tx1"/>
+                      </a:solidFill>
+                    </a:rPr>
+                    <a:t>7</a:t>
+                  </a:r>
+                </a:p>
+              </p:txBody>
+            </p:sp>
+            <p:sp>
+              <p:nvSpPr>
+                <p:cNvPr id="15" name="Rectangle 14">
+                  <a:extLst>
+                    <a:ext uri="{FF2B5EF4-FFF2-40B4-BE49-F238E27FC236}">
+                      <a16:creationId xmlns:a16="http://schemas.microsoft.com/office/drawing/2014/main" id="{1DE038FD-A9AA-D9E1-A1D5-95725C7BEEA5}"/>
+                    </a:ext>
+                  </a:extLst>
+                </p:cNvPr>
+                <p:cNvSpPr/>
+                <p:nvPr/>
+              </p:nvSpPr>
+              <p:spPr>
+                <a:xfrm>
+                  <a:off x="8646160" y="4104640"/>
+                  <a:ext cx="528320" cy="528320"/>
+                </a:xfrm>
+                <a:prstGeom prst="rect">
+                  <a:avLst/>
+                </a:prstGeom>
+                <a:solidFill>
+                  <a:schemeClr val="bg1"/>
+                </a:solidFill>
+              </p:spPr>
+              <p:style>
+                <a:lnRef idx="2">
+                  <a:schemeClr val="accent1">
+                    <a:shade val="15000"/>
+                  </a:schemeClr>
+                </a:lnRef>
+                <a:fillRef idx="1">
+                  <a:schemeClr val="accent1"/>
+                </a:fillRef>
+                <a:effectRef idx="0">
+                  <a:schemeClr val="accent1"/>
+                </a:effectRef>
+                <a:fontRef idx="minor">
+                  <a:schemeClr val="lt1"/>
+                </a:fontRef>
+              </p:style>
+              <p:txBody>
+                <a:bodyPr rtlCol="0" anchor="ctr"/>
+                <a:lstStyle/>
+                <a:p>
+                  <a:pPr algn="ctr"/>
+                  <a:endParaRPr lang="en-US"/>
+                </a:p>
+              </p:txBody>
+            </p:sp>
+          </p:grpSp>
+          <p:grpSp>
+            <p:nvGrpSpPr>
+              <p:cNvPr id="16" name="Group 15">
+                <a:extLst>
+                  <a:ext uri="{FF2B5EF4-FFF2-40B4-BE49-F238E27FC236}">
+                    <a16:creationId xmlns:a16="http://schemas.microsoft.com/office/drawing/2014/main" id="{7DA111CA-6B8C-359A-673A-7D5DE0F70DA5}"/>
+                  </a:ext>
+                </a:extLst>
+              </p:cNvPr>
+              <p:cNvGrpSpPr/>
+              <p:nvPr/>
+            </p:nvGrpSpPr>
+            <p:grpSpPr>
+              <a:xfrm>
+                <a:off x="2727960" y="1554957"/>
+                <a:ext cx="1056640" cy="528320"/>
+                <a:chOff x="8117840" y="4104640"/>
+                <a:chExt cx="1056640" cy="528320"/>
+              </a:xfrm>
+            </p:grpSpPr>
+            <p:sp>
+              <p:nvSpPr>
+                <p:cNvPr id="17" name="Rectangle 16">
+                  <a:extLst>
+                    <a:ext uri="{FF2B5EF4-FFF2-40B4-BE49-F238E27FC236}">
+                      <a16:creationId xmlns:a16="http://schemas.microsoft.com/office/drawing/2014/main" id="{57E8C63A-82D6-CC85-3709-0E2E37F557D0}"/>
+                    </a:ext>
+                  </a:extLst>
+                </p:cNvPr>
+                <p:cNvSpPr/>
+                <p:nvPr/>
+              </p:nvSpPr>
+              <p:spPr>
+                <a:xfrm>
+                  <a:off x="8117840" y="4104640"/>
+                  <a:ext cx="528320" cy="528320"/>
+                </a:xfrm>
+                <a:prstGeom prst="rect">
+                  <a:avLst/>
+                </a:prstGeom>
+                <a:solidFill>
+                  <a:schemeClr val="accent4">
+                    <a:lumMod val="40000"/>
+                    <a:lumOff val="60000"/>
+                  </a:schemeClr>
+                </a:solidFill>
+              </p:spPr>
+              <p:style>
+                <a:lnRef idx="2">
+                  <a:schemeClr val="accent1">
+                    <a:shade val="15000"/>
+                  </a:schemeClr>
+                </a:lnRef>
+                <a:fillRef idx="1">
+                  <a:schemeClr val="accent1"/>
+                </a:fillRef>
+                <a:effectRef idx="0">
+                  <a:schemeClr val="accent1"/>
+                </a:effectRef>
+                <a:fontRef idx="minor">
+                  <a:schemeClr val="lt1"/>
+                </a:fontRef>
+              </p:style>
+              <p:txBody>
+                <a:bodyPr rtlCol="0" anchor="ctr"/>
+                <a:lstStyle/>
+                <a:p>
+                  <a:pPr algn="ctr"/>
+                  <a:r>
+                    <a:rPr lang="en-US" dirty="0">
+                      <a:solidFill>
+                        <a:schemeClr val="tx1"/>
+                      </a:solidFill>
+                    </a:rPr>
+                    <a:t>5</a:t>
+                  </a:r>
+                </a:p>
+              </p:txBody>
+            </p:sp>
+            <p:sp>
+              <p:nvSpPr>
+                <p:cNvPr id="18" name="Rectangle 17">
+                  <a:extLst>
+                    <a:ext uri="{FF2B5EF4-FFF2-40B4-BE49-F238E27FC236}">
+                      <a16:creationId xmlns:a16="http://schemas.microsoft.com/office/drawing/2014/main" id="{3B8F20F7-7B97-9FD1-C14A-D4CD9FE6D9C2}"/>
+                    </a:ext>
+                  </a:extLst>
+                </p:cNvPr>
+                <p:cNvSpPr/>
+                <p:nvPr/>
+              </p:nvSpPr>
+              <p:spPr>
+                <a:xfrm>
+                  <a:off x="8646160" y="4104640"/>
+                  <a:ext cx="528320" cy="528320"/>
+                </a:xfrm>
+                <a:prstGeom prst="rect">
+                  <a:avLst/>
+                </a:prstGeom>
+                <a:solidFill>
+                  <a:schemeClr val="bg1"/>
+                </a:solidFill>
+              </p:spPr>
+              <p:style>
+                <a:lnRef idx="2">
+                  <a:schemeClr val="accent1">
+                    <a:shade val="15000"/>
+                  </a:schemeClr>
+                </a:lnRef>
+                <a:fillRef idx="1">
+                  <a:schemeClr val="accent1"/>
+                </a:fillRef>
+                <a:effectRef idx="0">
+                  <a:schemeClr val="accent1"/>
+                </a:effectRef>
+                <a:fontRef idx="minor">
+                  <a:schemeClr val="lt1"/>
+                </a:fontRef>
+              </p:style>
+              <p:txBody>
+                <a:bodyPr rtlCol="0" anchor="ctr"/>
+                <a:lstStyle/>
+                <a:p>
+                  <a:pPr algn="ctr"/>
+                  <a:endParaRPr lang="en-US"/>
+                </a:p>
+              </p:txBody>
+            </p:sp>
+          </p:grpSp>
+          <p:cxnSp>
+            <p:nvCxnSpPr>
+              <p:cNvPr id="20" name="Straight Arrow Connector 19">
+                <a:extLst>
+                  <a:ext uri="{FF2B5EF4-FFF2-40B4-BE49-F238E27FC236}">
+                    <a16:creationId xmlns:a16="http://schemas.microsoft.com/office/drawing/2014/main" id="{ADAB37D0-E4BC-0B87-3E32-3F87021568CC}"/>
+                  </a:ext>
+                </a:extLst>
+              </p:cNvPr>
+              <p:cNvCxnSpPr>
+                <a:cxnSpLocks/>
+                <a:endCxn id="4" idx="1"/>
+              </p:cNvCxnSpPr>
+              <p:nvPr/>
+            </p:nvCxnSpPr>
+            <p:spPr>
+              <a:xfrm>
+                <a:off x="3520440" y="1819117"/>
+                <a:ext cx="533400" cy="0"/>
+              </a:xfrm>
+              <a:prstGeom prst="straightConnector1">
+                <a:avLst/>
+              </a:prstGeom>
+              <a:ln w="57150">
+                <a:solidFill>
+                  <a:srgbClr val="FF0000"/>
+                </a:solidFill>
+                <a:tailEnd type="triangle"/>
+              </a:ln>
+            </p:spPr>
+            <p:style>
+              <a:lnRef idx="1">
+                <a:schemeClr val="accent1"/>
+              </a:lnRef>
+              <a:fillRef idx="0">
+                <a:schemeClr val="accent1"/>
+              </a:fillRef>
+              <a:effectRef idx="0">
+                <a:schemeClr val="accent1"/>
+              </a:effectRef>
+              <a:fontRef idx="minor">
+                <a:schemeClr val="tx1"/>
+              </a:fontRef>
+            </p:style>
+          </p:cxnSp>
+          <p:cxnSp>
+            <p:nvCxnSpPr>
+              <p:cNvPr id="21" name="Straight Arrow Connector 20">
+                <a:extLst>
+                  <a:ext uri="{FF2B5EF4-FFF2-40B4-BE49-F238E27FC236}">
+                    <a16:creationId xmlns:a16="http://schemas.microsoft.com/office/drawing/2014/main" id="{6080BD9A-B13C-50BF-A4D8-47758C79AC32}"/>
+                  </a:ext>
+                </a:extLst>
+              </p:cNvPr>
+              <p:cNvCxnSpPr>
+                <a:cxnSpLocks/>
+                <a:endCxn id="8" idx="1"/>
+              </p:cNvCxnSpPr>
+              <p:nvPr/>
+            </p:nvCxnSpPr>
+            <p:spPr>
+              <a:xfrm>
+                <a:off x="4846320" y="1819117"/>
+                <a:ext cx="528320" cy="0"/>
+              </a:xfrm>
+              <a:prstGeom prst="straightConnector1">
+                <a:avLst/>
+              </a:prstGeom>
+              <a:ln w="57150">
+                <a:solidFill>
+                  <a:srgbClr val="FF0000"/>
+                </a:solidFill>
+                <a:tailEnd type="triangle"/>
+              </a:ln>
+            </p:spPr>
+            <p:style>
+              <a:lnRef idx="1">
+                <a:schemeClr val="accent1"/>
+              </a:lnRef>
+              <a:fillRef idx="0">
+                <a:schemeClr val="accent1"/>
+              </a:fillRef>
+              <a:effectRef idx="0">
+                <a:schemeClr val="accent1"/>
+              </a:effectRef>
+              <a:fontRef idx="minor">
+                <a:schemeClr val="tx1"/>
+              </a:fontRef>
+            </p:style>
+          </p:cxnSp>
+          <p:cxnSp>
+            <p:nvCxnSpPr>
+              <p:cNvPr id="25" name="Straight Arrow Connector 24">
+                <a:extLst>
+                  <a:ext uri="{FF2B5EF4-FFF2-40B4-BE49-F238E27FC236}">
+                    <a16:creationId xmlns:a16="http://schemas.microsoft.com/office/drawing/2014/main" id="{A59202CE-9F90-F4A7-20C4-388EBA71AF5A}"/>
+                  </a:ext>
+                </a:extLst>
+              </p:cNvPr>
+              <p:cNvCxnSpPr>
+                <a:cxnSpLocks/>
+                <a:endCxn id="11" idx="1"/>
+              </p:cNvCxnSpPr>
+              <p:nvPr/>
+            </p:nvCxnSpPr>
+            <p:spPr>
+              <a:xfrm>
+                <a:off x="6167120" y="1819117"/>
+                <a:ext cx="533400" cy="0"/>
+              </a:xfrm>
+              <a:prstGeom prst="straightConnector1">
+                <a:avLst/>
+              </a:prstGeom>
+              <a:ln w="57150">
+                <a:solidFill>
+                  <a:srgbClr val="FF0000"/>
+                </a:solidFill>
+                <a:tailEnd type="triangle"/>
+              </a:ln>
+            </p:spPr>
+            <p:style>
+              <a:lnRef idx="1">
+                <a:schemeClr val="accent1"/>
+              </a:lnRef>
+              <a:fillRef idx="0">
+                <a:schemeClr val="accent1"/>
+              </a:fillRef>
+              <a:effectRef idx="0">
+                <a:schemeClr val="accent1"/>
+              </a:effectRef>
+              <a:fontRef idx="minor">
+                <a:schemeClr val="tx1"/>
+              </a:fontRef>
+            </p:style>
+          </p:cxnSp>
+          <p:cxnSp>
+            <p:nvCxnSpPr>
+              <p:cNvPr id="28" name="Straight Arrow Connector 27">
+                <a:extLst>
+                  <a:ext uri="{FF2B5EF4-FFF2-40B4-BE49-F238E27FC236}">
+                    <a16:creationId xmlns:a16="http://schemas.microsoft.com/office/drawing/2014/main" id="{D82F20BE-DCF4-D7DF-70AA-D308F3FB3C0A}"/>
+                  </a:ext>
+                </a:extLst>
+              </p:cNvPr>
+              <p:cNvCxnSpPr>
+                <a:cxnSpLocks/>
+                <a:endCxn id="14" idx="1"/>
+              </p:cNvCxnSpPr>
+              <p:nvPr/>
+            </p:nvCxnSpPr>
+            <p:spPr>
+              <a:xfrm>
+                <a:off x="7493000" y="1819117"/>
+                <a:ext cx="528320" cy="0"/>
+              </a:xfrm>
+              <a:prstGeom prst="straightConnector1">
+                <a:avLst/>
+              </a:prstGeom>
+              <a:ln w="57150">
+                <a:solidFill>
+                  <a:srgbClr val="FF0000"/>
+                </a:solidFill>
+                <a:tailEnd type="triangle"/>
+              </a:ln>
+            </p:spPr>
+            <p:style>
+              <a:lnRef idx="1">
+                <a:schemeClr val="accent1"/>
+              </a:lnRef>
+              <a:fillRef idx="0">
+                <a:schemeClr val="accent1"/>
+              </a:fillRef>
+              <a:effectRef idx="0">
+                <a:schemeClr val="accent1"/>
+              </a:effectRef>
+              <a:fontRef idx="minor">
+                <a:schemeClr val="tx1"/>
+              </a:fontRef>
+            </p:style>
+          </p:cxnSp>
+        </p:grpSp>
+        <p:sp>
+          <p:nvSpPr>
+            <p:cNvPr id="32" name="Rectangle 31">
+              <a:extLst>
+                <a:ext uri="{FF2B5EF4-FFF2-40B4-BE49-F238E27FC236}">
+                  <a16:creationId xmlns:a16="http://schemas.microsoft.com/office/drawing/2014/main" id="{71097677-82C3-534D-F0DA-F71F927E9535}"/>
+                </a:ext>
+              </a:extLst>
+            </p:cNvPr>
+            <p:cNvSpPr/>
+            <p:nvPr/>
+          </p:nvSpPr>
+          <p:spPr>
+            <a:xfrm>
+              <a:off x="838200" y="1554957"/>
+              <a:ext cx="949960" cy="528320"/>
+            </a:xfrm>
+            <a:prstGeom prst="rect">
+              <a:avLst/>
+            </a:prstGeom>
+            <a:solidFill>
+              <a:schemeClr val="accent5">
+                <a:lumMod val="60000"/>
+                <a:lumOff val="40000"/>
+              </a:schemeClr>
+            </a:solidFill>
+          </p:spPr>
+          <p:style>
+            <a:lnRef idx="2">
+              <a:schemeClr val="accent1">
+                <a:shade val="15000"/>
+              </a:schemeClr>
+            </a:lnRef>
+            <a:fillRef idx="1">
+              <a:schemeClr val="accent1"/>
+            </a:fillRef>
+            <a:effectRef idx="0">
+              <a:schemeClr val="accent1"/>
+            </a:effectRef>
+            <a:fontRef idx="minor">
+              <a:schemeClr val="lt1"/>
+            </a:fontRef>
+          </p:style>
+          <p:txBody>
+            <a:bodyPr rtlCol="0" anchor="ctr"/>
+            <a:lstStyle/>
+            <a:p>
+              <a:pPr algn="ctr"/>
+              <a:r>
+                <a:rPr lang="en-US" dirty="0">
+                  <a:solidFill>
+                    <a:schemeClr val="tx1"/>
+                  </a:solidFill>
+                </a:rPr>
+                <a:t>front</a:t>
+              </a:r>
+            </a:p>
+          </p:txBody>
+        </p:sp>
+        <p:cxnSp>
+          <p:nvCxnSpPr>
+            <p:cNvPr id="33" name="Straight Arrow Connector 32">
+              <a:extLst>
+                <a:ext uri="{FF2B5EF4-FFF2-40B4-BE49-F238E27FC236}">
+                  <a16:creationId xmlns:a16="http://schemas.microsoft.com/office/drawing/2014/main" id="{DFA11222-D8D6-01E9-FB88-B45F69E27FD3}"/>
+                </a:ext>
+              </a:extLst>
+            </p:cNvPr>
+            <p:cNvCxnSpPr>
+              <a:cxnSpLocks/>
+              <a:stCxn id="32" idx="3"/>
+              <a:endCxn id="17" idx="1"/>
+            </p:cNvCxnSpPr>
+            <p:nvPr/>
+          </p:nvCxnSpPr>
+          <p:spPr>
+            <a:xfrm>
+              <a:off x="1788160" y="1819117"/>
+              <a:ext cx="939800" cy="0"/>
+            </a:xfrm>
+            <a:prstGeom prst="straightConnector1">
+              <a:avLst/>
+            </a:prstGeom>
+            <a:ln w="57150">
+              <a:solidFill>
+                <a:srgbClr val="FF0000"/>
+              </a:solidFill>
+              <a:tailEnd type="triangle"/>
+            </a:ln>
+          </p:spPr>
+          <p:style>
+            <a:lnRef idx="1">
+              <a:schemeClr val="accent1"/>
+            </a:lnRef>
+            <a:fillRef idx="0">
+              <a:schemeClr val="accent1"/>
+            </a:fillRef>
+            <a:effectRef idx="0">
+              <a:schemeClr val="accent1"/>
+            </a:effectRef>
+            <a:fontRef idx="minor">
+              <a:schemeClr val="tx1"/>
+            </a:fontRef>
+          </p:style>
+        </p:cxnSp>
+        <p:sp>
+          <p:nvSpPr>
+            <p:cNvPr id="37" name="Rectangle 36">
+              <a:extLst>
+                <a:ext uri="{FF2B5EF4-FFF2-40B4-BE49-F238E27FC236}">
+                  <a16:creationId xmlns:a16="http://schemas.microsoft.com/office/drawing/2014/main" id="{73EED586-69E7-D3F5-2880-C2F533716668}"/>
+                </a:ext>
+              </a:extLst>
+            </p:cNvPr>
+            <p:cNvSpPr/>
+            <p:nvPr/>
+          </p:nvSpPr>
+          <p:spPr>
+            <a:xfrm>
+              <a:off x="7810500" y="2744789"/>
+              <a:ext cx="949960" cy="528320"/>
+            </a:xfrm>
+            <a:prstGeom prst="rect">
+              <a:avLst/>
+            </a:prstGeom>
+            <a:solidFill>
+              <a:srgbClr val="FFC000"/>
+            </a:solidFill>
+          </p:spPr>
+          <p:style>
+            <a:lnRef idx="2">
+              <a:schemeClr val="accent1">
+                <a:shade val="15000"/>
+              </a:schemeClr>
+            </a:lnRef>
+            <a:fillRef idx="1">
+              <a:schemeClr val="accent1"/>
+            </a:fillRef>
+            <a:effectRef idx="0">
+              <a:schemeClr val="accent1"/>
+            </a:effectRef>
+            <a:fontRef idx="minor">
+              <a:schemeClr val="lt1"/>
+            </a:fontRef>
+          </p:style>
+          <p:txBody>
+            <a:bodyPr rtlCol="0" anchor="ctr"/>
+            <a:lstStyle/>
+            <a:p>
+              <a:pPr algn="ctr"/>
+              <a:r>
+                <a:rPr lang="en-US" dirty="0">
+                  <a:solidFill>
+                    <a:schemeClr val="tx1"/>
+                  </a:solidFill>
+                </a:rPr>
+                <a:t>back</a:t>
+              </a:r>
+            </a:p>
+          </p:txBody>
+        </p:sp>
+        <p:cxnSp>
+          <p:nvCxnSpPr>
+            <p:cNvPr id="38" name="Straight Arrow Connector 37">
+              <a:extLst>
+                <a:ext uri="{FF2B5EF4-FFF2-40B4-BE49-F238E27FC236}">
+                  <a16:creationId xmlns:a16="http://schemas.microsoft.com/office/drawing/2014/main" id="{4015BFBB-A85A-F4E1-2263-4CC9757E5464}"/>
+                </a:ext>
+              </a:extLst>
+            </p:cNvPr>
+            <p:cNvCxnSpPr>
+              <a:cxnSpLocks/>
+              <a:stCxn id="37" idx="0"/>
+              <a:endCxn id="14" idx="2"/>
+            </p:cNvCxnSpPr>
+            <p:nvPr/>
+          </p:nvCxnSpPr>
+          <p:spPr>
+            <a:xfrm flipV="1">
+              <a:off x="8285480" y="2083277"/>
+              <a:ext cx="0" cy="661512"/>
+            </a:xfrm>
+            <a:prstGeom prst="straightConnector1">
+              <a:avLst/>
+            </a:prstGeom>
+            <a:ln w="57150">
+              <a:solidFill>
+                <a:srgbClr val="FF0000"/>
+              </a:solidFill>
+              <a:tailEnd type="triangle"/>
+            </a:ln>
+          </p:spPr>
+          <p:style>
+            <a:lnRef idx="1">
+              <a:schemeClr val="accent1"/>
+            </a:lnRef>
+            <a:fillRef idx="0">
+              <a:schemeClr val="accent1"/>
+            </a:fillRef>
+            <a:effectRef idx="0">
+              <a:schemeClr val="accent1"/>
+            </a:effectRef>
+            <a:fontRef idx="minor">
+              <a:schemeClr val="tx1"/>
+            </a:fontRef>
+          </p:style>
+        </p:cxnSp>
+      </p:grpSp>
+      <mc:AlternateContent xmlns:mc="http://schemas.openxmlformats.org/markup-compatibility/2006">
+        <mc:Choice xmlns:p14="http://schemas.microsoft.com/office/powerpoint/2010/main" Requires="p14">
+          <p:contentPart p14:bwMode="auto" r:id="rId2">
+            <p14:nvContentPartPr>
+              <p14:cNvPr id="22" name="Ink 21">
+                <a:extLst>
+                  <a:ext uri="{FF2B5EF4-FFF2-40B4-BE49-F238E27FC236}">
+                    <a16:creationId xmlns:a16="http://schemas.microsoft.com/office/drawing/2014/main" id="{CE3CE699-95B9-8080-9C83-747F542A35E5}"/>
+                  </a:ext>
+                </a:extLst>
+              </p14:cNvPr>
+              <p14:cNvContentPartPr/>
+              <p14:nvPr/>
+            </p14:nvContentPartPr>
+            <p14:xfrm>
+              <a:off x="688320" y="1050120"/>
+              <a:ext cx="8422200" cy="2464920"/>
+            </p14:xfrm>
+          </p:contentPart>
+        </mc:Choice>
+        <mc:Fallback>
+          <p:pic>
+            <p:nvPicPr>
+              <p:cNvPr id="22" name="Ink 21">
+                <a:extLst>
+                  <a:ext uri="{FF2B5EF4-FFF2-40B4-BE49-F238E27FC236}">
+                    <a16:creationId xmlns:a16="http://schemas.microsoft.com/office/drawing/2014/main" id="{CE3CE699-95B9-8080-9C83-747F542A35E5}"/>
+                  </a:ext>
+                </a:extLst>
+              </p:cNvPr>
+              <p:cNvPicPr/>
+              <p:nvPr/>
+            </p:nvPicPr>
+            <p:blipFill>
+              <a:blip r:embed="rId3"/>
+              <a:stretch>
+                <a:fillRect/>
+              </a:stretch>
+            </p:blipFill>
+            <p:spPr>
+              <a:xfrm>
+                <a:off x="678960" y="1040760"/>
+                <a:ext cx="8440920" cy="2483640"/>
+              </a:xfrm>
+              <a:prstGeom prst="rect">
+                <a:avLst/>
+              </a:prstGeom>
+            </p:spPr>
+          </p:pic>
+        </mc:Fallback>
+      </mc:AlternateContent>
+    </p:spTree>
+    <p:extLst>
+      <p:ext uri="{BB962C8B-B14F-4D97-AF65-F5344CB8AC3E}">
+        <p14:creationId xmlns:p14="http://schemas.microsoft.com/office/powerpoint/2010/main" val="2054228554"/>
+      </p:ext>
+    </p:extLst>
+  </p:cSld>
+  <p:clrMapOvr>
+    <a:masterClrMapping/>
+  </p:clrMapOvr>
+</p:sld>
+</file>
+
+<file path=ppt/slides/slide5.xml><?xml version="1.0" encoding="utf-8"?>
 <p:sld xmlns:a="http://schemas.openxmlformats.org/drawingml/2006/main" xmlns:r="http://schemas.openxmlformats.org/officeDocument/2006/relationships" xmlns:p="http://schemas.openxmlformats.org/presentationml/2006/main">
   <p:cSld>
     <p:spTree>
@@ -20448,10 +24095,61 @@
           </a:p>
         </p:txBody>
       </p:sp>
+      <mc:AlternateContent xmlns:mc="http://schemas.openxmlformats.org/markup-compatibility/2006">
+        <mc:Choice xmlns:p14="http://schemas.microsoft.com/office/powerpoint/2010/main" Requires="p14">
+          <p:contentPart p14:bwMode="auto" r:id="rId2">
+            <p14:nvContentPartPr>
+              <p14:cNvPr id="22" name="Ink 21">
+                <a:extLst>
+                  <a:ext uri="{FF2B5EF4-FFF2-40B4-BE49-F238E27FC236}">
+                    <a16:creationId xmlns:a16="http://schemas.microsoft.com/office/drawing/2014/main" id="{5958B5F0-082B-3B55-225C-99C762617E30}"/>
+                  </a:ext>
+                </a:extLst>
+              </p14:cNvPr>
+              <p14:cNvContentPartPr/>
+              <p14:nvPr/>
+            </p14:nvContentPartPr>
+            <p14:xfrm>
+              <a:off x="3846960" y="4264920"/>
+              <a:ext cx="4237200" cy="1136160"/>
+            </p14:xfrm>
+          </p:contentPart>
+        </mc:Choice>
+        <mc:Fallback>
+          <p:pic>
+            <p:nvPicPr>
+              <p:cNvPr id="22" name="Ink 21">
+                <a:extLst>
+                  <a:ext uri="{FF2B5EF4-FFF2-40B4-BE49-F238E27FC236}">
+                    <a16:creationId xmlns:a16="http://schemas.microsoft.com/office/drawing/2014/main" id="{5958B5F0-082B-3B55-225C-99C762617E30}"/>
+                  </a:ext>
+                </a:extLst>
+              </p:cNvPr>
+              <p:cNvPicPr/>
+              <p:nvPr/>
+            </p:nvPicPr>
+            <p:blipFill>
+              <a:blip r:embed="rId3"/>
+              <a:stretch>
+                <a:fillRect/>
+              </a:stretch>
+            </p:blipFill>
+            <p:spPr>
+              <a:xfrm>
+                <a:off x="3837600" y="4255560"/>
+                <a:ext cx="4255920" cy="1154880"/>
+              </a:xfrm>
+              <a:prstGeom prst="rect">
+                <a:avLst/>
+              </a:prstGeom>
+            </p:spPr>
+          </p:pic>
+        </mc:Fallback>
+      </mc:AlternateContent>
     </p:spTree>
     <p:extLst>
       <p:ext uri="{BB962C8B-B14F-4D97-AF65-F5344CB8AC3E}">
-        <p14:creationId xmlns:p14="http://schemas.microsoft.com/office/powerpoint/2010/main" val="2494074382"/>
+        <p14:creationId xmlns:p14="http://schemas.microsoft.com/office/powerpoint/2010/main" val="4175234548"/>
       </p:ext>
     </p:extLst>
   </p:cSld>
@@ -20461,1446 +24159,7 @@
 </p:sld>
 </file>
 
-<file path=ppt/slides/slide30.xml><?xml version="1.0" encoding="utf-8"?>
-<p:sld xmlns:a="http://schemas.openxmlformats.org/drawingml/2006/main" xmlns:r="http://schemas.openxmlformats.org/officeDocument/2006/relationships" xmlns:p="http://schemas.openxmlformats.org/presentationml/2006/main">
-  <p:cSld>
-    <p:spTree>
-      <p:nvGrpSpPr>
-        <p:cNvPr id="1" name=""/>
-        <p:cNvGrpSpPr/>
-        <p:nvPr/>
-      </p:nvGrpSpPr>
-      <p:grpSpPr>
-        <a:xfrm>
-          <a:off x="0" y="0"/>
-          <a:ext cx="0" cy="0"/>
-          <a:chOff x="0" y="0"/>
-          <a:chExt cx="0" cy="0"/>
-        </a:xfrm>
-      </p:grpSpPr>
-      <p:sp>
-        <p:nvSpPr>
-          <p:cNvPr id="14" name="Content Placeholder 2">
-            <a:extLst>
-              <a:ext uri="{FF2B5EF4-FFF2-40B4-BE49-F238E27FC236}">
-                <a16:creationId xmlns:a16="http://schemas.microsoft.com/office/drawing/2014/main" id="{959D7957-B208-5E47-448C-922F4E81772F}"/>
-              </a:ext>
-            </a:extLst>
-          </p:cNvPr>
-          <p:cNvSpPr>
-            <a:spLocks noGrp="1"/>
-          </p:cNvSpPr>
-          <p:nvPr>
-            <p:ph sz="half" idx="1"/>
-          </p:nvPr>
-        </p:nvSpPr>
-        <p:spPr>
-          <a:xfrm>
-            <a:off x="349135" y="1825625"/>
-            <a:ext cx="5670665" cy="4667250"/>
-          </a:xfrm>
-        </p:spPr>
-        <p:txBody>
-          <a:bodyPr>
-            <a:normAutofit/>
-          </a:bodyPr>
-          <a:lstStyle/>
-          <a:p>
-            <a:pPr marL="0" indent="0">
-              <a:buNone/>
-            </a:pPr>
-            <a:r>
-              <a:rPr lang="en-US" sz="1600" dirty="0">
-                <a:solidFill>
-                  <a:srgbClr val="0000FF"/>
-                </a:solidFill>
-                <a:highlight>
-                  <a:srgbClr val="FFFFFF"/>
-                </a:highlight>
-                <a:latin typeface="Consolas" panose="020B0609020204030204" pitchFamily="49" charset="0"/>
-              </a:rPr>
-              <a:t>public</a:t>
-            </a:r>
-            <a:r>
-              <a:rPr lang="en-US" sz="1600" dirty="0">
-                <a:solidFill>
-                  <a:srgbClr val="000000"/>
-                </a:solidFill>
-                <a:highlight>
-                  <a:srgbClr val="FFFFFF"/>
-                </a:highlight>
-                <a:latin typeface="Consolas" panose="020B0609020204030204" pitchFamily="49" charset="0"/>
-              </a:rPr>
-              <a:t> </a:t>
-            </a:r>
-            <a:r>
-              <a:rPr lang="en-US" sz="1600" dirty="0">
-                <a:solidFill>
-                  <a:srgbClr val="0000FF"/>
-                </a:solidFill>
-                <a:highlight>
-                  <a:srgbClr val="FFFFFF"/>
-                </a:highlight>
-                <a:latin typeface="Consolas" panose="020B0609020204030204" pitchFamily="49" charset="0"/>
-              </a:rPr>
-              <a:t>void</a:t>
-            </a:r>
-            <a:r>
-              <a:rPr lang="en-US" sz="1600" dirty="0">
-                <a:solidFill>
-                  <a:srgbClr val="000000"/>
-                </a:solidFill>
-                <a:highlight>
-                  <a:srgbClr val="FFFFFF"/>
-                </a:highlight>
-                <a:latin typeface="Consolas" panose="020B0609020204030204" pitchFamily="49" charset="0"/>
-              </a:rPr>
-              <a:t> add(</a:t>
-            </a:r>
-            <a:r>
-              <a:rPr lang="en-US" sz="1600" dirty="0">
-                <a:solidFill>
-                  <a:srgbClr val="0000FF"/>
-                </a:solidFill>
-                <a:highlight>
-                  <a:srgbClr val="FFFFFF"/>
-                </a:highlight>
-                <a:latin typeface="Consolas" panose="020B0609020204030204" pitchFamily="49" charset="0"/>
-              </a:rPr>
-              <a:t>int</a:t>
-            </a:r>
-            <a:r>
-              <a:rPr lang="en-US" sz="1600" dirty="0">
-                <a:solidFill>
-                  <a:srgbClr val="000000"/>
-                </a:solidFill>
-                <a:highlight>
-                  <a:srgbClr val="FFFFFF"/>
-                </a:highlight>
-                <a:latin typeface="Consolas" panose="020B0609020204030204" pitchFamily="49" charset="0"/>
-              </a:rPr>
-              <a:t> value){</a:t>
-            </a:r>
-          </a:p>
-          <a:p>
-            <a:pPr marL="0" indent="0">
-              <a:buNone/>
-            </a:pPr>
-            <a:r>
-              <a:rPr lang="en-US" sz="1600" dirty="0">
-                <a:solidFill>
-                  <a:srgbClr val="000000"/>
-                </a:solidFill>
-                <a:highlight>
-                  <a:srgbClr val="FFFFFF"/>
-                </a:highlight>
-                <a:latin typeface="Consolas" panose="020B0609020204030204" pitchFamily="49" charset="0"/>
-              </a:rPr>
-              <a:t>    </a:t>
-            </a:r>
-            <a:r>
-              <a:rPr lang="en-US" sz="1600" dirty="0">
-                <a:solidFill>
-                  <a:srgbClr val="0000FF"/>
-                </a:solidFill>
-                <a:highlight>
-                  <a:srgbClr val="FFFFFF"/>
-                </a:highlight>
-                <a:latin typeface="Consolas" panose="020B0609020204030204" pitchFamily="49" charset="0"/>
-              </a:rPr>
-              <a:t>if</a:t>
-            </a:r>
-            <a:r>
-              <a:rPr lang="en-US" sz="1600" dirty="0">
-                <a:solidFill>
-                  <a:srgbClr val="000000"/>
-                </a:solidFill>
-                <a:highlight>
-                  <a:srgbClr val="FFFFFF"/>
-                </a:highlight>
-                <a:latin typeface="Consolas" panose="020B0609020204030204" pitchFamily="49" charset="0"/>
-              </a:rPr>
-              <a:t>(</a:t>
-            </a:r>
-            <a:r>
-              <a:rPr lang="en-US" sz="1600" dirty="0" err="1">
-                <a:solidFill>
-                  <a:srgbClr val="000000"/>
-                </a:solidFill>
-                <a:highlight>
-                  <a:srgbClr val="FFFFFF"/>
-                </a:highlight>
-                <a:latin typeface="Consolas" panose="020B0609020204030204" pitchFamily="49" charset="0"/>
-              </a:rPr>
-              <a:t>data.length</a:t>
-            </a:r>
-            <a:r>
-              <a:rPr lang="en-US" sz="1600" dirty="0">
-                <a:solidFill>
-                  <a:srgbClr val="000000"/>
-                </a:solidFill>
-                <a:highlight>
-                  <a:srgbClr val="FFFFFF"/>
-                </a:highlight>
-                <a:latin typeface="Consolas" panose="020B0609020204030204" pitchFamily="49" charset="0"/>
-              </a:rPr>
-              <a:t> == size)</a:t>
-            </a:r>
-          </a:p>
-          <a:p>
-            <a:pPr marL="0" indent="0">
-              <a:buNone/>
-            </a:pPr>
-            <a:r>
-              <a:rPr lang="en-US" sz="1600" dirty="0">
-                <a:solidFill>
-                  <a:srgbClr val="000000"/>
-                </a:solidFill>
-                <a:highlight>
-                  <a:srgbClr val="FFFFFF"/>
-                </a:highlight>
-                <a:latin typeface="Consolas" panose="020B0609020204030204" pitchFamily="49" charset="0"/>
-              </a:rPr>
-              <a:t>        resize();</a:t>
-            </a:r>
-          </a:p>
-          <a:p>
-            <a:pPr marL="0" indent="0">
-              <a:buNone/>
-            </a:pPr>
-            <a:r>
-              <a:rPr lang="en-US" sz="1600" dirty="0">
-                <a:solidFill>
-                  <a:srgbClr val="000000"/>
-                </a:solidFill>
-                <a:highlight>
-                  <a:srgbClr val="FFFFFF"/>
-                </a:highlight>
-                <a:latin typeface="Consolas" panose="020B0609020204030204" pitchFamily="49" charset="0"/>
-              </a:rPr>
-              <a:t>    data[size] = value;</a:t>
-            </a:r>
-          </a:p>
-          <a:p>
-            <a:pPr marL="0" indent="0">
-              <a:buNone/>
-            </a:pPr>
-            <a:r>
-              <a:rPr lang="en-US" sz="1600" dirty="0">
-                <a:solidFill>
-                  <a:srgbClr val="000000"/>
-                </a:solidFill>
-                <a:highlight>
-                  <a:srgbClr val="FFFFFF"/>
-                </a:highlight>
-                <a:latin typeface="Consolas" panose="020B0609020204030204" pitchFamily="49" charset="0"/>
-              </a:rPr>
-              <a:t>    size++;</a:t>
-            </a:r>
-          </a:p>
-          <a:p>
-            <a:pPr marL="0" indent="0">
-              <a:buNone/>
-            </a:pPr>
-            <a:r>
-              <a:rPr lang="en-US" sz="1600" dirty="0">
-                <a:solidFill>
-                  <a:srgbClr val="000000"/>
-                </a:solidFill>
-                <a:highlight>
-                  <a:srgbClr val="FFFFFF"/>
-                </a:highlight>
-                <a:latin typeface="Consolas" panose="020B0609020204030204" pitchFamily="49" charset="0"/>
-              </a:rPr>
-              <a:t>}</a:t>
-            </a:r>
-            <a:endParaRPr lang="en-US" sz="1600" dirty="0">
-              <a:solidFill>
-                <a:srgbClr val="0000FF"/>
-              </a:solidFill>
-              <a:highlight>
-                <a:srgbClr val="FFFFFF"/>
-              </a:highlight>
-              <a:latin typeface="Consolas" panose="020B0609020204030204" pitchFamily="49" charset="0"/>
-            </a:endParaRPr>
-          </a:p>
-          <a:p>
-            <a:pPr marL="0" indent="0">
-              <a:buNone/>
-            </a:pPr>
-            <a:r>
-              <a:rPr lang="en-US" sz="1600" dirty="0">
-                <a:solidFill>
-                  <a:srgbClr val="0000FF"/>
-                </a:solidFill>
-                <a:highlight>
-                  <a:srgbClr val="FFFFFF"/>
-                </a:highlight>
-                <a:latin typeface="Consolas" panose="020B0609020204030204" pitchFamily="49" charset="0"/>
-              </a:rPr>
-              <a:t>private</a:t>
-            </a:r>
-            <a:r>
-              <a:rPr lang="en-US" sz="1600" dirty="0">
-                <a:solidFill>
-                  <a:srgbClr val="000000"/>
-                </a:solidFill>
-                <a:highlight>
-                  <a:srgbClr val="FFFFFF"/>
-                </a:highlight>
-                <a:latin typeface="Consolas" panose="020B0609020204030204" pitchFamily="49" charset="0"/>
-              </a:rPr>
-              <a:t> </a:t>
-            </a:r>
-            <a:r>
-              <a:rPr lang="en-US" sz="1600" dirty="0">
-                <a:solidFill>
-                  <a:srgbClr val="0000FF"/>
-                </a:solidFill>
-                <a:highlight>
-                  <a:srgbClr val="FFFFFF"/>
-                </a:highlight>
-                <a:latin typeface="Consolas" panose="020B0609020204030204" pitchFamily="49" charset="0"/>
-              </a:rPr>
-              <a:t>void</a:t>
-            </a:r>
-            <a:r>
-              <a:rPr lang="en-US" sz="1600" dirty="0">
-                <a:solidFill>
-                  <a:srgbClr val="000000"/>
-                </a:solidFill>
-                <a:highlight>
-                  <a:srgbClr val="FFFFFF"/>
-                </a:highlight>
-                <a:latin typeface="Consolas" panose="020B0609020204030204" pitchFamily="49" charset="0"/>
-              </a:rPr>
-              <a:t> resize(){</a:t>
-            </a:r>
-          </a:p>
-          <a:p>
-            <a:pPr marL="0" indent="0">
-              <a:buNone/>
-            </a:pPr>
-            <a:r>
-              <a:rPr lang="en-US" sz="1600" dirty="0">
-                <a:solidFill>
-                  <a:srgbClr val="000000"/>
-                </a:solidFill>
-                <a:highlight>
-                  <a:srgbClr val="FFFFFF"/>
-                </a:highlight>
-                <a:latin typeface="Consolas" panose="020B0609020204030204" pitchFamily="49" charset="0"/>
-              </a:rPr>
-              <a:t>    </a:t>
-            </a:r>
-            <a:r>
-              <a:rPr lang="en-US" sz="1600" dirty="0">
-                <a:solidFill>
-                  <a:srgbClr val="0000FF"/>
-                </a:solidFill>
-                <a:highlight>
-                  <a:srgbClr val="FFFFFF"/>
-                </a:highlight>
-                <a:latin typeface="Consolas" panose="020B0609020204030204" pitchFamily="49" charset="0"/>
-              </a:rPr>
-              <a:t>int</a:t>
-            </a:r>
-            <a:r>
-              <a:rPr lang="en-US" sz="1600" dirty="0">
-                <a:solidFill>
-                  <a:srgbClr val="000000"/>
-                </a:solidFill>
-                <a:highlight>
-                  <a:srgbClr val="FFFFFF"/>
-                </a:highlight>
-                <a:latin typeface="Consolas" panose="020B0609020204030204" pitchFamily="49" charset="0"/>
-              </a:rPr>
-              <a:t>[] </a:t>
-            </a:r>
-            <a:r>
-              <a:rPr lang="en-US" sz="1600" dirty="0" err="1">
-                <a:solidFill>
-                  <a:srgbClr val="000000"/>
-                </a:solidFill>
-                <a:highlight>
-                  <a:srgbClr val="FFFFFF"/>
-                </a:highlight>
-                <a:latin typeface="Consolas" panose="020B0609020204030204" pitchFamily="49" charset="0"/>
-              </a:rPr>
-              <a:t>oldData</a:t>
-            </a:r>
-            <a:r>
-              <a:rPr lang="en-US" sz="1600" dirty="0">
-                <a:solidFill>
-                  <a:srgbClr val="000000"/>
-                </a:solidFill>
-                <a:highlight>
-                  <a:srgbClr val="FFFFFF"/>
-                </a:highlight>
-                <a:latin typeface="Consolas" panose="020B0609020204030204" pitchFamily="49" charset="0"/>
-              </a:rPr>
-              <a:t> = data;</a:t>
-            </a:r>
-          </a:p>
-          <a:p>
-            <a:pPr marL="0" indent="0">
-              <a:buNone/>
-            </a:pPr>
-            <a:r>
-              <a:rPr lang="en-US" sz="1600" dirty="0">
-                <a:solidFill>
-                  <a:srgbClr val="000000"/>
-                </a:solidFill>
-                <a:highlight>
-                  <a:srgbClr val="FFFFFF"/>
-                </a:highlight>
-                <a:latin typeface="Consolas" panose="020B0609020204030204" pitchFamily="49" charset="0"/>
-              </a:rPr>
-              <a:t>    data = </a:t>
-            </a:r>
-            <a:r>
-              <a:rPr lang="en-US" sz="1600" dirty="0">
-                <a:solidFill>
-                  <a:srgbClr val="0000FF"/>
-                </a:solidFill>
-                <a:highlight>
-                  <a:srgbClr val="FFFFFF"/>
-                </a:highlight>
-                <a:latin typeface="Consolas" panose="020B0609020204030204" pitchFamily="49" charset="0"/>
-              </a:rPr>
-              <a:t>new int</a:t>
-            </a:r>
-            <a:r>
-              <a:rPr lang="en-US" sz="1600" dirty="0">
-                <a:solidFill>
-                  <a:srgbClr val="000000"/>
-                </a:solidFill>
-                <a:highlight>
-                  <a:srgbClr val="FFFFFF"/>
-                </a:highlight>
-                <a:latin typeface="Consolas" panose="020B0609020204030204" pitchFamily="49" charset="0"/>
-              </a:rPr>
-              <a:t>[</a:t>
-            </a:r>
-            <a:r>
-              <a:rPr lang="en-US" sz="1600" dirty="0" err="1">
-                <a:solidFill>
-                  <a:srgbClr val="000000"/>
-                </a:solidFill>
-                <a:highlight>
-                  <a:srgbClr val="FFFFFF"/>
-                </a:highlight>
-                <a:latin typeface="Consolas" panose="020B0609020204030204" pitchFamily="49" charset="0"/>
-              </a:rPr>
-              <a:t>data.length</a:t>
-            </a:r>
-            <a:r>
-              <a:rPr lang="en-US" sz="1600" dirty="0">
-                <a:solidFill>
-                  <a:srgbClr val="000000"/>
-                </a:solidFill>
-                <a:highlight>
-                  <a:srgbClr val="FFFFFF"/>
-                </a:highlight>
-                <a:latin typeface="Consolas" panose="020B0609020204030204" pitchFamily="49" charset="0"/>
-              </a:rPr>
-              <a:t>*</a:t>
-            </a:r>
-            <a:r>
-              <a:rPr lang="en-US" sz="1600" dirty="0">
-                <a:solidFill>
-                  <a:srgbClr val="098658"/>
-                </a:solidFill>
-                <a:highlight>
-                  <a:srgbClr val="FFFFFF"/>
-                </a:highlight>
-                <a:latin typeface="Consolas" panose="020B0609020204030204" pitchFamily="49" charset="0"/>
-              </a:rPr>
-              <a:t>2</a:t>
-            </a:r>
-            <a:r>
-              <a:rPr lang="en-US" sz="1600" dirty="0">
-                <a:solidFill>
-                  <a:srgbClr val="000000"/>
-                </a:solidFill>
-                <a:highlight>
-                  <a:srgbClr val="FFFFFF"/>
-                </a:highlight>
-                <a:latin typeface="Consolas" panose="020B0609020204030204" pitchFamily="49" charset="0"/>
-              </a:rPr>
-              <a:t>];</a:t>
-            </a:r>
-          </a:p>
-          <a:p>
-            <a:pPr marL="0" indent="0">
-              <a:buNone/>
-            </a:pPr>
-            <a:r>
-              <a:rPr lang="en-US" sz="1600" dirty="0">
-                <a:solidFill>
-                  <a:srgbClr val="000000"/>
-                </a:solidFill>
-                <a:highlight>
-                  <a:srgbClr val="FFFFFF"/>
-                </a:highlight>
-                <a:latin typeface="Consolas" panose="020B0609020204030204" pitchFamily="49" charset="0"/>
-              </a:rPr>
-              <a:t>    </a:t>
-            </a:r>
-            <a:r>
-              <a:rPr lang="en-US" sz="1600" dirty="0">
-                <a:solidFill>
-                  <a:srgbClr val="0000FF"/>
-                </a:solidFill>
-                <a:highlight>
-                  <a:srgbClr val="FFFFFF"/>
-                </a:highlight>
-                <a:latin typeface="Consolas" panose="020B0609020204030204" pitchFamily="49" charset="0"/>
-              </a:rPr>
-              <a:t>for</a:t>
-            </a:r>
-            <a:r>
-              <a:rPr lang="en-US" sz="1600" dirty="0">
-                <a:solidFill>
-                  <a:srgbClr val="000000"/>
-                </a:solidFill>
-                <a:highlight>
-                  <a:srgbClr val="FFFFFF"/>
-                </a:highlight>
-                <a:latin typeface="Consolas" panose="020B0609020204030204" pitchFamily="49" charset="0"/>
-              </a:rPr>
-              <a:t>(</a:t>
-            </a:r>
-            <a:r>
-              <a:rPr lang="en-US" sz="1600" dirty="0">
-                <a:solidFill>
-                  <a:srgbClr val="0000FF"/>
-                </a:solidFill>
-                <a:highlight>
-                  <a:srgbClr val="FFFFFF"/>
-                </a:highlight>
-                <a:latin typeface="Consolas" panose="020B0609020204030204" pitchFamily="49" charset="0"/>
-              </a:rPr>
-              <a:t>int</a:t>
-            </a:r>
-            <a:r>
-              <a:rPr lang="en-US" sz="1600" dirty="0">
-                <a:solidFill>
-                  <a:srgbClr val="000000"/>
-                </a:solidFill>
-                <a:highlight>
-                  <a:srgbClr val="FFFFFF"/>
-                </a:highlight>
-                <a:latin typeface="Consolas" panose="020B0609020204030204" pitchFamily="49" charset="0"/>
-              </a:rPr>
-              <a:t> </a:t>
-            </a:r>
-            <a:r>
-              <a:rPr lang="en-US" sz="1600" dirty="0" err="1">
-                <a:solidFill>
-                  <a:srgbClr val="000000"/>
-                </a:solidFill>
-                <a:highlight>
-                  <a:srgbClr val="FFFFFF"/>
-                </a:highlight>
-                <a:latin typeface="Consolas" panose="020B0609020204030204" pitchFamily="49" charset="0"/>
-              </a:rPr>
-              <a:t>i</a:t>
-            </a:r>
-            <a:r>
-              <a:rPr lang="en-US" sz="1600" dirty="0">
-                <a:solidFill>
-                  <a:srgbClr val="000000"/>
-                </a:solidFill>
-                <a:highlight>
-                  <a:srgbClr val="FFFFFF"/>
-                </a:highlight>
-                <a:latin typeface="Consolas" panose="020B0609020204030204" pitchFamily="49" charset="0"/>
-              </a:rPr>
-              <a:t> = </a:t>
-            </a:r>
-            <a:r>
-              <a:rPr lang="en-US" sz="1600" dirty="0">
-                <a:solidFill>
-                  <a:srgbClr val="098658"/>
-                </a:solidFill>
-                <a:highlight>
-                  <a:srgbClr val="FFFFFF"/>
-                </a:highlight>
-                <a:latin typeface="Consolas" panose="020B0609020204030204" pitchFamily="49" charset="0"/>
-              </a:rPr>
-              <a:t>0</a:t>
-            </a:r>
-            <a:r>
-              <a:rPr lang="en-US" sz="1600" dirty="0">
-                <a:solidFill>
-                  <a:srgbClr val="000000"/>
-                </a:solidFill>
-                <a:highlight>
-                  <a:srgbClr val="FFFFFF"/>
-                </a:highlight>
-                <a:latin typeface="Consolas" panose="020B0609020204030204" pitchFamily="49" charset="0"/>
-              </a:rPr>
-              <a:t>; </a:t>
-            </a:r>
-            <a:r>
-              <a:rPr lang="en-US" sz="1600" dirty="0" err="1">
-                <a:solidFill>
-                  <a:srgbClr val="000000"/>
-                </a:solidFill>
-                <a:highlight>
-                  <a:srgbClr val="FFFFFF"/>
-                </a:highlight>
-                <a:latin typeface="Consolas" panose="020B0609020204030204" pitchFamily="49" charset="0"/>
-              </a:rPr>
-              <a:t>i</a:t>
-            </a:r>
-            <a:r>
-              <a:rPr lang="en-US" sz="1600" dirty="0">
-                <a:solidFill>
-                  <a:srgbClr val="000000"/>
-                </a:solidFill>
-                <a:highlight>
-                  <a:srgbClr val="FFFFFF"/>
-                </a:highlight>
-                <a:latin typeface="Consolas" panose="020B0609020204030204" pitchFamily="49" charset="0"/>
-              </a:rPr>
-              <a:t> &lt; </a:t>
-            </a:r>
-            <a:r>
-              <a:rPr lang="en-US" sz="1600" dirty="0" err="1">
-                <a:solidFill>
-                  <a:srgbClr val="000000"/>
-                </a:solidFill>
-                <a:highlight>
-                  <a:srgbClr val="FFFFFF"/>
-                </a:highlight>
-                <a:latin typeface="Consolas" panose="020B0609020204030204" pitchFamily="49" charset="0"/>
-              </a:rPr>
-              <a:t>oldData.length</a:t>
-            </a:r>
-            <a:r>
-              <a:rPr lang="en-US" sz="1600" dirty="0">
-                <a:solidFill>
-                  <a:srgbClr val="000000"/>
-                </a:solidFill>
-                <a:highlight>
-                  <a:srgbClr val="FFFFFF"/>
-                </a:highlight>
-                <a:latin typeface="Consolas" panose="020B0609020204030204" pitchFamily="49" charset="0"/>
-              </a:rPr>
-              <a:t>; </a:t>
-            </a:r>
-            <a:r>
-              <a:rPr lang="en-US" sz="1600" dirty="0" err="1">
-                <a:solidFill>
-                  <a:srgbClr val="000000"/>
-                </a:solidFill>
-                <a:highlight>
-                  <a:srgbClr val="FFFFFF"/>
-                </a:highlight>
-                <a:latin typeface="Consolas" panose="020B0609020204030204" pitchFamily="49" charset="0"/>
-              </a:rPr>
-              <a:t>i</a:t>
-            </a:r>
-            <a:r>
-              <a:rPr lang="en-US" sz="1600" dirty="0">
-                <a:solidFill>
-                  <a:srgbClr val="000000"/>
-                </a:solidFill>
-                <a:highlight>
-                  <a:srgbClr val="FFFFFF"/>
-                </a:highlight>
-                <a:latin typeface="Consolas" panose="020B0609020204030204" pitchFamily="49" charset="0"/>
-              </a:rPr>
-              <a:t>++)</a:t>
-            </a:r>
-          </a:p>
-          <a:p>
-            <a:pPr marL="0" indent="0">
-              <a:buNone/>
-            </a:pPr>
-            <a:r>
-              <a:rPr lang="en-US" sz="1600" dirty="0">
-                <a:solidFill>
-                  <a:srgbClr val="000000"/>
-                </a:solidFill>
-                <a:highlight>
-                  <a:srgbClr val="FFFFFF"/>
-                </a:highlight>
-                <a:latin typeface="Consolas" panose="020B0609020204030204" pitchFamily="49" charset="0"/>
-              </a:rPr>
-              <a:t>        data[</a:t>
-            </a:r>
-            <a:r>
-              <a:rPr lang="en-US" sz="1600" dirty="0" err="1">
-                <a:solidFill>
-                  <a:srgbClr val="000000"/>
-                </a:solidFill>
-                <a:highlight>
-                  <a:srgbClr val="FFFFFF"/>
-                </a:highlight>
-                <a:latin typeface="Consolas" panose="020B0609020204030204" pitchFamily="49" charset="0"/>
-              </a:rPr>
-              <a:t>i</a:t>
-            </a:r>
-            <a:r>
-              <a:rPr lang="en-US" sz="1600" dirty="0">
-                <a:solidFill>
-                  <a:srgbClr val="000000"/>
-                </a:solidFill>
-                <a:highlight>
-                  <a:srgbClr val="FFFFFF"/>
-                </a:highlight>
-                <a:latin typeface="Consolas" panose="020B0609020204030204" pitchFamily="49" charset="0"/>
-              </a:rPr>
-              <a:t>] = </a:t>
-            </a:r>
-            <a:r>
-              <a:rPr lang="en-US" sz="1600" dirty="0" err="1">
-                <a:solidFill>
-                  <a:srgbClr val="000000"/>
-                </a:solidFill>
-                <a:highlight>
-                  <a:srgbClr val="FFFFFF"/>
-                </a:highlight>
-                <a:latin typeface="Consolas" panose="020B0609020204030204" pitchFamily="49" charset="0"/>
-              </a:rPr>
-              <a:t>oldData</a:t>
-            </a:r>
-            <a:r>
-              <a:rPr lang="en-US" sz="1600" dirty="0">
-                <a:solidFill>
-                  <a:srgbClr val="000000"/>
-                </a:solidFill>
-                <a:highlight>
-                  <a:srgbClr val="FFFFFF"/>
-                </a:highlight>
-                <a:latin typeface="Consolas" panose="020B0609020204030204" pitchFamily="49" charset="0"/>
-              </a:rPr>
-              <a:t>[</a:t>
-            </a:r>
-            <a:r>
-              <a:rPr lang="en-US" sz="1600" dirty="0" err="1">
-                <a:solidFill>
-                  <a:srgbClr val="000000"/>
-                </a:solidFill>
-                <a:highlight>
-                  <a:srgbClr val="FFFFFF"/>
-                </a:highlight>
-                <a:latin typeface="Consolas" panose="020B0609020204030204" pitchFamily="49" charset="0"/>
-              </a:rPr>
-              <a:t>i</a:t>
-            </a:r>
-            <a:r>
-              <a:rPr lang="en-US" sz="1600" dirty="0">
-                <a:solidFill>
-                  <a:srgbClr val="000000"/>
-                </a:solidFill>
-                <a:highlight>
-                  <a:srgbClr val="FFFFFF"/>
-                </a:highlight>
-                <a:latin typeface="Consolas" panose="020B0609020204030204" pitchFamily="49" charset="0"/>
-              </a:rPr>
-              <a:t>];</a:t>
-            </a:r>
-          </a:p>
-          <a:p>
-            <a:pPr marL="0" indent="0">
-              <a:buNone/>
-            </a:pPr>
-            <a:r>
-              <a:rPr lang="en-US" sz="1600" dirty="0">
-                <a:solidFill>
-                  <a:srgbClr val="000000"/>
-                </a:solidFill>
-                <a:highlight>
-                  <a:srgbClr val="FFFFFF"/>
-                </a:highlight>
-                <a:latin typeface="Consolas" panose="020B0609020204030204" pitchFamily="49" charset="0"/>
-              </a:rPr>
-              <a:t>}</a:t>
-            </a:r>
-            <a:endParaRPr lang="en-US" sz="1600" dirty="0">
-              <a:highlight>
-                <a:srgbClr val="FFFFFF"/>
-              </a:highlight>
-            </a:endParaRPr>
-          </a:p>
-        </p:txBody>
-      </p:sp>
-      <p:sp>
-        <p:nvSpPr>
-          <p:cNvPr id="2" name="Title 1">
-            <a:extLst>
-              <a:ext uri="{FF2B5EF4-FFF2-40B4-BE49-F238E27FC236}">
-                <a16:creationId xmlns:a16="http://schemas.microsoft.com/office/drawing/2014/main" id="{22E69A94-1220-2804-63AB-870822DBD0D0}"/>
-              </a:ext>
-            </a:extLst>
-          </p:cNvPr>
-          <p:cNvSpPr>
-            <a:spLocks noGrp="1"/>
-          </p:cNvSpPr>
-          <p:nvPr>
-            <p:ph type="title"/>
-          </p:nvPr>
-        </p:nvSpPr>
-        <p:spPr/>
-        <p:txBody>
-          <a:bodyPr/>
-          <a:lstStyle/>
-          <a:p>
-            <a:r>
-              <a:rPr lang="en-US" dirty="0"/>
-              <a:t>Amortized Complexity Example - </a:t>
-            </a:r>
-            <a:r>
-              <a:rPr lang="en-US" dirty="0" err="1"/>
-              <a:t>ArrayList</a:t>
-            </a:r>
-            <a:endParaRPr lang="en-US" dirty="0"/>
-          </a:p>
-        </p:txBody>
-      </p:sp>
-      <mc:AlternateContent xmlns:mc="http://schemas.openxmlformats.org/markup-compatibility/2006" xmlns:a14="http://schemas.microsoft.com/office/drawing/2010/main">
-        <mc:Choice Requires="a14">
-          <p:sp>
-            <p:nvSpPr>
-              <p:cNvPr id="4" name="Content Placeholder 3">
-                <a:extLst>
-                  <a:ext uri="{FF2B5EF4-FFF2-40B4-BE49-F238E27FC236}">
-                    <a16:creationId xmlns:a16="http://schemas.microsoft.com/office/drawing/2014/main" id="{015840F2-52BA-DB0C-15EC-2298E887A62B}"/>
-                  </a:ext>
-                </a:extLst>
-              </p:cNvPr>
-              <p:cNvSpPr>
-                <a:spLocks noGrp="1"/>
-              </p:cNvSpPr>
-              <p:nvPr>
-                <p:ph sz="half" idx="2"/>
-              </p:nvPr>
-            </p:nvSpPr>
-            <p:spPr/>
-            <p:txBody>
-              <a:bodyPr>
-                <a:normAutofit/>
-              </a:bodyPr>
-              <a:lstStyle/>
-              <a:p>
-                <a:r>
-                  <a:rPr lang="en-US" dirty="0"/>
-                  <a:t>Amortized Analysis Idea:</a:t>
-                </a:r>
-              </a:p>
-              <a:p>
-                <a:pPr lvl="1"/>
-                <a:r>
-                  <a:rPr lang="en-US" dirty="0"/>
-                  <a:t>Suppose we have a program that in total does </a:t>
-                </a:r>
-                <a14:m>
-                  <m:oMath xmlns:m="http://schemas.openxmlformats.org/officeDocument/2006/math">
-                    <m:r>
-                      <a:rPr lang="en-US" b="0" i="1" smtClean="0">
-                        <a:latin typeface="Cambria Math" panose="02040503050406030204" pitchFamily="18" charset="0"/>
-                      </a:rPr>
-                      <m:t>𝑛</m:t>
-                    </m:r>
-                  </m:oMath>
-                </a14:m>
-                <a:r>
-                  <a:rPr lang="en-US" dirty="0"/>
-                  <a:t> adds.</a:t>
-                </a:r>
-              </a:p>
-              <a:p>
-                <a:pPr lvl="1"/>
-                <a:r>
-                  <a:rPr lang="en-US" dirty="0"/>
-                  <a:t>How much time was spent “on average” across all </a:t>
-                </a:r>
-                <a14:m>
-                  <m:oMath xmlns:m="http://schemas.openxmlformats.org/officeDocument/2006/math">
-                    <m:r>
-                      <a:rPr lang="en-US" b="0" i="1" smtClean="0">
-                        <a:latin typeface="Cambria Math" panose="02040503050406030204" pitchFamily="18" charset="0"/>
-                      </a:rPr>
-                      <m:t>𝑛</m:t>
-                    </m:r>
-                  </m:oMath>
-                </a14:m>
-                <a:r>
-                  <a:rPr lang="en-US" dirty="0"/>
-                  <a:t>?</a:t>
-                </a:r>
-              </a:p>
-              <a:p>
-                <a:r>
-                  <a:rPr lang="en-US" dirty="0"/>
-                  <a:t>Let </a:t>
-                </a:r>
-                <a14:m>
-                  <m:oMath xmlns:m="http://schemas.openxmlformats.org/officeDocument/2006/math">
-                    <m:r>
-                      <a:rPr lang="en-US" b="0" i="1" smtClean="0">
-                        <a:latin typeface="Cambria Math" panose="02040503050406030204" pitchFamily="18" charset="0"/>
-                      </a:rPr>
-                      <m:t>𝑐</m:t>
-                    </m:r>
-                  </m:oMath>
-                </a14:m>
-                <a:r>
-                  <a:rPr lang="en-US" dirty="0"/>
-                  <a:t> be the initial size of </a:t>
-                </a:r>
-                <a:r>
-                  <a:rPr lang="en-US" dirty="0">
-                    <a:latin typeface="Consolas" panose="020B0609020204030204" pitchFamily="49" charset="0"/>
-                  </a:rPr>
-                  <a:t>data</a:t>
-                </a:r>
-              </a:p>
-              <a:p>
-                <a:pPr lvl="1"/>
-                <a:r>
-                  <a:rPr lang="en-US" dirty="0"/>
-                  <a:t>The first </a:t>
-                </a:r>
-                <a14:m>
-                  <m:oMath xmlns:m="http://schemas.openxmlformats.org/officeDocument/2006/math">
-                    <m:r>
-                      <a:rPr lang="en-US" b="0" i="1" smtClean="0">
-                        <a:latin typeface="Cambria Math" panose="02040503050406030204" pitchFamily="18" charset="0"/>
-                      </a:rPr>
-                      <m:t>𝑐</m:t>
-                    </m:r>
-                  </m:oMath>
-                </a14:m>
-                <a:r>
-                  <a:rPr lang="en-US" dirty="0"/>
-                  <a:t> adds take: </a:t>
-                </a:r>
-                <a14:m>
-                  <m:oMath xmlns:m="http://schemas.openxmlformats.org/officeDocument/2006/math">
-                    <m:r>
-                      <a:rPr lang="en-US" b="0" i="1" smtClean="0">
-                        <a:latin typeface="Cambria Math" panose="02040503050406030204" pitchFamily="18" charset="0"/>
-                      </a:rPr>
-                      <m:t>𝑐</m:t>
-                    </m:r>
-                    <m:r>
-                      <a:rPr lang="en-US" b="0" i="1" smtClean="0">
-                        <a:latin typeface="Cambria Math" panose="02040503050406030204" pitchFamily="18" charset="0"/>
-                      </a:rPr>
-                      <m:t>+</m:t>
-                    </m:r>
-                    <m:r>
-                      <a:rPr lang="en-US" b="0" i="1" smtClean="0">
-                        <a:latin typeface="Cambria Math" panose="02040503050406030204" pitchFamily="18" charset="0"/>
-                      </a:rPr>
-                      <m:t>𝑐</m:t>
-                    </m:r>
-                    <m:r>
-                      <a:rPr lang="en-US" b="0" i="1" smtClean="0">
-                        <a:latin typeface="Cambria Math" panose="02040503050406030204" pitchFamily="18" charset="0"/>
-                      </a:rPr>
-                      <m:t>=2</m:t>
-                    </m:r>
-                    <m:r>
-                      <a:rPr lang="en-US" b="0" i="1" smtClean="0">
-                        <a:latin typeface="Cambria Math" panose="02040503050406030204" pitchFamily="18" charset="0"/>
-                      </a:rPr>
-                      <m:t>𝑐</m:t>
-                    </m:r>
-                  </m:oMath>
-                </a14:m>
-                <a:endParaRPr lang="en-US" dirty="0"/>
-              </a:p>
-              <a:p>
-                <a:pPr lvl="1"/>
-                <a:r>
-                  <a:rPr lang="en-US" dirty="0"/>
-                  <a:t>The next </a:t>
-                </a:r>
-                <a14:m>
-                  <m:oMath xmlns:m="http://schemas.openxmlformats.org/officeDocument/2006/math">
-                    <m:r>
-                      <a:rPr lang="en-US" b="0" i="1" smtClean="0">
-                        <a:latin typeface="Cambria Math" panose="02040503050406030204" pitchFamily="18" charset="0"/>
-                      </a:rPr>
-                      <m:t>2</m:t>
-                    </m:r>
-                    <m:r>
-                      <a:rPr lang="en-US" b="0" i="1" smtClean="0">
-                        <a:latin typeface="Cambria Math" panose="02040503050406030204" pitchFamily="18" charset="0"/>
-                      </a:rPr>
-                      <m:t>𝑐</m:t>
-                    </m:r>
-                  </m:oMath>
-                </a14:m>
-                <a:r>
-                  <a:rPr lang="en-US" dirty="0"/>
-                  <a:t> adds: </a:t>
-                </a:r>
-                <a14:m>
-                  <m:oMath xmlns:m="http://schemas.openxmlformats.org/officeDocument/2006/math">
-                    <m:r>
-                      <a:rPr lang="en-US" b="0" i="1" smtClean="0">
-                        <a:latin typeface="Cambria Math" panose="02040503050406030204" pitchFamily="18" charset="0"/>
-                      </a:rPr>
-                      <m:t>2</m:t>
-                    </m:r>
-                    <m:r>
-                      <a:rPr lang="en-US" b="0" i="1" smtClean="0">
-                        <a:latin typeface="Cambria Math" panose="02040503050406030204" pitchFamily="18" charset="0"/>
-                      </a:rPr>
-                      <m:t>𝑐</m:t>
-                    </m:r>
-                    <m:r>
-                      <a:rPr lang="en-US" b="0" i="1" smtClean="0">
-                        <a:latin typeface="Cambria Math" panose="02040503050406030204" pitchFamily="18" charset="0"/>
-                      </a:rPr>
-                      <m:t>+2</m:t>
-                    </m:r>
-                    <m:r>
-                      <a:rPr lang="en-US" b="0" i="1" smtClean="0">
-                        <a:latin typeface="Cambria Math" panose="02040503050406030204" pitchFamily="18" charset="0"/>
-                      </a:rPr>
-                      <m:t>𝑐</m:t>
-                    </m:r>
-                    <m:r>
-                      <a:rPr lang="en-US" b="0" i="1" smtClean="0">
-                        <a:latin typeface="Cambria Math" panose="02040503050406030204" pitchFamily="18" charset="0"/>
-                      </a:rPr>
-                      <m:t>=4</m:t>
-                    </m:r>
-                    <m:r>
-                      <a:rPr lang="en-US" b="0" i="1" smtClean="0">
-                        <a:latin typeface="Cambria Math" panose="02040503050406030204" pitchFamily="18" charset="0"/>
-                      </a:rPr>
-                      <m:t>𝑐</m:t>
-                    </m:r>
-                  </m:oMath>
-                </a14:m>
-                <a:endParaRPr lang="en-US" dirty="0"/>
-              </a:p>
-              <a:p>
-                <a:pPr lvl="1"/>
-                <a:r>
-                  <a:rPr lang="en-US" dirty="0"/>
-                  <a:t>The next </a:t>
-                </a:r>
-                <a14:m>
-                  <m:oMath xmlns:m="http://schemas.openxmlformats.org/officeDocument/2006/math">
-                    <m:r>
-                      <a:rPr lang="en-US" b="0" i="1" smtClean="0">
-                        <a:latin typeface="Cambria Math" panose="02040503050406030204" pitchFamily="18" charset="0"/>
-                      </a:rPr>
-                      <m:t>4</m:t>
-                    </m:r>
-                    <m:r>
-                      <a:rPr lang="en-US" b="0" i="1" smtClean="0">
-                        <a:latin typeface="Cambria Math" panose="02040503050406030204" pitchFamily="18" charset="0"/>
-                      </a:rPr>
-                      <m:t>𝑐</m:t>
-                    </m:r>
-                  </m:oMath>
-                </a14:m>
-                <a:r>
-                  <a:rPr lang="en-US" dirty="0"/>
-                  <a:t> adds: </a:t>
-                </a:r>
-                <a14:m>
-                  <m:oMath xmlns:m="http://schemas.openxmlformats.org/officeDocument/2006/math">
-                    <m:r>
-                      <a:rPr lang="en-US" b="0" i="1" smtClean="0">
-                        <a:latin typeface="Cambria Math" panose="02040503050406030204" pitchFamily="18" charset="0"/>
-                      </a:rPr>
-                      <m:t>4</m:t>
-                    </m:r>
-                    <m:r>
-                      <a:rPr lang="en-US" b="0" i="1" smtClean="0">
-                        <a:latin typeface="Cambria Math" panose="02040503050406030204" pitchFamily="18" charset="0"/>
-                      </a:rPr>
-                      <m:t>𝑐</m:t>
-                    </m:r>
-                    <m:r>
-                      <a:rPr lang="en-US" b="0" i="1" smtClean="0">
-                        <a:latin typeface="Cambria Math" panose="02040503050406030204" pitchFamily="18" charset="0"/>
-                      </a:rPr>
-                      <m:t>+4</m:t>
-                    </m:r>
-                    <m:r>
-                      <a:rPr lang="en-US" b="0" i="1" smtClean="0">
-                        <a:latin typeface="Cambria Math" panose="02040503050406030204" pitchFamily="18" charset="0"/>
-                      </a:rPr>
-                      <m:t>𝑐</m:t>
-                    </m:r>
-                    <m:r>
-                      <a:rPr lang="en-US" b="0" i="1" smtClean="0">
-                        <a:latin typeface="Cambria Math" panose="02040503050406030204" pitchFamily="18" charset="0"/>
-                      </a:rPr>
-                      <m:t>=8</m:t>
-                    </m:r>
-                    <m:r>
-                      <a:rPr lang="en-US" b="0" i="1" smtClean="0">
-                        <a:latin typeface="Cambria Math" panose="02040503050406030204" pitchFamily="18" charset="0"/>
-                      </a:rPr>
-                      <m:t>𝑐</m:t>
-                    </m:r>
-                  </m:oMath>
-                </a14:m>
-                <a:endParaRPr lang="en-US" dirty="0"/>
-              </a:p>
-              <a:p>
-                <a:pPr lvl="1"/>
-                <a:r>
-                  <a:rPr lang="en-US" dirty="0"/>
-                  <a:t>Overall: </a:t>
-                </a:r>
-                <a14:m>
-                  <m:oMath xmlns:m="http://schemas.openxmlformats.org/officeDocument/2006/math">
-                    <m:f>
-                      <m:fPr>
-                        <m:ctrlPr>
-                          <a:rPr lang="en-US" b="0" i="1" smtClean="0">
-                            <a:latin typeface="Cambria Math" panose="02040503050406030204" pitchFamily="18" charset="0"/>
-                          </a:rPr>
-                        </m:ctrlPr>
-                      </m:fPr>
-                      <m:num>
-                        <m:r>
-                          <a:rPr lang="en-US" b="0" i="1" smtClean="0">
-                            <a:latin typeface="Cambria Math" panose="02040503050406030204" pitchFamily="18" charset="0"/>
-                          </a:rPr>
-                          <m:t>14</m:t>
-                        </m:r>
-                        <m:r>
-                          <a:rPr lang="en-US" b="0" i="1" smtClean="0">
-                            <a:latin typeface="Cambria Math" panose="02040503050406030204" pitchFamily="18" charset="0"/>
-                          </a:rPr>
-                          <m:t>𝑐</m:t>
-                        </m:r>
-                      </m:num>
-                      <m:den>
-                        <m:r>
-                          <a:rPr lang="en-US" b="0" i="1" smtClean="0">
-                            <a:latin typeface="Cambria Math" panose="02040503050406030204" pitchFamily="18" charset="0"/>
-                          </a:rPr>
-                          <m:t>7</m:t>
-                        </m:r>
-                        <m:r>
-                          <a:rPr lang="en-US" b="0" i="1" smtClean="0">
-                            <a:latin typeface="Cambria Math" panose="02040503050406030204" pitchFamily="18" charset="0"/>
-                          </a:rPr>
-                          <m:t>𝑐</m:t>
-                        </m:r>
-                      </m:den>
-                    </m:f>
-                    <m:r>
-                      <a:rPr lang="en-US" b="0" i="1" smtClean="0">
-                        <a:latin typeface="Cambria Math" panose="02040503050406030204" pitchFamily="18" charset="0"/>
-                      </a:rPr>
-                      <m:t>=2</m:t>
-                    </m:r>
-                    <m:r>
-                      <a:rPr lang="en-US" b="0" i="1" smtClean="0">
-                        <a:latin typeface="Cambria Math" panose="02040503050406030204" pitchFamily="18" charset="0"/>
-                      </a:rPr>
-                      <m:t>𝑐</m:t>
-                    </m:r>
-                  </m:oMath>
-                </a14:m>
-                <a:endParaRPr lang="en-US" dirty="0"/>
-              </a:p>
-            </p:txBody>
-          </p:sp>
-        </mc:Choice>
-        <mc:Fallback xmlns="">
-          <p:sp>
-            <p:nvSpPr>
-              <p:cNvPr id="4" name="Content Placeholder 3">
-                <a:extLst>
-                  <a:ext uri="{FF2B5EF4-FFF2-40B4-BE49-F238E27FC236}">
-                    <a16:creationId xmlns:a16="http://schemas.microsoft.com/office/drawing/2014/main" id="{015840F2-52BA-DB0C-15EC-2298E887A62B}"/>
-                  </a:ext>
-                </a:extLst>
-              </p:cNvPr>
-              <p:cNvSpPr>
-                <a:spLocks noGrp="1" noRot="1" noChangeAspect="1" noMove="1" noResize="1" noEditPoints="1" noAdjustHandles="1" noChangeArrowheads="1" noChangeShapeType="1" noTextEdit="1"/>
-              </p:cNvSpPr>
-              <p:nvPr>
-                <p:ph sz="half" idx="2"/>
-              </p:nvPr>
-            </p:nvSpPr>
-            <p:spPr>
-              <a:blipFill>
-                <a:blip r:embed="rId3"/>
-                <a:stretch>
-                  <a:fillRect l="-2118" t="-2241"/>
-                </a:stretch>
-              </a:blipFill>
-            </p:spPr>
-            <p:txBody>
-              <a:bodyPr/>
-              <a:lstStyle/>
-              <a:p>
-                <a:r>
-                  <a:rPr lang="en-US">
-                    <a:noFill/>
-                  </a:rPr>
-                  <a:t> </a:t>
-                </a:r>
-              </a:p>
-            </p:txBody>
-          </p:sp>
-        </mc:Fallback>
-      </mc:AlternateContent>
-      <p:sp>
-        <p:nvSpPr>
-          <p:cNvPr id="3" name="TextBox 2">
-            <a:extLst>
-              <a:ext uri="{FF2B5EF4-FFF2-40B4-BE49-F238E27FC236}">
-                <a16:creationId xmlns:a16="http://schemas.microsoft.com/office/drawing/2014/main" id="{16D5D4F1-8370-387D-F6D8-21C5C80D4F42}"/>
-              </a:ext>
-            </a:extLst>
-          </p:cNvPr>
-          <p:cNvSpPr txBox="1"/>
-          <p:nvPr/>
-        </p:nvSpPr>
-        <p:spPr>
-          <a:xfrm>
-            <a:off x="3394362" y="2766559"/>
-            <a:ext cx="2975957" cy="923330"/>
-          </a:xfrm>
-          <a:prstGeom prst="rect">
-            <a:avLst/>
-          </a:prstGeom>
-          <a:noFill/>
-          <a:ln>
-            <a:solidFill>
-              <a:srgbClr val="FF0000"/>
-            </a:solidFill>
-          </a:ln>
-        </p:spPr>
-        <p:txBody>
-          <a:bodyPr wrap="square" rtlCol="0">
-            <a:spAutoFit/>
-          </a:bodyPr>
-          <a:lstStyle/>
-          <a:p>
-            <a:r>
-              <a:rPr lang="en-US" dirty="0">
-                <a:solidFill>
-                  <a:srgbClr val="FF0000"/>
-                </a:solidFill>
-              </a:rPr>
-              <a:t>Every time we resize, we earn </a:t>
-            </a:r>
-            <a:r>
-              <a:rPr lang="en-US" dirty="0" err="1">
-                <a:solidFill>
-                  <a:srgbClr val="FF0000"/>
-                </a:solidFill>
-                <a:latin typeface="Consolas" panose="020B0609020204030204" pitchFamily="49" charset="0"/>
-              </a:rPr>
-              <a:t>data.length</a:t>
-            </a:r>
-            <a:r>
-              <a:rPr lang="en-US" dirty="0">
-                <a:solidFill>
-                  <a:srgbClr val="FF0000"/>
-                </a:solidFill>
-              </a:rPr>
-              <a:t> more adds before the next resize!</a:t>
-            </a:r>
-          </a:p>
-        </p:txBody>
-      </p:sp>
-      <p:cxnSp>
-        <p:nvCxnSpPr>
-          <p:cNvPr id="7" name="Straight Arrow Connector 6">
-            <a:extLst>
-              <a:ext uri="{FF2B5EF4-FFF2-40B4-BE49-F238E27FC236}">
-                <a16:creationId xmlns:a16="http://schemas.microsoft.com/office/drawing/2014/main" id="{1CA4A632-C2AC-7864-4F4E-4A5F61D15BA8}"/>
-              </a:ext>
-            </a:extLst>
-          </p:cNvPr>
-          <p:cNvCxnSpPr>
-            <a:cxnSpLocks/>
-            <a:stCxn id="3" idx="2"/>
-          </p:cNvCxnSpPr>
-          <p:nvPr/>
-        </p:nvCxnSpPr>
-        <p:spPr>
-          <a:xfrm flipH="1">
-            <a:off x="4339244" y="3689889"/>
-            <a:ext cx="543097" cy="907049"/>
-          </a:xfrm>
-          <a:prstGeom prst="straightConnector1">
-            <a:avLst/>
-          </a:prstGeom>
-          <a:ln>
-            <a:solidFill>
-              <a:srgbClr val="FF0000"/>
-            </a:solidFill>
-            <a:tailEnd type="triangle"/>
-          </a:ln>
-        </p:spPr>
-        <p:style>
-          <a:lnRef idx="1">
-            <a:schemeClr val="accent1"/>
-          </a:lnRef>
-          <a:fillRef idx="0">
-            <a:schemeClr val="accent1"/>
-          </a:fillRef>
-          <a:effectRef idx="0">
-            <a:schemeClr val="accent1"/>
-          </a:effectRef>
-          <a:fontRef idx="minor">
-            <a:schemeClr val="tx1"/>
-          </a:fontRef>
-        </p:style>
-      </p:cxnSp>
-    </p:spTree>
-    <p:extLst>
-      <p:ext uri="{BB962C8B-B14F-4D97-AF65-F5344CB8AC3E}">
-        <p14:creationId xmlns:p14="http://schemas.microsoft.com/office/powerpoint/2010/main" val="349862771"/>
-      </p:ext>
-    </p:extLst>
-  </p:cSld>
-  <p:clrMapOvr>
-    <a:masterClrMapping/>
-  </p:clrMapOvr>
-</p:sld>
-</file>
-
-<file path=ppt/slides/slide31.xml><?xml version="1.0" encoding="utf-8"?>
-<p:sld xmlns:a="http://schemas.openxmlformats.org/drawingml/2006/main" xmlns:r="http://schemas.openxmlformats.org/officeDocument/2006/relationships" xmlns:p="http://schemas.openxmlformats.org/presentationml/2006/main">
-  <p:cSld>
-    <p:spTree>
-      <p:nvGrpSpPr>
-        <p:cNvPr id="1" name=""/>
-        <p:cNvGrpSpPr/>
-        <p:nvPr/>
-      </p:nvGrpSpPr>
-      <p:grpSpPr>
-        <a:xfrm>
-          <a:off x="0" y="0"/>
-          <a:ext cx="0" cy="0"/>
-          <a:chOff x="0" y="0"/>
-          <a:chExt cx="0" cy="0"/>
-        </a:xfrm>
-      </p:grpSpPr>
-      <p:sp>
-        <p:nvSpPr>
-          <p:cNvPr id="2" name="Title 1">
-            <a:extLst>
-              <a:ext uri="{FF2B5EF4-FFF2-40B4-BE49-F238E27FC236}">
-                <a16:creationId xmlns:a16="http://schemas.microsoft.com/office/drawing/2014/main" id="{AE837711-2C9F-C400-7B2E-F7113BCCD397}"/>
-              </a:ext>
-            </a:extLst>
-          </p:cNvPr>
-          <p:cNvSpPr>
-            <a:spLocks noGrp="1"/>
-          </p:cNvSpPr>
-          <p:nvPr>
-            <p:ph type="title"/>
-          </p:nvPr>
-        </p:nvSpPr>
-        <p:spPr/>
-        <p:txBody>
-          <a:bodyPr/>
-          <a:lstStyle/>
-          <a:p>
-            <a:r>
-              <a:rPr lang="en-US" dirty="0"/>
-              <a:t>Amortized Analysis Analogy</a:t>
-            </a:r>
-          </a:p>
-        </p:txBody>
-      </p:sp>
-      <p:sp>
-        <p:nvSpPr>
-          <p:cNvPr id="3" name="Content Placeholder 2">
-            <a:extLst>
-              <a:ext uri="{FF2B5EF4-FFF2-40B4-BE49-F238E27FC236}">
-                <a16:creationId xmlns:a16="http://schemas.microsoft.com/office/drawing/2014/main" id="{E995483E-FA76-F83C-AF97-9517E9B1D9AB}"/>
-              </a:ext>
-            </a:extLst>
-          </p:cNvPr>
-          <p:cNvSpPr>
-            <a:spLocks noGrp="1"/>
-          </p:cNvSpPr>
-          <p:nvPr>
-            <p:ph idx="1"/>
-          </p:nvPr>
-        </p:nvSpPr>
-        <p:spPr/>
-        <p:txBody>
-          <a:bodyPr/>
-          <a:lstStyle/>
-          <a:p>
-            <a:r>
-              <a:rPr lang="en-US" dirty="0"/>
-              <a:t>Suppose I’d like to park in a lot where they charge $10 per day to park</a:t>
-            </a:r>
-          </a:p>
-          <a:p>
-            <a:r>
-              <a:rPr lang="en-US" dirty="0"/>
-              <a:t>If you are caught in the lot without paying you are given a warning</a:t>
-            </a:r>
-          </a:p>
-          <a:p>
-            <a:r>
-              <a:rPr lang="en-US" dirty="0"/>
-              <a:t>If you get 3 warnings, you are charged a $25 fine, and your warnings reset.</a:t>
-            </a:r>
-          </a:p>
-          <a:p>
-            <a:r>
-              <a:rPr lang="en-US" dirty="0"/>
-              <a:t>Should you actually pay to park?</a:t>
-            </a:r>
-          </a:p>
-          <a:p>
-            <a:pPr lvl="1"/>
-            <a:r>
-              <a:rPr lang="en-US" dirty="0"/>
-              <a:t>If you pay every day then you pay an average of $10 per day</a:t>
-            </a:r>
-          </a:p>
-          <a:p>
-            <a:pPr lvl="1"/>
-            <a:r>
-              <a:rPr lang="en-US" dirty="0"/>
-              <a:t>If you do not pay then for every three days parking costs $0+$0+$25, for an average of $8.33 per day</a:t>
-            </a:r>
-          </a:p>
-          <a:p>
-            <a:pPr lvl="2"/>
-            <a:r>
-              <a:rPr lang="en-US" dirty="0"/>
-              <a:t>This is an amortized analysis</a:t>
-            </a:r>
-          </a:p>
-        </p:txBody>
-      </p:sp>
-    </p:spTree>
-    <p:extLst>
-      <p:ext uri="{BB962C8B-B14F-4D97-AF65-F5344CB8AC3E}">
-        <p14:creationId xmlns:p14="http://schemas.microsoft.com/office/powerpoint/2010/main" val="948737531"/>
-      </p:ext>
-    </p:extLst>
-  </p:cSld>
-  <p:clrMapOvr>
-    <a:masterClrMapping/>
-  </p:clrMapOvr>
-</p:sld>
-</file>
-
-<file path=ppt/slides/slide4.xml><?xml version="1.0" encoding="utf-8"?>
+<file path=ppt/slides/slide6.xml><?xml version="1.0" encoding="utf-8"?>
 <p:sld xmlns:a="http://schemas.openxmlformats.org/drawingml/2006/main" xmlns:r="http://schemas.openxmlformats.org/officeDocument/2006/relationships" xmlns:p="http://schemas.openxmlformats.org/presentationml/2006/main">
   <p:cSld>
     <p:spTree>
@@ -23369,10 +25628,61 @@
           </p:txBody>
         </p:sp>
       </p:grpSp>
+      <mc:AlternateContent xmlns:mc="http://schemas.openxmlformats.org/markup-compatibility/2006">
+        <mc:Choice xmlns:p14="http://schemas.microsoft.com/office/powerpoint/2010/main" Requires="p14">
+          <p:contentPart p14:bwMode="auto" r:id="rId2">
+            <p14:nvContentPartPr>
+              <p14:cNvPr id="29" name="Ink 28">
+                <a:extLst>
+                  <a:ext uri="{FF2B5EF4-FFF2-40B4-BE49-F238E27FC236}">
+                    <a16:creationId xmlns:a16="http://schemas.microsoft.com/office/drawing/2014/main" id="{F02C589E-3554-7720-7300-CF521488E11D}"/>
+                  </a:ext>
+                </a:extLst>
+              </p14:cNvPr>
+              <p14:cNvContentPartPr/>
+              <p14:nvPr/>
+            </p14:nvContentPartPr>
+            <p14:xfrm>
+              <a:off x="550080" y="924480"/>
+              <a:ext cx="8271720" cy="4923720"/>
+            </p14:xfrm>
+          </p:contentPart>
+        </mc:Choice>
+        <mc:Fallback>
+          <p:pic>
+            <p:nvPicPr>
+              <p:cNvPr id="29" name="Ink 28">
+                <a:extLst>
+                  <a:ext uri="{FF2B5EF4-FFF2-40B4-BE49-F238E27FC236}">
+                    <a16:creationId xmlns:a16="http://schemas.microsoft.com/office/drawing/2014/main" id="{F02C589E-3554-7720-7300-CF521488E11D}"/>
+                  </a:ext>
+                </a:extLst>
+              </p:cNvPr>
+              <p:cNvPicPr/>
+              <p:nvPr/>
+            </p:nvPicPr>
+            <p:blipFill>
+              <a:blip r:embed="rId3"/>
+              <a:stretch>
+                <a:fillRect/>
+              </a:stretch>
+            </p:blipFill>
+            <p:spPr>
+              <a:xfrm>
+                <a:off x="540720" y="915120"/>
+                <a:ext cx="8290440" cy="4942440"/>
+              </a:xfrm>
+              <a:prstGeom prst="rect">
+                <a:avLst/>
+              </a:prstGeom>
+            </p:spPr>
+          </p:pic>
+        </mc:Fallback>
+      </mc:AlternateContent>
     </p:spTree>
     <p:extLst>
       <p:ext uri="{BB962C8B-B14F-4D97-AF65-F5344CB8AC3E}">
-        <p14:creationId xmlns:p14="http://schemas.microsoft.com/office/powerpoint/2010/main" val="2562382216"/>
+        <p14:creationId xmlns:p14="http://schemas.microsoft.com/office/powerpoint/2010/main" val="2952960087"/>
       </p:ext>
     </p:extLst>
   </p:cSld>
@@ -23382,7 +25692,7 @@
 </p:sld>
 </file>
 
-<file path=ppt/slides/slide5.xml><?xml version="1.0" encoding="utf-8"?>
+<file path=ppt/slides/slide7.xml><?xml version="1.0" encoding="utf-8"?>
 <p:sld xmlns:a="http://schemas.openxmlformats.org/drawingml/2006/main" xmlns:r="http://schemas.openxmlformats.org/officeDocument/2006/relationships" xmlns:p="http://schemas.openxmlformats.org/presentationml/2006/main">
   <p:cSld>
     <p:spTree>
@@ -26277,10 +28587,61 @@
           </p:txBody>
         </p:sp>
       </p:grpSp>
+      <mc:AlternateContent xmlns:mc="http://schemas.openxmlformats.org/markup-compatibility/2006">
+        <mc:Choice xmlns:p14="http://schemas.microsoft.com/office/powerpoint/2010/main" Requires="p14">
+          <p:contentPart p14:bwMode="auto" r:id="rId2">
+            <p14:nvContentPartPr>
+              <p14:cNvPr id="29" name="Ink 28">
+                <a:extLst>
+                  <a:ext uri="{FF2B5EF4-FFF2-40B4-BE49-F238E27FC236}">
+                    <a16:creationId xmlns:a16="http://schemas.microsoft.com/office/drawing/2014/main" id="{5566D538-71F1-7704-95D8-16DAAAAFAA2E}"/>
+                  </a:ext>
+                </a:extLst>
+              </p14:cNvPr>
+              <p14:cNvContentPartPr/>
+              <p14:nvPr/>
+            </p14:nvContentPartPr>
+            <p14:xfrm>
+              <a:off x="347040" y="2476800"/>
+              <a:ext cx="10453320" cy="4133520"/>
+            </p14:xfrm>
+          </p:contentPart>
+        </mc:Choice>
+        <mc:Fallback>
+          <p:pic>
+            <p:nvPicPr>
+              <p:cNvPr id="29" name="Ink 28">
+                <a:extLst>
+                  <a:ext uri="{FF2B5EF4-FFF2-40B4-BE49-F238E27FC236}">
+                    <a16:creationId xmlns:a16="http://schemas.microsoft.com/office/drawing/2014/main" id="{5566D538-71F1-7704-95D8-16DAAAAFAA2E}"/>
+                  </a:ext>
+                </a:extLst>
+              </p:cNvPr>
+              <p:cNvPicPr/>
+              <p:nvPr/>
+            </p:nvPicPr>
+            <p:blipFill>
+              <a:blip r:embed="rId3"/>
+              <a:stretch>
+                <a:fillRect/>
+              </a:stretch>
+            </p:blipFill>
+            <p:spPr>
+              <a:xfrm>
+                <a:off x="337680" y="2467440"/>
+                <a:ext cx="10472040" cy="4152240"/>
+              </a:xfrm>
+              <a:prstGeom prst="rect">
+                <a:avLst/>
+              </a:prstGeom>
+            </p:spPr>
+          </p:pic>
+        </mc:Fallback>
+      </mc:AlternateContent>
     </p:spTree>
     <p:extLst>
       <p:ext uri="{BB962C8B-B14F-4D97-AF65-F5344CB8AC3E}">
-        <p14:creationId xmlns:p14="http://schemas.microsoft.com/office/powerpoint/2010/main" val="2254727802"/>
+        <p14:creationId xmlns:p14="http://schemas.microsoft.com/office/powerpoint/2010/main" val="2023668565"/>
       </p:ext>
     </p:extLst>
   </p:cSld>
@@ -26290,7 +28651,7 @@
 </p:sld>
 </file>
 
-<file path=ppt/slides/slide6.xml><?xml version="1.0" encoding="utf-8"?>
+<file path=ppt/slides/slide8.xml><?xml version="1.0" encoding="utf-8"?>
 <p:sld xmlns:a="http://schemas.openxmlformats.org/drawingml/2006/main" xmlns:r="http://schemas.openxmlformats.org/officeDocument/2006/relationships" xmlns:p="http://schemas.openxmlformats.org/presentationml/2006/main">
   <p:cSld>
     <p:spTree>
@@ -26334,94 +28695,6 @@
             <a:r>
               <a:rPr lang="en-US" dirty="0"/>
               <a:t>“Circular” Array Queue (Algorithms)</a:t>
-            </a:r>
-          </a:p>
-        </p:txBody>
-      </p:sp>
-      <p:sp>
-        <p:nvSpPr>
-          <p:cNvPr id="3" name="Content Placeholder 2">
-            <a:extLst>
-              <a:ext uri="{FF2B5EF4-FFF2-40B4-BE49-F238E27FC236}">
-                <a16:creationId xmlns:a16="http://schemas.microsoft.com/office/drawing/2014/main" id="{1376FFCF-F09D-CE03-F022-D39AD4A97E9E}"/>
-              </a:ext>
-              <a:ext uri="{C183D7F6-B498-43B3-948B-1728B52AA6E4}">
-                <adec:decorative xmlns:adec="http://schemas.microsoft.com/office/drawing/2017/decorative" val="0"/>
-              </a:ext>
-            </a:extLst>
-          </p:cNvPr>
-          <p:cNvSpPr>
-            <a:spLocks noGrp="1"/>
-          </p:cNvSpPr>
-          <p:nvPr>
-            <p:ph idx="1"/>
-          </p:nvPr>
-        </p:nvSpPr>
-        <p:spPr>
-          <a:xfrm>
-            <a:off x="268946" y="2505200"/>
-            <a:ext cx="10515600" cy="4351338"/>
-          </a:xfrm>
-        </p:spPr>
-        <p:txBody>
-          <a:bodyPr/>
-          <a:lstStyle/>
-          <a:p>
-            <a:r>
-              <a:rPr lang="en-US" dirty="0"/>
-              <a:t>Queue represented as an array of items</a:t>
-            </a:r>
-          </a:p>
-          <a:p>
-            <a:pPr lvl="1"/>
-            <a:r>
-              <a:rPr lang="en-US" dirty="0">
-                <a:solidFill>
-                  <a:srgbClr val="0070C0"/>
-                </a:solidFill>
-              </a:rPr>
-              <a:t>A “front” index to indicate the oldest item in the queue</a:t>
-            </a:r>
-          </a:p>
-          <a:p>
-            <a:pPr lvl="1"/>
-            <a:r>
-              <a:rPr lang="en-US" dirty="0">
-                <a:solidFill>
-                  <a:schemeClr val="accent2">
-                    <a:lumMod val="75000"/>
-                  </a:schemeClr>
-                </a:solidFill>
-              </a:rPr>
-              <a:t>A “back” index to indicate the most recent item in the queue</a:t>
-            </a:r>
-          </a:p>
-          <a:p>
-            <a:r>
-              <a:rPr lang="en-US" dirty="0"/>
-              <a:t>enqueue Procedure:</a:t>
-            </a:r>
-          </a:p>
-          <a:p>
-            <a:endParaRPr lang="en-US" dirty="0"/>
-          </a:p>
-          <a:p>
-            <a:r>
-              <a:rPr lang="en-US" dirty="0"/>
-              <a:t>dequeue Procedure:</a:t>
-            </a:r>
-          </a:p>
-          <a:p>
-            <a:endParaRPr lang="en-US" dirty="0"/>
-          </a:p>
-          <a:p>
-            <a:r>
-              <a:rPr lang="en-US" dirty="0" err="1"/>
-              <a:t>isEmpty</a:t>
-            </a:r>
-            <a:r>
-              <a:rPr lang="en-US" dirty="0"/>
-              <a:t> Procedure:</a:t>
             </a:r>
           </a:p>
         </p:txBody>
@@ -27757,6 +30030,94 @@
       </p:grpSp>
       <p:sp>
         <p:nvSpPr>
+          <p:cNvPr id="3" name="Content Placeholder 2">
+            <a:extLst>
+              <a:ext uri="{FF2B5EF4-FFF2-40B4-BE49-F238E27FC236}">
+                <a16:creationId xmlns:a16="http://schemas.microsoft.com/office/drawing/2014/main" id="{1376FFCF-F09D-CE03-F022-D39AD4A97E9E}"/>
+              </a:ext>
+              <a:ext uri="{C183D7F6-B498-43B3-948B-1728B52AA6E4}">
+                <adec:decorative xmlns:adec="http://schemas.microsoft.com/office/drawing/2017/decorative" val="0"/>
+              </a:ext>
+            </a:extLst>
+          </p:cNvPr>
+          <p:cNvSpPr>
+            <a:spLocks noGrp="1"/>
+          </p:cNvSpPr>
+          <p:nvPr>
+            <p:ph idx="1"/>
+          </p:nvPr>
+        </p:nvSpPr>
+        <p:spPr>
+          <a:xfrm>
+            <a:off x="268946" y="2291840"/>
+            <a:ext cx="10515600" cy="4351338"/>
+          </a:xfrm>
+        </p:spPr>
+        <p:txBody>
+          <a:bodyPr/>
+          <a:lstStyle/>
+          <a:p>
+            <a:r>
+              <a:rPr lang="en-US" dirty="0"/>
+              <a:t>Queue represented as an array of items</a:t>
+            </a:r>
+          </a:p>
+          <a:p>
+            <a:pPr lvl="1"/>
+            <a:r>
+              <a:rPr lang="en-US" dirty="0">
+                <a:solidFill>
+                  <a:srgbClr val="0070C0"/>
+                </a:solidFill>
+              </a:rPr>
+              <a:t>A “front” index to indicate the oldest item in the queue</a:t>
+            </a:r>
+          </a:p>
+          <a:p>
+            <a:pPr lvl="1"/>
+            <a:r>
+              <a:rPr lang="en-US" dirty="0">
+                <a:solidFill>
+                  <a:schemeClr val="accent2">
+                    <a:lumMod val="75000"/>
+                  </a:schemeClr>
+                </a:solidFill>
+              </a:rPr>
+              <a:t>A “back” index to indicate the most recent item in the queue</a:t>
+            </a:r>
+          </a:p>
+          <a:p>
+            <a:r>
+              <a:rPr lang="en-US" dirty="0"/>
+              <a:t>enqueue Procedure:</a:t>
+            </a:r>
+          </a:p>
+          <a:p>
+            <a:endParaRPr lang="en-US" dirty="0"/>
+          </a:p>
+          <a:p>
+            <a:r>
+              <a:rPr lang="en-US" dirty="0"/>
+              <a:t>dequeue Procedure:</a:t>
+            </a:r>
+          </a:p>
+          <a:p>
+            <a:endParaRPr lang="en-US" dirty="0"/>
+          </a:p>
+          <a:p>
+            <a:r>
+              <a:rPr lang="en-US" dirty="0" err="1"/>
+              <a:t>isEmpty</a:t>
+            </a:r>
+            <a:r>
+              <a:rPr lang="en-US" dirty="0"/>
+              <a:t> Procedure:</a:t>
+            </a:r>
+          </a:p>
+        </p:txBody>
+      </p:sp>
+      <p:sp>
+        <p:nvSpPr>
           <p:cNvPr id="28" name="TextBox 27">
             <a:extLst>
               <a:ext uri="{FF2B5EF4-FFF2-40B4-BE49-F238E27FC236}">
@@ -27772,7 +30133,7 @@
         </p:nvSpPr>
         <p:spPr>
           <a:xfrm>
-            <a:off x="3717972" y="3671711"/>
+            <a:off x="4998426" y="3556474"/>
             <a:ext cx="4668140" cy="1169551"/>
           </a:xfrm>
           <a:prstGeom prst="rect">
@@ -27870,7 +30231,7 @@
         </p:nvSpPr>
         <p:spPr>
           <a:xfrm>
-            <a:off x="4879046" y="4619018"/>
+            <a:off x="4998426" y="4650213"/>
             <a:ext cx="4828372" cy="1600438"/>
           </a:xfrm>
           <a:prstGeom prst="rect">
@@ -27985,7 +30346,7 @@
         </p:nvSpPr>
         <p:spPr>
           <a:xfrm>
-            <a:off x="3413466" y="5976795"/>
+            <a:off x="4998426" y="6147441"/>
             <a:ext cx="3677566" cy="738664"/>
           </a:xfrm>
           <a:prstGeom prst="rect">
@@ -28052,8 +30413,8 @@
         </p:nvSpPr>
         <p:spPr>
           <a:xfrm>
-            <a:off x="8805672" y="4517136"/>
-            <a:ext cx="2971326" cy="369332"/>
+            <a:off x="10196034" y="4327047"/>
+            <a:ext cx="1813086" cy="646331"/>
           </a:xfrm>
           <a:prstGeom prst="rect">
             <a:avLst/>
@@ -28066,7 +30427,7 @@
           </a:ln>
         </p:spPr>
         <p:txBody>
-          <a:bodyPr wrap="none" rtlCol="0">
+          <a:bodyPr wrap="square" rtlCol="0">
             <a:spAutoFit/>
           </a:bodyPr>
           <a:lstStyle/>
@@ -28082,10 +30443,61 @@
           </a:p>
         </p:txBody>
       </p:sp>
+      <mc:AlternateContent xmlns:mc="http://schemas.openxmlformats.org/markup-compatibility/2006">
+        <mc:Choice xmlns:p14="http://schemas.microsoft.com/office/powerpoint/2010/main" Requires="p14">
+          <p:contentPart p14:bwMode="auto" r:id="rId2">
+            <p14:nvContentPartPr>
+              <p14:cNvPr id="33" name="Ink 32">
+                <a:extLst>
+                  <a:ext uri="{FF2B5EF4-FFF2-40B4-BE49-F238E27FC236}">
+                    <a16:creationId xmlns:a16="http://schemas.microsoft.com/office/drawing/2014/main" id="{796ECC05-CA05-27EC-9790-C7DD9345988B}"/>
+                  </a:ext>
+                </a:extLst>
+              </p14:cNvPr>
+              <p14:cNvContentPartPr/>
+              <p14:nvPr/>
+            </p14:nvContentPartPr>
+            <p14:xfrm>
+              <a:off x="510120" y="3906720"/>
+              <a:ext cx="8735760" cy="2486160"/>
+            </p14:xfrm>
+          </p:contentPart>
+        </mc:Choice>
+        <mc:Fallback>
+          <p:pic>
+            <p:nvPicPr>
+              <p:cNvPr id="33" name="Ink 32">
+                <a:extLst>
+                  <a:ext uri="{FF2B5EF4-FFF2-40B4-BE49-F238E27FC236}">
+                    <a16:creationId xmlns:a16="http://schemas.microsoft.com/office/drawing/2014/main" id="{796ECC05-CA05-27EC-9790-C7DD9345988B}"/>
+                  </a:ext>
+                </a:extLst>
+              </p:cNvPr>
+              <p:cNvPicPr/>
+              <p:nvPr/>
+            </p:nvPicPr>
+            <p:blipFill>
+              <a:blip r:embed="rId3"/>
+              <a:stretch>
+                <a:fillRect/>
+              </a:stretch>
+            </p:blipFill>
+            <p:spPr>
+              <a:xfrm>
+                <a:off x="500760" y="3897360"/>
+                <a:ext cx="8754480" cy="2504880"/>
+              </a:xfrm>
+              <a:prstGeom prst="rect">
+                <a:avLst/>
+              </a:prstGeom>
+            </p:spPr>
+          </p:pic>
+        </mc:Fallback>
+      </mc:AlternateContent>
     </p:spTree>
     <p:extLst>
       <p:ext uri="{BB962C8B-B14F-4D97-AF65-F5344CB8AC3E}">
-        <p14:creationId xmlns:p14="http://schemas.microsoft.com/office/powerpoint/2010/main" val="1165435876"/>
+        <p14:creationId xmlns:p14="http://schemas.microsoft.com/office/powerpoint/2010/main" val="3348092633"/>
       </p:ext>
     </p:extLst>
   </p:cSld>
@@ -28181,7 +30593,7 @@
 </p:sld>
 </file>
 
-<file path=ppt/slides/slide7.xml><?xml version="1.0" encoding="utf-8"?>
+<file path=ppt/slides/slide9.xml><?xml version="1.0" encoding="utf-8"?>
 <p:sld xmlns:a="http://schemas.openxmlformats.org/drawingml/2006/main" xmlns:r="http://schemas.openxmlformats.org/officeDocument/2006/relationships" xmlns:p="http://schemas.openxmlformats.org/presentationml/2006/main">
   <p:cSld>
     <p:spTree>
@@ -28226,91 +30638,6 @@
           </a:p>
         </p:txBody>
       </p:sp>
-      <p:sp>
-        <p:nvSpPr>
-          <p:cNvPr id="3" name="Content Placeholder 2">
-            <a:extLst>
-              <a:ext uri="{FF2B5EF4-FFF2-40B4-BE49-F238E27FC236}">
-                <a16:creationId xmlns:a16="http://schemas.microsoft.com/office/drawing/2014/main" id="{1376FFCF-F09D-CE03-F022-D39AD4A97E9E}"/>
-              </a:ext>
-            </a:extLst>
-          </p:cNvPr>
-          <p:cNvSpPr>
-            <a:spLocks noGrp="1"/>
-          </p:cNvSpPr>
-          <p:nvPr>
-            <p:ph idx="1"/>
-          </p:nvPr>
-        </p:nvSpPr>
-        <p:spPr>
-          <a:xfrm>
-            <a:off x="268946" y="2505200"/>
-            <a:ext cx="10515600" cy="4351338"/>
-          </a:xfrm>
-        </p:spPr>
-        <p:txBody>
-          <a:bodyPr/>
-          <a:lstStyle/>
-          <a:p>
-            <a:r>
-              <a:rPr lang="en-US" dirty="0"/>
-              <a:t>Queue represented as an array of items</a:t>
-            </a:r>
-          </a:p>
-          <a:p>
-            <a:pPr lvl="1"/>
-            <a:r>
-              <a:rPr lang="en-US" dirty="0">
-                <a:solidFill>
-                  <a:srgbClr val="0070C0"/>
-                </a:solidFill>
-              </a:rPr>
-              <a:t>A “front” index to indicate the oldest item in the queue</a:t>
-            </a:r>
-          </a:p>
-          <a:p>
-            <a:pPr lvl="1"/>
-            <a:r>
-              <a:rPr lang="en-US" dirty="0">
-                <a:solidFill>
-                  <a:schemeClr val="accent2">
-                    <a:lumMod val="75000"/>
-                  </a:schemeClr>
-                </a:solidFill>
-              </a:rPr>
-              <a:t>A “back” index to indicate the most recent item in the queue</a:t>
-            </a:r>
-          </a:p>
-          <a:p>
-            <a:r>
-              <a:rPr lang="en-US" dirty="0"/>
-              <a:t>enqueue Procedure:</a:t>
-            </a:r>
-          </a:p>
-          <a:p>
-            <a:endParaRPr lang="en-US" dirty="0"/>
-          </a:p>
-          <a:p>
-            <a:r>
-              <a:rPr lang="en-US" dirty="0"/>
-              <a:t>dequeue Procedure:</a:t>
-            </a:r>
-          </a:p>
-          <a:p>
-            <a:endParaRPr lang="en-US" dirty="0"/>
-          </a:p>
-          <a:p>
-            <a:r>
-              <a:rPr lang="en-US" dirty="0" err="1"/>
-              <a:t>isEmpty</a:t>
-            </a:r>
-            <a:r>
-              <a:rPr lang="en-US" dirty="0"/>
-              <a:t> Procedure:</a:t>
-            </a:r>
-          </a:p>
-        </p:txBody>
-      </p:sp>
       <p:grpSp>
         <p:nvGrpSpPr>
           <p:cNvPr id="29" name="Group 28" descr="An illustration of a circular array queue data structure. The elements of the queue are contained in an array. Because the array will not necessarily be occupied starting from index 0, we additionally have a field called &quot;front&quot; that indicates which index of the array contains the first item in the queue, and a field called &quot;back&quot; that indicates which index in teh array contains the last item in the queue.">
@@ -28325,7 +30652,7 @@
         </p:nvGrpSpPr>
         <p:grpSpPr>
           <a:xfrm>
-            <a:off x="1300186" y="1403212"/>
+            <a:off x="1300186" y="1266578"/>
             <a:ext cx="6519765" cy="1221610"/>
             <a:chOff x="1300186" y="1403212"/>
             <a:chExt cx="6519765" cy="1221610"/>
@@ -29639,6 +31966,91 @@
       </p:grpSp>
       <p:sp>
         <p:nvSpPr>
+          <p:cNvPr id="3" name="Content Placeholder 2">
+            <a:extLst>
+              <a:ext uri="{FF2B5EF4-FFF2-40B4-BE49-F238E27FC236}">
+                <a16:creationId xmlns:a16="http://schemas.microsoft.com/office/drawing/2014/main" id="{1376FFCF-F09D-CE03-F022-D39AD4A97E9E}"/>
+              </a:ext>
+            </a:extLst>
+          </p:cNvPr>
+          <p:cNvSpPr>
+            <a:spLocks noGrp="1"/>
+          </p:cNvSpPr>
+          <p:nvPr>
+            <p:ph idx="1"/>
+          </p:nvPr>
+        </p:nvSpPr>
+        <p:spPr>
+          <a:xfrm>
+            <a:off x="268946" y="2316011"/>
+            <a:ext cx="10515600" cy="4351338"/>
+          </a:xfrm>
+        </p:spPr>
+        <p:txBody>
+          <a:bodyPr/>
+          <a:lstStyle/>
+          <a:p>
+            <a:r>
+              <a:rPr lang="en-US" dirty="0"/>
+              <a:t>Queue represented as an array of items</a:t>
+            </a:r>
+          </a:p>
+          <a:p>
+            <a:pPr lvl="1"/>
+            <a:r>
+              <a:rPr lang="en-US" dirty="0">
+                <a:solidFill>
+                  <a:srgbClr val="0070C0"/>
+                </a:solidFill>
+              </a:rPr>
+              <a:t>A “front” index to indicate the oldest item in the queue</a:t>
+            </a:r>
+          </a:p>
+          <a:p>
+            <a:pPr lvl="1"/>
+            <a:r>
+              <a:rPr lang="en-US" dirty="0">
+                <a:solidFill>
+                  <a:schemeClr val="accent2">
+                    <a:lumMod val="75000"/>
+                  </a:schemeClr>
+                </a:solidFill>
+              </a:rPr>
+              <a:t>A “back” index to indicate the most recent item in the queue</a:t>
+            </a:r>
+          </a:p>
+          <a:p>
+            <a:r>
+              <a:rPr lang="en-US" dirty="0"/>
+              <a:t>enqueue Procedure:</a:t>
+            </a:r>
+          </a:p>
+          <a:p>
+            <a:endParaRPr lang="en-US" dirty="0"/>
+          </a:p>
+          <a:p>
+            <a:r>
+              <a:rPr lang="en-US" dirty="0"/>
+              <a:t>dequeue Procedure:</a:t>
+            </a:r>
+          </a:p>
+          <a:p>
+            <a:endParaRPr lang="en-US" dirty="0"/>
+          </a:p>
+          <a:p>
+            <a:r>
+              <a:rPr lang="en-US" dirty="0" err="1"/>
+              <a:t>isEmpty</a:t>
+            </a:r>
+            <a:r>
+              <a:rPr lang="en-US" dirty="0"/>
+              <a:t> Procedure:</a:t>
+            </a:r>
+          </a:p>
+        </p:txBody>
+      </p:sp>
+      <p:sp>
+        <p:nvSpPr>
           <p:cNvPr id="32" name="TextBox 31">
             <a:extLst>
               <a:ext uri="{FF2B5EF4-FFF2-40B4-BE49-F238E27FC236}">
@@ -29651,7 +32063,7 @@
         </p:nvSpPr>
         <p:spPr>
           <a:xfrm>
-            <a:off x="3717972" y="3671711"/>
+            <a:off x="5725443" y="3440486"/>
             <a:ext cx="5150352" cy="1384995"/>
           </a:xfrm>
           <a:prstGeom prst="rect">
@@ -29767,7 +32179,7 @@
         </p:nvSpPr>
         <p:spPr>
           <a:xfrm>
-            <a:off x="5790906" y="4772906"/>
+            <a:off x="5725443" y="4661212"/>
             <a:ext cx="5327136" cy="1600438"/>
           </a:xfrm>
           <a:prstGeom prst="rect">
@@ -29882,7 +32294,7 @@
         </p:nvSpPr>
         <p:spPr>
           <a:xfrm>
-            <a:off x="3413466" y="5976795"/>
+            <a:off x="5790906" y="6182846"/>
             <a:ext cx="4057454" cy="738664"/>
           </a:xfrm>
           <a:prstGeom prst="rect">
@@ -29949,7 +32361,7 @@
         </p:nvSpPr>
         <p:spPr>
           <a:xfrm>
-            <a:off x="9082568" y="2182501"/>
+            <a:off x="9868969" y="2262995"/>
             <a:ext cx="2117759" cy="923330"/>
           </a:xfrm>
           <a:prstGeom prst="rect">
@@ -30001,10 +32413,61 @@
           </a:p>
         </p:txBody>
       </p:sp>
+      <mc:AlternateContent xmlns:mc="http://schemas.openxmlformats.org/markup-compatibility/2006">
+        <mc:Choice xmlns:p14="http://schemas.microsoft.com/office/powerpoint/2010/main" Requires="p14">
+          <p:contentPart p14:bwMode="auto" r:id="rId2">
+            <p14:nvContentPartPr>
+              <p14:cNvPr id="30" name="Ink 29">
+                <a:extLst>
+                  <a:ext uri="{FF2B5EF4-FFF2-40B4-BE49-F238E27FC236}">
+                    <a16:creationId xmlns:a16="http://schemas.microsoft.com/office/drawing/2014/main" id="{50366BFF-14E5-A80C-CC56-97B921AC165D}"/>
+                  </a:ext>
+                </a:extLst>
+              </p14:cNvPr>
+              <p14:cNvContentPartPr/>
+              <p14:nvPr/>
+            </p14:nvContentPartPr>
+            <p14:xfrm>
+              <a:off x="1047600" y="1619640"/>
+              <a:ext cx="9390240" cy="2446560"/>
+            </p14:xfrm>
+          </p:contentPart>
+        </mc:Choice>
+        <mc:Fallback>
+          <p:pic>
+            <p:nvPicPr>
+              <p:cNvPr id="30" name="Ink 29">
+                <a:extLst>
+                  <a:ext uri="{FF2B5EF4-FFF2-40B4-BE49-F238E27FC236}">
+                    <a16:creationId xmlns:a16="http://schemas.microsoft.com/office/drawing/2014/main" id="{50366BFF-14E5-A80C-CC56-97B921AC165D}"/>
+                  </a:ext>
+                </a:extLst>
+              </p:cNvPr>
+              <p:cNvPicPr/>
+              <p:nvPr/>
+            </p:nvPicPr>
+            <p:blipFill>
+              <a:blip r:embed="rId3"/>
+              <a:stretch>
+                <a:fillRect/>
+              </a:stretch>
+            </p:blipFill>
+            <p:spPr>
+              <a:xfrm>
+                <a:off x="1038240" y="1610280"/>
+                <a:ext cx="9408960" cy="2465280"/>
+              </a:xfrm>
+              <a:prstGeom prst="rect">
+                <a:avLst/>
+              </a:prstGeom>
+            </p:spPr>
+          </p:pic>
+        </mc:Fallback>
+      </mc:AlternateContent>
     </p:spTree>
     <p:extLst>
       <p:ext uri="{BB962C8B-B14F-4D97-AF65-F5344CB8AC3E}">
-        <p14:creationId xmlns:p14="http://schemas.microsoft.com/office/powerpoint/2010/main" val="2538202624"/>
+        <p14:creationId xmlns:p14="http://schemas.microsoft.com/office/powerpoint/2010/main" val="4037612449"/>
       </p:ext>
     </p:extLst>
   </p:cSld>
@@ -30097,285 +32560,6 @@
       <p:bldP spid="28" grpId="0" animBg="1"/>
     </p:bldLst>
   </p:timing>
-</p:sld>
-</file>
-
-<file path=ppt/slides/slide8.xml><?xml version="1.0" encoding="utf-8"?>
-<p:sld xmlns:a="http://schemas.openxmlformats.org/drawingml/2006/main" xmlns:r="http://schemas.openxmlformats.org/officeDocument/2006/relationships" xmlns:p="http://schemas.openxmlformats.org/presentationml/2006/main">
-  <p:cSld>
-    <p:spTree>
-      <p:nvGrpSpPr>
-        <p:cNvPr id="1" name=""/>
-        <p:cNvGrpSpPr/>
-        <p:nvPr/>
-      </p:nvGrpSpPr>
-      <p:grpSpPr>
-        <a:xfrm>
-          <a:off x="0" y="0"/>
-          <a:ext cx="0" cy="0"/>
-          <a:chOff x="0" y="0"/>
-          <a:chExt cx="0" cy="0"/>
-        </a:xfrm>
-      </p:grpSpPr>
-      <p:sp>
-        <p:nvSpPr>
-          <p:cNvPr id="2" name="Title 1">
-            <a:extLst>
-              <a:ext uri="{FF2B5EF4-FFF2-40B4-BE49-F238E27FC236}">
-                <a16:creationId xmlns:a16="http://schemas.microsoft.com/office/drawing/2014/main" id="{FB3450B6-F0B1-452F-736A-CBAD5DE567E1}"/>
-              </a:ext>
-            </a:extLst>
-          </p:cNvPr>
-          <p:cNvSpPr>
-            <a:spLocks noGrp="1"/>
-          </p:cNvSpPr>
-          <p:nvPr>
-            <p:ph type="title"/>
-          </p:nvPr>
-        </p:nvSpPr>
-        <p:spPr/>
-        <p:txBody>
-          <a:bodyPr/>
-          <a:lstStyle/>
-          <a:p>
-            <a:r>
-              <a:rPr lang="en-US" dirty="0"/>
-              <a:t>Linked List vs. Circular Array</a:t>
-            </a:r>
-          </a:p>
-        </p:txBody>
-      </p:sp>
-      <p:sp>
-        <p:nvSpPr>
-          <p:cNvPr id="3" name="Content Placeholder 2">
-            <a:extLst>
-              <a:ext uri="{FF2B5EF4-FFF2-40B4-BE49-F238E27FC236}">
-                <a16:creationId xmlns:a16="http://schemas.microsoft.com/office/drawing/2014/main" id="{E1FB6DFD-BFD3-6A83-79CC-23335BC24C61}"/>
-              </a:ext>
-            </a:extLst>
-          </p:cNvPr>
-          <p:cNvSpPr>
-            <a:spLocks noGrp="1"/>
-          </p:cNvSpPr>
-          <p:nvPr>
-            <p:ph idx="1"/>
-          </p:nvPr>
-        </p:nvSpPr>
-        <p:spPr/>
-        <p:txBody>
-          <a:bodyPr/>
-          <a:lstStyle/>
-          <a:p>
-            <a:r>
-              <a:rPr lang="en-US" dirty="0"/>
-              <a:t>Let’s Summarize the benefits and drawbacks of each</a:t>
-            </a:r>
-          </a:p>
-          <a:p>
-            <a:pPr lvl="1"/>
-            <a:r>
-              <a:rPr lang="en-US" dirty="0"/>
-              <a:t>Circular array is “cache friendly” because of contiguous memory</a:t>
-            </a:r>
-          </a:p>
-          <a:p>
-            <a:pPr lvl="1"/>
-            <a:r>
-              <a:rPr lang="en-US" dirty="0"/>
-              <a:t>Circular array’s resizing will take time (linear time to resize)</a:t>
-            </a:r>
-          </a:p>
-          <a:p>
-            <a:pPr lvl="1"/>
-            <a:r>
-              <a:rPr lang="en-US" dirty="0"/>
-              <a:t>Circular arrays use less memory</a:t>
-            </a:r>
-          </a:p>
-          <a:p>
-            <a:pPr lvl="1"/>
-            <a:r>
-              <a:rPr lang="en-US" dirty="0"/>
-              <a:t>No resizing for linked nodes</a:t>
-            </a:r>
-          </a:p>
-          <a:p>
-            <a:pPr lvl="1"/>
-            <a:r>
-              <a:rPr lang="en-US" dirty="0"/>
-              <a:t>Circular array may have extra unused indices</a:t>
-            </a:r>
-          </a:p>
-        </p:txBody>
-      </p:sp>
-    </p:spTree>
-    <p:extLst>
-      <p:ext uri="{BB962C8B-B14F-4D97-AF65-F5344CB8AC3E}">
-        <p14:creationId xmlns:p14="http://schemas.microsoft.com/office/powerpoint/2010/main" val="1374528974"/>
-      </p:ext>
-    </p:extLst>
-  </p:cSld>
-  <p:clrMapOvr>
-    <a:masterClrMapping/>
-  </p:clrMapOvr>
-</p:sld>
-</file>
-
-<file path=ppt/slides/slide9.xml><?xml version="1.0" encoding="utf-8"?>
-<p:sld xmlns:a="http://schemas.openxmlformats.org/drawingml/2006/main" xmlns:r="http://schemas.openxmlformats.org/officeDocument/2006/relationships" xmlns:p="http://schemas.openxmlformats.org/presentationml/2006/main">
-  <p:cSld>
-    <p:spTree>
-      <p:nvGrpSpPr>
-        <p:cNvPr id="1" name=""/>
-        <p:cNvGrpSpPr/>
-        <p:nvPr/>
-      </p:nvGrpSpPr>
-      <p:grpSpPr>
-        <a:xfrm>
-          <a:off x="0" y="0"/>
-          <a:ext cx="0" cy="0"/>
-          <a:chOff x="0" y="0"/>
-          <a:chExt cx="0" cy="0"/>
-        </a:xfrm>
-      </p:grpSpPr>
-      <p:sp>
-        <p:nvSpPr>
-          <p:cNvPr id="2" name="Title 1">
-            <a:extLst>
-              <a:ext uri="{FF2B5EF4-FFF2-40B4-BE49-F238E27FC236}">
-                <a16:creationId xmlns:a16="http://schemas.microsoft.com/office/drawing/2014/main" id="{D70D41E5-465C-EBB5-E9CD-029376B833DF}"/>
-              </a:ext>
-            </a:extLst>
-          </p:cNvPr>
-          <p:cNvSpPr>
-            <a:spLocks noGrp="1"/>
-          </p:cNvSpPr>
-          <p:nvPr>
-            <p:ph type="title"/>
-          </p:nvPr>
-        </p:nvSpPr>
-        <p:spPr/>
-        <p:txBody>
-          <a:bodyPr/>
-          <a:lstStyle/>
-          <a:p>
-            <a:r>
-              <a:rPr lang="en-US" dirty="0"/>
-              <a:t>ADT: Stack</a:t>
-            </a:r>
-          </a:p>
-        </p:txBody>
-      </p:sp>
-      <p:sp>
-        <p:nvSpPr>
-          <p:cNvPr id="3" name="Content Placeholder 2">
-            <a:extLst>
-              <a:ext uri="{FF2B5EF4-FFF2-40B4-BE49-F238E27FC236}">
-                <a16:creationId xmlns:a16="http://schemas.microsoft.com/office/drawing/2014/main" id="{B5EF048E-DA88-5227-7793-0EE138E7390F}"/>
-              </a:ext>
-            </a:extLst>
-          </p:cNvPr>
-          <p:cNvSpPr>
-            <a:spLocks noGrp="1"/>
-          </p:cNvSpPr>
-          <p:nvPr>
-            <p:ph idx="1"/>
-          </p:nvPr>
-        </p:nvSpPr>
-        <p:spPr/>
-        <p:txBody>
-          <a:bodyPr>
-            <a:normAutofit/>
-          </a:bodyPr>
-          <a:lstStyle/>
-          <a:p>
-            <a:r>
-              <a:rPr lang="en-US" dirty="0"/>
-              <a:t>What is it?</a:t>
-            </a:r>
-          </a:p>
-          <a:p>
-            <a:pPr lvl="1"/>
-            <a:r>
-              <a:rPr lang="en-US" dirty="0"/>
-              <a:t>A “Last In First Out” (LIFO) collection of items (sometimes called FILO)</a:t>
-            </a:r>
-          </a:p>
-          <a:p>
-            <a:r>
-              <a:rPr lang="en-US" dirty="0"/>
-              <a:t>What operations do we need?</a:t>
-            </a:r>
-          </a:p>
-          <a:p>
-            <a:pPr lvl="1"/>
-            <a:r>
-              <a:rPr lang="en-US" dirty="0"/>
-              <a:t>push</a:t>
-            </a:r>
-          </a:p>
-          <a:p>
-            <a:pPr lvl="2"/>
-            <a:r>
-              <a:rPr lang="en-US" dirty="0"/>
-              <a:t>Add a new item onto the stack</a:t>
-            </a:r>
-          </a:p>
-          <a:p>
-            <a:pPr lvl="1"/>
-            <a:r>
-              <a:rPr lang="en-US" dirty="0"/>
-              <a:t>peek</a:t>
-            </a:r>
-          </a:p>
-          <a:p>
-            <a:pPr lvl="2"/>
-            <a:r>
-              <a:rPr lang="en-US" dirty="0"/>
-              <a:t>Return the value of the most recently pushed item</a:t>
-            </a:r>
-          </a:p>
-          <a:p>
-            <a:pPr lvl="1"/>
-            <a:r>
-              <a:rPr lang="en-US" dirty="0"/>
-              <a:t>pop</a:t>
-            </a:r>
-          </a:p>
-          <a:p>
-            <a:pPr lvl="2"/>
-            <a:r>
-              <a:rPr lang="en-US" dirty="0"/>
-              <a:t>Return the value of the most recently pushed item and remove it from the stack</a:t>
-            </a:r>
-          </a:p>
-          <a:p>
-            <a:pPr lvl="1"/>
-            <a:r>
-              <a:rPr lang="en-US" dirty="0" err="1"/>
-              <a:t>isEmpty</a:t>
-            </a:r>
-            <a:endParaRPr lang="en-US" dirty="0"/>
-          </a:p>
-          <a:p>
-            <a:pPr lvl="2"/>
-            <a:r>
-              <a:rPr lang="en-US" dirty="0"/>
-              <a:t>Indicate whether or not there are items still on the stack</a:t>
-            </a:r>
-          </a:p>
-        </p:txBody>
-      </p:sp>
-    </p:spTree>
-    <p:extLst>
-      <p:ext uri="{BB962C8B-B14F-4D97-AF65-F5344CB8AC3E}">
-        <p14:creationId xmlns:p14="http://schemas.microsoft.com/office/powerpoint/2010/main" val="39125618"/>
-      </p:ext>
-    </p:extLst>
-  </p:cSld>
-  <p:clrMapOvr>
-    <a:masterClrMapping/>
-  </p:clrMapOvr>
 </p:sld>
 </file>
 
